--- a/Dissemination/Weible_Defense.pptx
+++ b/Dissemination/Weible_Defense.pptx
@@ -5,7 +5,7 @@
     <p:sldMasterId id="2147483648" r:id="rId1"/>
   </p:sldMasterIdLst>
   <p:notesMasterIdLst>
-    <p:notesMasterId r:id="rId38"/>
+    <p:notesMasterId r:id="rId39"/>
   </p:notesMasterIdLst>
   <p:sldIdLst>
     <p:sldId id="256" r:id="rId2"/>
@@ -18,32 +18,33 @@
     <p:sldId id="267" r:id="rId9"/>
     <p:sldId id="258" r:id="rId10"/>
     <p:sldId id="278" r:id="rId11"/>
-    <p:sldId id="259" r:id="rId12"/>
-    <p:sldId id="282" r:id="rId13"/>
-    <p:sldId id="271" r:id="rId14"/>
-    <p:sldId id="273" r:id="rId15"/>
-    <p:sldId id="277" r:id="rId16"/>
-    <p:sldId id="275" r:id="rId17"/>
-    <p:sldId id="283" r:id="rId18"/>
-    <p:sldId id="284" r:id="rId19"/>
-    <p:sldId id="288" r:id="rId20"/>
-    <p:sldId id="286" r:id="rId21"/>
-    <p:sldId id="301" r:id="rId22"/>
-    <p:sldId id="261" r:id="rId23"/>
-    <p:sldId id="285" r:id="rId24"/>
-    <p:sldId id="294" r:id="rId25"/>
-    <p:sldId id="295" r:id="rId26"/>
-    <p:sldId id="296" r:id="rId27"/>
-    <p:sldId id="270" r:id="rId28"/>
-    <p:sldId id="302" r:id="rId29"/>
-    <p:sldId id="297" r:id="rId30"/>
-    <p:sldId id="287" r:id="rId31"/>
-    <p:sldId id="300" r:id="rId32"/>
-    <p:sldId id="298" r:id="rId33"/>
-    <p:sldId id="290" r:id="rId34"/>
-    <p:sldId id="299" r:id="rId35"/>
-    <p:sldId id="266" r:id="rId36"/>
-    <p:sldId id="304" r:id="rId37"/>
+    <p:sldId id="306" r:id="rId12"/>
+    <p:sldId id="307" r:id="rId13"/>
+    <p:sldId id="282" r:id="rId14"/>
+    <p:sldId id="271" r:id="rId15"/>
+    <p:sldId id="273" r:id="rId16"/>
+    <p:sldId id="277" r:id="rId17"/>
+    <p:sldId id="275" r:id="rId18"/>
+    <p:sldId id="283" r:id="rId19"/>
+    <p:sldId id="284" r:id="rId20"/>
+    <p:sldId id="288" r:id="rId21"/>
+    <p:sldId id="286" r:id="rId22"/>
+    <p:sldId id="301" r:id="rId23"/>
+    <p:sldId id="261" r:id="rId24"/>
+    <p:sldId id="285" r:id="rId25"/>
+    <p:sldId id="294" r:id="rId26"/>
+    <p:sldId id="295" r:id="rId27"/>
+    <p:sldId id="296" r:id="rId28"/>
+    <p:sldId id="270" r:id="rId29"/>
+    <p:sldId id="302" r:id="rId30"/>
+    <p:sldId id="297" r:id="rId31"/>
+    <p:sldId id="287" r:id="rId32"/>
+    <p:sldId id="300" r:id="rId33"/>
+    <p:sldId id="298" r:id="rId34"/>
+    <p:sldId id="290" r:id="rId35"/>
+    <p:sldId id="299" r:id="rId36"/>
+    <p:sldId id="266" r:id="rId37"/>
+    <p:sldId id="304" r:id="rId38"/>
   </p:sldIdLst>
   <p:sldSz cx="12192000" cy="6858000"/>
   <p:notesSz cx="6858000" cy="9144000"/>
@@ -153,7 +154,7 @@
 <file path=ppt/revisionInfo.xml><?xml version="1.0" encoding="utf-8"?>
 <p1510:revInfo xmlns:a="http://schemas.openxmlformats.org/drawingml/2006/main" xmlns:r="http://schemas.openxmlformats.org/officeDocument/2006/relationships" xmlns:p1510="http://schemas.microsoft.com/office/powerpoint/2015/10/main">
   <p1510:revLst>
-    <p1510:client id="{55250329-9472-4EB4-95DC-0A3648275C70}" v="186" dt="2026-04-07T17:16:34.538"/>
+    <p1510:client id="{55250329-9472-4EB4-95DC-0A3648275C70}" v="202" dt="2026-04-23T14:55:00.439"/>
   </p1510:revLst>
 </p1510:revInfo>
 </file>
@@ -163,12 +164,12 @@
   <pc:docChgLst>
     <pc:chgData name="Ezra Weible" userId="67bcaf2f89c4552e" providerId="LiveId" clId="{E4E19776-AA89-4579-B0CB-50FEF10C4E93}"/>
     <pc:docChg chg="undo redo custSel addSld delSld modSld sldOrd">
-      <pc:chgData name="Ezra Weible" userId="67bcaf2f89c4552e" providerId="LiveId" clId="{E4E19776-AA89-4579-B0CB-50FEF10C4E93}" dt="2026-04-07T20:56:03.178" v="21888" actId="20577"/>
+      <pc:chgData name="Ezra Weible" userId="67bcaf2f89c4552e" providerId="LiveId" clId="{E4E19776-AA89-4579-B0CB-50FEF10C4E93}" dt="2026-04-23T14:55:52.315" v="23283" actId="47"/>
       <pc:docMkLst>
         <pc:docMk/>
       </pc:docMkLst>
       <pc:sldChg chg="modSp mod modNotesTx">
-        <pc:chgData name="Ezra Weible" userId="67bcaf2f89c4552e" providerId="LiveId" clId="{E4E19776-AA89-4579-B0CB-50FEF10C4E93}" dt="2026-04-07T17:27:31.494" v="19637" actId="1076"/>
+        <pc:chgData name="Ezra Weible" userId="67bcaf2f89c4552e" providerId="LiveId" clId="{E4E19776-AA89-4579-B0CB-50FEF10C4E93}" dt="2026-04-23T14:42:50.395" v="23104" actId="20577"/>
         <pc:sldMkLst>
           <pc:docMk/>
           <pc:sldMk cId="875189208" sldId="256"/>
@@ -182,7 +183,7 @@
           </ac:spMkLst>
         </pc:spChg>
         <pc:spChg chg="mod">
-          <ac:chgData name="Ezra Weible" userId="67bcaf2f89c4552e" providerId="LiveId" clId="{E4E19776-AA89-4579-B0CB-50FEF10C4E93}" dt="2026-04-07T17:27:31.494" v="19637" actId="1076"/>
+          <ac:chgData name="Ezra Weible" userId="67bcaf2f89c4552e" providerId="LiveId" clId="{E4E19776-AA89-4579-B0CB-50FEF10C4E93}" dt="2026-04-23T14:42:50.395" v="23104" actId="20577"/>
           <ac:spMkLst>
             <pc:docMk/>
             <pc:sldMk cId="875189208" sldId="256"/>
@@ -228,76 +229,252 @@
           </ac:spMkLst>
         </pc:spChg>
       </pc:sldChg>
-      <pc:sldChg chg="addSp delSp modSp mod modAnim modNotesTx">
-        <pc:chgData name="Ezra Weible" userId="67bcaf2f89c4552e" providerId="LiveId" clId="{E4E19776-AA89-4579-B0CB-50FEF10C4E93}" dt="2026-04-07T17:23:54.027" v="19621" actId="20577"/>
+      <pc:sldChg chg="addSp delSp modSp del mod delAnim modAnim modNotesTx">
+        <pc:chgData name="Ezra Weible" userId="67bcaf2f89c4552e" providerId="LiveId" clId="{E4E19776-AA89-4579-B0CB-50FEF10C4E93}" dt="2026-04-23T14:55:52.315" v="23283" actId="47"/>
         <pc:sldMkLst>
           <pc:docMk/>
           <pc:sldMk cId="2767281801" sldId="259"/>
         </pc:sldMkLst>
         <pc:spChg chg="mod">
-          <ac:chgData name="Ezra Weible" userId="67bcaf2f89c4552e" providerId="LiveId" clId="{E4E19776-AA89-4579-B0CB-50FEF10C4E93}" dt="2026-04-03T02:30:41.847" v="1395" actId="14100"/>
+          <ac:chgData name="Ezra Weible" userId="67bcaf2f89c4552e" providerId="LiveId" clId="{E4E19776-AA89-4579-B0CB-50FEF10C4E93}" dt="2026-04-23T02:32:52.958" v="22771" actId="1076"/>
+          <ac:spMkLst>
+            <pc:docMk/>
+            <pc:sldMk cId="2767281801" sldId="259"/>
+            <ac:spMk id="2" creationId="{33795986-277D-56D4-4D36-CEF315D807C2}"/>
+          </ac:spMkLst>
+        </pc:spChg>
+        <pc:spChg chg="mod">
+          <ac:chgData name="Ezra Weible" userId="67bcaf2f89c4552e" providerId="LiveId" clId="{E4E19776-AA89-4579-B0CB-50FEF10C4E93}" dt="2026-04-23T02:28:59.414" v="22717" actId="20577"/>
           <ac:spMkLst>
             <pc:docMk/>
             <pc:sldMk cId="2767281801" sldId="259"/>
             <ac:spMk id="3" creationId="{41478F2E-9D04-8D83-7477-95FC9D46E58A}"/>
           </ac:spMkLst>
         </pc:spChg>
-        <pc:graphicFrameChg chg="add mod modGraphic">
-          <ac:chgData name="Ezra Weible" userId="67bcaf2f89c4552e" providerId="LiveId" clId="{E4E19776-AA89-4579-B0CB-50FEF10C4E93}" dt="2026-04-03T02:25:59.927" v="1348" actId="207"/>
+        <pc:graphicFrameChg chg="add mod">
+          <ac:chgData name="Ezra Weible" userId="67bcaf2f89c4552e" providerId="LiveId" clId="{E4E19776-AA89-4579-B0CB-50FEF10C4E93}" dt="2026-04-23T02:31:01.361" v="22737" actId="1076"/>
+          <ac:graphicFrameMkLst>
+            <pc:docMk/>
+            <pc:sldMk cId="2767281801" sldId="259"/>
+            <ac:graphicFrameMk id="4" creationId="{EEF54E59-DA3C-9A7B-34B3-0A559DCCFA2B}"/>
+          </ac:graphicFrameMkLst>
+        </pc:graphicFrameChg>
+        <pc:graphicFrameChg chg="add mod">
+          <ac:chgData name="Ezra Weible" userId="67bcaf2f89c4552e" providerId="LiveId" clId="{E4E19776-AA89-4579-B0CB-50FEF10C4E93}" dt="2026-04-23T02:31:01.361" v="22737" actId="1076"/>
+          <ac:graphicFrameMkLst>
+            <pc:docMk/>
+            <pc:sldMk cId="2767281801" sldId="259"/>
+            <ac:graphicFrameMk id="5" creationId="{39BEDD7B-48D4-C0C2-7E99-251B12BBCB9C}"/>
+          </ac:graphicFrameMkLst>
+        </pc:graphicFrameChg>
+        <pc:graphicFrameChg chg="add del mod modGraphic">
+          <ac:chgData name="Ezra Weible" userId="67bcaf2f89c4552e" providerId="LiveId" clId="{E4E19776-AA89-4579-B0CB-50FEF10C4E93}" dt="2026-04-23T02:31:32.027" v="22746" actId="478"/>
           <ac:graphicFrameMkLst>
             <pc:docMk/>
             <pc:sldMk cId="2767281801" sldId="259"/>
             <ac:graphicFrameMk id="6" creationId="{8EF1DD9A-15D6-1ECB-B162-E7432C084779}"/>
           </ac:graphicFrameMkLst>
         </pc:graphicFrameChg>
+        <pc:graphicFrameChg chg="add mod">
+          <ac:chgData name="Ezra Weible" userId="67bcaf2f89c4552e" providerId="LiveId" clId="{E4E19776-AA89-4579-B0CB-50FEF10C4E93}" dt="2026-04-23T02:31:01.361" v="22737" actId="1076"/>
+          <ac:graphicFrameMkLst>
+            <pc:docMk/>
+            <pc:sldMk cId="2767281801" sldId="259"/>
+            <ac:graphicFrameMk id="7" creationId="{B9964C7A-11C2-F130-5835-0CDF576A30FA}"/>
+          </ac:graphicFrameMkLst>
+        </pc:graphicFrameChg>
         <pc:graphicFrameChg chg="add mod modGraphic">
-          <ac:chgData name="Ezra Weible" userId="67bcaf2f89c4552e" providerId="LiveId" clId="{E4E19776-AA89-4579-B0CB-50FEF10C4E93}" dt="2026-04-03T02:28:19.538" v="1364" actId="1076"/>
+          <ac:chgData name="Ezra Weible" userId="67bcaf2f89c4552e" providerId="LiveId" clId="{E4E19776-AA89-4579-B0CB-50FEF10C4E93}" dt="2026-04-23T02:45:02.327" v="22933" actId="207"/>
           <ac:graphicFrameMkLst>
             <pc:docMk/>
             <pc:sldMk cId="2767281801" sldId="259"/>
             <ac:graphicFrameMk id="9" creationId="{0CF60853-D038-8390-3029-9427AF7CE1C0}"/>
           </ac:graphicFrameMkLst>
         </pc:graphicFrameChg>
+        <pc:graphicFrameChg chg="add mod">
+          <ac:chgData name="Ezra Weible" userId="67bcaf2f89c4552e" providerId="LiveId" clId="{E4E19776-AA89-4579-B0CB-50FEF10C4E93}" dt="2026-04-23T02:31:01.361" v="22737" actId="1076"/>
+          <ac:graphicFrameMkLst>
+            <pc:docMk/>
+            <pc:sldMk cId="2767281801" sldId="259"/>
+            <ac:graphicFrameMk id="14" creationId="{F7AE1498-434D-F4F6-664C-706D74FDDF55}"/>
+          </ac:graphicFrameMkLst>
+        </pc:graphicFrameChg>
         <pc:graphicFrameChg chg="add del mod modGraphic">
-          <ac:chgData name="Ezra Weible" userId="67bcaf2f89c4552e" providerId="LiveId" clId="{E4E19776-AA89-4579-B0CB-50FEF10C4E93}" dt="2026-04-03T02:32:33.848" v="1411" actId="1076"/>
+          <ac:chgData name="Ezra Weible" userId="67bcaf2f89c4552e" providerId="LiveId" clId="{E4E19776-AA89-4579-B0CB-50FEF10C4E93}" dt="2026-04-23T02:31:23.362" v="22743" actId="478"/>
           <ac:graphicFrameMkLst>
             <pc:docMk/>
             <pc:sldMk cId="2767281801" sldId="259"/>
             <ac:graphicFrameMk id="18" creationId="{07B8F4BF-D49C-65D1-E8D0-977C142BBEF9}"/>
           </ac:graphicFrameMkLst>
         </pc:graphicFrameChg>
-        <pc:graphicFrameChg chg="add mod ord modGraphic">
-          <ac:chgData name="Ezra Weible" userId="67bcaf2f89c4552e" providerId="LiveId" clId="{E4E19776-AA89-4579-B0CB-50FEF10C4E93}" dt="2026-04-03T02:30:53.286" v="1397" actId="166"/>
+        <pc:graphicFrameChg chg="add mod">
+          <ac:chgData name="Ezra Weible" userId="67bcaf2f89c4552e" providerId="LiveId" clId="{E4E19776-AA89-4579-B0CB-50FEF10C4E93}" dt="2026-04-23T02:31:01.361" v="22737" actId="1076"/>
+          <ac:graphicFrameMkLst>
+            <pc:docMk/>
+            <pc:sldMk cId="2767281801" sldId="259"/>
+            <ac:graphicFrameMk id="19" creationId="{2E7A1A06-59D9-6EDA-DEF6-87E0EBA6ABF2}"/>
+          </ac:graphicFrameMkLst>
+        </pc:graphicFrameChg>
+        <pc:graphicFrameChg chg="add del mod ord modGraphic">
+          <ac:chgData name="Ezra Weible" userId="67bcaf2f89c4552e" providerId="LiveId" clId="{E4E19776-AA89-4579-B0CB-50FEF10C4E93}" dt="2026-04-23T02:31:40.551" v="22748" actId="478"/>
           <ac:graphicFrameMkLst>
             <pc:docMk/>
             <pc:sldMk cId="2767281801" sldId="259"/>
             <ac:graphicFrameMk id="20" creationId="{43150FF3-A97D-FF45-69B7-ACDBB8FF05F4}"/>
           </ac:graphicFrameMkLst>
         </pc:graphicFrameChg>
-        <pc:graphicFrameChg chg="add mod ord">
-          <ac:chgData name="Ezra Weible" userId="67bcaf2f89c4552e" providerId="LiveId" clId="{E4E19776-AA89-4579-B0CB-50FEF10C4E93}" dt="2026-04-03T02:28:51.953" v="1371" actId="1076"/>
+        <pc:graphicFrameChg chg="add del mod">
+          <ac:chgData name="Ezra Weible" userId="67bcaf2f89c4552e" providerId="LiveId" clId="{E4E19776-AA89-4579-B0CB-50FEF10C4E93}" dt="2026-04-23T02:50:07.525" v="23006" actId="478"/>
+          <ac:graphicFrameMkLst>
+            <pc:docMk/>
+            <pc:sldMk cId="2767281801" sldId="259"/>
+            <ac:graphicFrameMk id="21" creationId="{99AD24D1-F270-609C-9049-718514D7DC70}"/>
+          </ac:graphicFrameMkLst>
+        </pc:graphicFrameChg>
+        <pc:graphicFrameChg chg="add del mod">
+          <ac:chgData name="Ezra Weible" userId="67bcaf2f89c4552e" providerId="LiveId" clId="{E4E19776-AA89-4579-B0CB-50FEF10C4E93}" dt="2026-04-23T02:50:07.525" v="23006" actId="478"/>
+          <ac:graphicFrameMkLst>
+            <pc:docMk/>
+            <pc:sldMk cId="2767281801" sldId="259"/>
+            <ac:graphicFrameMk id="23" creationId="{A20F1D31-41B8-516A-0716-B4B444704D42}"/>
+          </ac:graphicFrameMkLst>
+        </pc:graphicFrameChg>
+        <pc:graphicFrameChg chg="add del mod modGraphic">
+          <ac:chgData name="Ezra Weible" userId="67bcaf2f89c4552e" providerId="LiveId" clId="{E4E19776-AA89-4579-B0CB-50FEF10C4E93}" dt="2026-04-23T02:50:11.245" v="23007" actId="478"/>
+          <ac:graphicFrameMkLst>
+            <pc:docMk/>
+            <pc:sldMk cId="2767281801" sldId="259"/>
+            <ac:graphicFrameMk id="25" creationId="{B909D604-15C3-7F47-5446-BCE9125EC53A}"/>
+          </ac:graphicFrameMkLst>
+        </pc:graphicFrameChg>
+        <pc:graphicFrameChg chg="add del mod ord">
+          <ac:chgData name="Ezra Weible" userId="67bcaf2f89c4552e" providerId="LiveId" clId="{E4E19776-AA89-4579-B0CB-50FEF10C4E93}" dt="2026-04-23T02:38:20.880" v="22838" actId="478"/>
           <ac:graphicFrameMkLst>
             <pc:docMk/>
             <pc:sldMk cId="2767281801" sldId="259"/>
             <ac:graphicFrameMk id="29" creationId="{464F2507-7604-CADB-B93B-2590A44E42C1}"/>
           </ac:graphicFrameMkLst>
         </pc:graphicFrameChg>
-        <pc:picChg chg="add mod ord">
-          <ac:chgData name="Ezra Weible" userId="67bcaf2f89c4552e" providerId="LiveId" clId="{E4E19776-AA89-4579-B0CB-50FEF10C4E93}" dt="2026-04-03T02:33:35.873" v="1420" actId="14100"/>
+        <pc:graphicFrameChg chg="add del mod">
+          <ac:chgData name="Ezra Weible" userId="67bcaf2f89c4552e" providerId="LiveId" clId="{E4E19776-AA89-4579-B0CB-50FEF10C4E93}" dt="2026-04-23T02:50:07.525" v="23006" actId="478"/>
+          <ac:graphicFrameMkLst>
+            <pc:docMk/>
+            <pc:sldMk cId="2767281801" sldId="259"/>
+            <ac:graphicFrameMk id="31" creationId="{D387BE4B-5D2B-219B-8BB0-24CFC3CC6769}"/>
+          </ac:graphicFrameMkLst>
+        </pc:graphicFrameChg>
+        <pc:graphicFrameChg chg="add del mod">
+          <ac:chgData name="Ezra Weible" userId="67bcaf2f89c4552e" providerId="LiveId" clId="{E4E19776-AA89-4579-B0CB-50FEF10C4E93}" dt="2026-04-23T02:50:07.525" v="23006" actId="478"/>
+          <ac:graphicFrameMkLst>
+            <pc:docMk/>
+            <pc:sldMk cId="2767281801" sldId="259"/>
+            <ac:graphicFrameMk id="34" creationId="{B6329EF7-1FD9-F2BC-CD42-36E9C8471B01}"/>
+          </ac:graphicFrameMkLst>
+        </pc:graphicFrameChg>
+        <pc:graphicFrameChg chg="add mod modGraphic">
+          <ac:chgData name="Ezra Weible" userId="67bcaf2f89c4552e" providerId="LiveId" clId="{E4E19776-AA89-4579-B0CB-50FEF10C4E93}" dt="2026-04-23T02:38:13.224" v="22837" actId="207"/>
+          <ac:graphicFrameMkLst>
+            <pc:docMk/>
+            <pc:sldMk cId="2767281801" sldId="259"/>
+            <ac:graphicFrameMk id="35" creationId="{51D6A049-C176-4ADF-C1CC-56E4A6B9C665}"/>
+          </ac:graphicFrameMkLst>
+        </pc:graphicFrameChg>
+        <pc:graphicFrameChg chg="add mod modGraphic">
+          <ac:chgData name="Ezra Weible" userId="67bcaf2f89c4552e" providerId="LiveId" clId="{E4E19776-AA89-4579-B0CB-50FEF10C4E93}" dt="2026-04-23T02:49:59.190" v="23004" actId="1076"/>
+          <ac:graphicFrameMkLst>
+            <pc:docMk/>
+            <pc:sldMk cId="2767281801" sldId="259"/>
+            <ac:graphicFrameMk id="36" creationId="{504345E8-BD57-6A8C-8D53-8BAA8B05C664}"/>
+          </ac:graphicFrameMkLst>
+        </pc:graphicFrameChg>
+        <pc:graphicFrameChg chg="add del mod ord">
+          <ac:chgData name="Ezra Weible" userId="67bcaf2f89c4552e" providerId="LiveId" clId="{E4E19776-AA89-4579-B0CB-50FEF10C4E93}" dt="2026-04-23T02:45:16.575" v="22934" actId="478"/>
+          <ac:graphicFrameMkLst>
+            <pc:docMk/>
+            <pc:sldMk cId="2767281801" sldId="259"/>
+            <ac:graphicFrameMk id="37" creationId="{2D053DF4-BB18-EBDB-8746-899805D71844}"/>
+          </ac:graphicFrameMkLst>
+        </pc:graphicFrameChg>
+        <pc:graphicFrameChg chg="add mod">
+          <ac:chgData name="Ezra Weible" userId="67bcaf2f89c4552e" providerId="LiveId" clId="{E4E19776-AA89-4579-B0CB-50FEF10C4E93}" dt="2026-04-23T02:38:43.302" v="22843" actId="1076"/>
+          <ac:graphicFrameMkLst>
+            <pc:docMk/>
+            <pc:sldMk cId="2767281801" sldId="259"/>
+            <ac:graphicFrameMk id="38" creationId="{ED5D7DC3-424D-5C04-E68A-4B4E91486649}"/>
+          </ac:graphicFrameMkLst>
+        </pc:graphicFrameChg>
+        <pc:graphicFrameChg chg="add mod ord">
+          <ac:chgData name="Ezra Weible" userId="67bcaf2f89c4552e" providerId="LiveId" clId="{E4E19776-AA89-4579-B0CB-50FEF10C4E93}" dt="2026-04-23T02:45:25.641" v="22937" actId="1076"/>
+          <ac:graphicFrameMkLst>
+            <pc:docMk/>
+            <pc:sldMk cId="2767281801" sldId="259"/>
+            <ac:graphicFrameMk id="45" creationId="{555209C2-02C3-3116-90A5-D9F895FB58C6}"/>
+          </ac:graphicFrameMkLst>
+        </pc:graphicFrameChg>
+        <pc:picChg chg="add del mod ord">
+          <ac:chgData name="Ezra Weible" userId="67bcaf2f89c4552e" providerId="LiveId" clId="{E4E19776-AA89-4579-B0CB-50FEF10C4E93}" dt="2026-04-23T02:40:21.932" v="22883" actId="478"/>
           <ac:picMkLst>
             <pc:docMk/>
             <pc:sldMk cId="2767281801" sldId="259"/>
             <ac:picMk id="26" creationId="{246888AF-ED92-F70E-4A27-0A157B3D718A}"/>
           </ac:picMkLst>
         </pc:picChg>
-        <pc:picChg chg="add mod ord">
-          <ac:chgData name="Ezra Weible" userId="67bcaf2f89c4552e" providerId="LiveId" clId="{E4E19776-AA89-4579-B0CB-50FEF10C4E93}" dt="2026-04-03T02:33:59.270" v="1424" actId="1076"/>
+        <pc:picChg chg="add del mod ord">
+          <ac:chgData name="Ezra Weible" userId="67bcaf2f89c4552e" providerId="LiveId" clId="{E4E19776-AA89-4579-B0CB-50FEF10C4E93}" dt="2026-04-23T02:40:21.249" v="22882" actId="478"/>
           <ac:picMkLst>
             <pc:docMk/>
             <pc:sldMk cId="2767281801" sldId="259"/>
             <ac:picMk id="40" creationId="{F0D9F668-5E6B-BEE5-2CD4-C32EBCBAF9B4}"/>
           </ac:picMkLst>
         </pc:picChg>
+        <pc:picChg chg="add mod ord">
+          <ac:chgData name="Ezra Weible" userId="67bcaf2f89c4552e" providerId="LiveId" clId="{E4E19776-AA89-4579-B0CB-50FEF10C4E93}" dt="2026-04-23T02:52:04.952" v="23033" actId="1076"/>
+          <ac:picMkLst>
+            <pc:docMk/>
+            <pc:sldMk cId="2767281801" sldId="259"/>
+            <ac:picMk id="44" creationId="{C5670776-B112-4383-6493-5FAC21798C5A}"/>
+          </ac:picMkLst>
+        </pc:picChg>
+        <pc:picChg chg="add mod">
+          <ac:chgData name="Ezra Weible" userId="67bcaf2f89c4552e" providerId="LiveId" clId="{E4E19776-AA89-4579-B0CB-50FEF10C4E93}" dt="2026-04-23T02:49:38.220" v="22999" actId="1076"/>
+          <ac:picMkLst>
+            <pc:docMk/>
+            <pc:sldMk cId="2767281801" sldId="259"/>
+            <ac:picMk id="47" creationId="{0A60F7A1-B185-40A0-7237-BBC3FB07CC0D}"/>
+          </ac:picMkLst>
+        </pc:picChg>
+        <pc:picChg chg="add mod ord">
+          <ac:chgData name="Ezra Weible" userId="67bcaf2f89c4552e" providerId="LiveId" clId="{E4E19776-AA89-4579-B0CB-50FEF10C4E93}" dt="2026-04-23T02:52:02.189" v="23032" actId="1076"/>
+          <ac:picMkLst>
+            <pc:docMk/>
+            <pc:sldMk cId="2767281801" sldId="259"/>
+            <ac:picMk id="49" creationId="{8A93688C-67D2-07DD-EAC6-1C71EAB88275}"/>
+          </ac:picMkLst>
+        </pc:picChg>
+        <pc:cxnChg chg="add mod">
+          <ac:chgData name="Ezra Weible" userId="67bcaf2f89c4552e" providerId="LiveId" clId="{E4E19776-AA89-4579-B0CB-50FEF10C4E93}" dt="2026-04-23T02:31:01.361" v="22737" actId="1076"/>
+          <ac:cxnSpMkLst>
+            <pc:docMk/>
+            <pc:sldMk cId="2767281801" sldId="259"/>
+            <ac:cxnSpMk id="8" creationId="{3308F486-A200-B184-5333-A0CD812434EA}"/>
+          </ac:cxnSpMkLst>
+        </pc:cxnChg>
+        <pc:cxnChg chg="add mod">
+          <ac:chgData name="Ezra Weible" userId="67bcaf2f89c4552e" providerId="LiveId" clId="{E4E19776-AA89-4579-B0CB-50FEF10C4E93}" dt="2026-04-23T02:31:01.361" v="22737" actId="1076"/>
+          <ac:cxnSpMkLst>
+            <pc:docMk/>
+            <pc:sldMk cId="2767281801" sldId="259"/>
+            <ac:cxnSpMk id="10" creationId="{0C96B936-358B-255B-3CB3-A8F010AC92FC}"/>
+          </ac:cxnSpMkLst>
+        </pc:cxnChg>
+        <pc:cxnChg chg="add mod">
+          <ac:chgData name="Ezra Weible" userId="67bcaf2f89c4552e" providerId="LiveId" clId="{E4E19776-AA89-4579-B0CB-50FEF10C4E93}" dt="2026-04-23T02:31:01.361" v="22737" actId="1076"/>
+          <ac:cxnSpMkLst>
+            <pc:docMk/>
+            <pc:sldMk cId="2767281801" sldId="259"/>
+            <ac:cxnSpMk id="11" creationId="{9D606040-4FE3-6CA1-645A-9135814F636A}"/>
+          </ac:cxnSpMkLst>
+        </pc:cxnChg>
         <pc:cxnChg chg="add mod">
           <ac:chgData name="Ezra Weible" userId="67bcaf2f89c4552e" providerId="LiveId" clId="{E4E19776-AA89-4579-B0CB-50FEF10C4E93}" dt="2026-04-03T02:22:16.515" v="1305" actId="1582"/>
           <ac:cxnSpMkLst>
@@ -307,11 +484,27 @@
           </ac:cxnSpMkLst>
         </pc:cxnChg>
         <pc:cxnChg chg="add mod">
-          <ac:chgData name="Ezra Weible" userId="67bcaf2f89c4552e" providerId="LiveId" clId="{E4E19776-AA89-4579-B0CB-50FEF10C4E93}" dt="2026-04-03T02:22:28.275" v="1308" actId="14100"/>
+          <ac:chgData name="Ezra Weible" userId="67bcaf2f89c4552e" providerId="LiveId" clId="{E4E19776-AA89-4579-B0CB-50FEF10C4E93}" dt="2026-04-23T02:31:32.027" v="22746" actId="478"/>
           <ac:cxnSpMkLst>
             <pc:docMk/>
             <pc:sldMk cId="2767281801" sldId="259"/>
             <ac:cxnSpMk id="13" creationId="{494787E1-510C-9BA3-0CFB-AFC42196DB98}"/>
+          </ac:cxnSpMkLst>
+        </pc:cxnChg>
+        <pc:cxnChg chg="add mod">
+          <ac:chgData name="Ezra Weible" userId="67bcaf2f89c4552e" providerId="LiveId" clId="{E4E19776-AA89-4579-B0CB-50FEF10C4E93}" dt="2026-04-23T02:31:01.361" v="22737" actId="1076"/>
+          <ac:cxnSpMkLst>
+            <pc:docMk/>
+            <pc:sldMk cId="2767281801" sldId="259"/>
+            <ac:cxnSpMk id="15" creationId="{FC56A011-3A23-D47E-315C-CE991FD9F123}"/>
+          </ac:cxnSpMkLst>
+        </pc:cxnChg>
+        <pc:cxnChg chg="add mod">
+          <ac:chgData name="Ezra Weible" userId="67bcaf2f89c4552e" providerId="LiveId" clId="{E4E19776-AA89-4579-B0CB-50FEF10C4E93}" dt="2026-04-23T02:31:01.361" v="22737" actId="1076"/>
+          <ac:cxnSpMkLst>
+            <pc:docMk/>
+            <pc:sldMk cId="2767281801" sldId="259"/>
+            <ac:cxnSpMk id="16" creationId="{129F8BDA-192F-0797-57E4-8CDC326E68BE}"/>
           </ac:cxnSpMkLst>
         </pc:cxnChg>
         <pc:cxnChg chg="add mod">
@@ -323,7 +516,7 @@
           </ac:cxnSpMkLst>
         </pc:cxnChg>
         <pc:cxnChg chg="add mod">
-          <ac:chgData name="Ezra Weible" userId="67bcaf2f89c4552e" providerId="LiveId" clId="{E4E19776-AA89-4579-B0CB-50FEF10C4E93}" dt="2026-04-03T02:29:58.310" v="1385" actId="14100"/>
+          <ac:chgData name="Ezra Weible" userId="67bcaf2f89c4552e" providerId="LiveId" clId="{E4E19776-AA89-4579-B0CB-50FEF10C4E93}" dt="2026-04-23T02:39:00.415" v="22845" actId="14100"/>
           <ac:cxnSpMkLst>
             <pc:docMk/>
             <pc:sldMk cId="2767281801" sldId="259"/>
@@ -331,16 +524,56 @@
           </ac:cxnSpMkLst>
         </pc:cxnChg>
         <pc:cxnChg chg="add mod">
-          <ac:chgData name="Ezra Weible" userId="67bcaf2f89c4552e" providerId="LiveId" clId="{E4E19776-AA89-4579-B0CB-50FEF10C4E93}" dt="2026-04-03T02:31:32.627" v="1402" actId="14100"/>
+          <ac:chgData name="Ezra Weible" userId="67bcaf2f89c4552e" providerId="LiveId" clId="{E4E19776-AA89-4579-B0CB-50FEF10C4E93}" dt="2026-04-23T02:39:05.355" v="22846" actId="14100"/>
           <ac:cxnSpMkLst>
             <pc:docMk/>
             <pc:sldMk cId="2767281801" sldId="259"/>
             <ac:cxnSpMk id="24" creationId="{E57F6A2D-6B05-8606-3E75-7118D45A26ED}"/>
           </ac:cxnSpMkLst>
         </pc:cxnChg>
+        <pc:cxnChg chg="add del mod">
+          <ac:chgData name="Ezra Weible" userId="67bcaf2f89c4552e" providerId="LiveId" clId="{E4E19776-AA89-4579-B0CB-50FEF10C4E93}" dt="2026-04-23T02:50:07.525" v="23006" actId="478"/>
+          <ac:cxnSpMkLst>
+            <pc:docMk/>
+            <pc:sldMk cId="2767281801" sldId="259"/>
+            <ac:cxnSpMk id="27" creationId="{3EDABD81-CAD4-6FEC-C8A7-D36174F7C8EB}"/>
+          </ac:cxnSpMkLst>
+        </pc:cxnChg>
+        <pc:cxnChg chg="add del mod">
+          <ac:chgData name="Ezra Weible" userId="67bcaf2f89c4552e" providerId="LiveId" clId="{E4E19776-AA89-4579-B0CB-50FEF10C4E93}" dt="2026-04-23T02:50:07.525" v="23006" actId="478"/>
+          <ac:cxnSpMkLst>
+            <pc:docMk/>
+            <pc:sldMk cId="2767281801" sldId="259"/>
+            <ac:cxnSpMk id="28" creationId="{18F3C62E-2157-D2B7-B8DB-AE2CDB39F5AA}"/>
+          </ac:cxnSpMkLst>
+        </pc:cxnChg>
+        <pc:cxnChg chg="add del mod">
+          <ac:chgData name="Ezra Weible" userId="67bcaf2f89c4552e" providerId="LiveId" clId="{E4E19776-AA89-4579-B0CB-50FEF10C4E93}" dt="2026-04-23T02:50:07.525" v="23006" actId="478"/>
+          <ac:cxnSpMkLst>
+            <pc:docMk/>
+            <pc:sldMk cId="2767281801" sldId="259"/>
+            <ac:cxnSpMk id="30" creationId="{E67E8EE9-8F6F-90E5-FC51-CA7B83B5A45E}"/>
+          </ac:cxnSpMkLst>
+        </pc:cxnChg>
+        <pc:cxnChg chg="add del mod">
+          <ac:chgData name="Ezra Weible" userId="67bcaf2f89c4552e" providerId="LiveId" clId="{E4E19776-AA89-4579-B0CB-50FEF10C4E93}" dt="2026-04-23T02:50:07.525" v="23006" actId="478"/>
+          <ac:cxnSpMkLst>
+            <pc:docMk/>
+            <pc:sldMk cId="2767281801" sldId="259"/>
+            <ac:cxnSpMk id="32" creationId="{C2D9C088-F225-405F-3323-83E912ED87B3}"/>
+          </ac:cxnSpMkLst>
+        </pc:cxnChg>
+        <pc:cxnChg chg="add del mod">
+          <ac:chgData name="Ezra Weible" userId="67bcaf2f89c4552e" providerId="LiveId" clId="{E4E19776-AA89-4579-B0CB-50FEF10C4E93}" dt="2026-04-23T02:50:07.525" v="23006" actId="478"/>
+          <ac:cxnSpMkLst>
+            <pc:docMk/>
+            <pc:sldMk cId="2767281801" sldId="259"/>
+            <ac:cxnSpMk id="33" creationId="{035C27B8-36CB-BCAA-79B4-E5C5DCBFE413}"/>
+          </ac:cxnSpMkLst>
+        </pc:cxnChg>
       </pc:sldChg>
       <pc:sldChg chg="addSp delSp modSp mod modNotesTx">
-        <pc:chgData name="Ezra Weible" userId="67bcaf2f89c4552e" providerId="LiveId" clId="{E4E19776-AA89-4579-B0CB-50FEF10C4E93}" dt="2026-04-06T16:54:21.737" v="18712" actId="14100"/>
+        <pc:chgData name="Ezra Weible" userId="67bcaf2f89c4552e" providerId="LiveId" clId="{E4E19776-AA89-4579-B0CB-50FEF10C4E93}" dt="2026-04-23T02:57:18.838" v="23086" actId="20577"/>
         <pc:sldMkLst>
           <pc:docMk/>
           <pc:sldMk cId="1181814461" sldId="261"/>
@@ -585,7 +818,7 @@
         </pc:spChg>
       </pc:sldChg>
       <pc:sldChg chg="addSp modSp mod modNotesTx">
-        <pc:chgData name="Ezra Weible" userId="67bcaf2f89c4552e" providerId="LiveId" clId="{E4E19776-AA89-4579-B0CB-50FEF10C4E93}" dt="2026-04-07T19:58:35.402" v="19869" actId="20577"/>
+        <pc:chgData name="Ezra Weible" userId="67bcaf2f89c4552e" providerId="LiveId" clId="{E4E19776-AA89-4579-B0CB-50FEF10C4E93}" dt="2026-04-23T02:56:53.506" v="23083" actId="20577"/>
         <pc:sldMkLst>
           <pc:docMk/>
           <pc:sldMk cId="4019548605" sldId="283"/>
@@ -607,8 +840,8 @@
           </ac:picMkLst>
         </pc:picChg>
       </pc:sldChg>
-      <pc:sldChg chg="addSp delSp modSp mod modNotesTx">
-        <pc:chgData name="Ezra Weible" userId="67bcaf2f89c4552e" providerId="LiveId" clId="{E4E19776-AA89-4579-B0CB-50FEF10C4E93}" dt="2026-04-03T18:16:19.178" v="10519" actId="20577"/>
+      <pc:sldChg chg="addSp delSp modSp add del mod modNotesTx">
+        <pc:chgData name="Ezra Weible" userId="67bcaf2f89c4552e" providerId="LiveId" clId="{E4E19776-AA89-4579-B0CB-50FEF10C4E93}" dt="2026-04-23T02:54:48.725" v="23035" actId="47"/>
         <pc:sldMkLst>
           <pc:docMk/>
           <pc:sldMk cId="322099442" sldId="284"/>
@@ -639,7 +872,7 @@
         </pc:picChg>
       </pc:sldChg>
       <pc:sldChg chg="modSp mod modNotesTx">
-        <pc:chgData name="Ezra Weible" userId="67bcaf2f89c4552e" providerId="LiveId" clId="{E4E19776-AA89-4579-B0CB-50FEF10C4E93}" dt="2026-04-07T20:22:59.242" v="20518" actId="20577"/>
+        <pc:chgData name="Ezra Weible" userId="67bcaf2f89c4552e" providerId="LiveId" clId="{E4E19776-AA89-4579-B0CB-50FEF10C4E93}" dt="2026-04-23T02:57:26.179" v="23091" actId="20577"/>
         <pc:sldMkLst>
           <pc:docMk/>
           <pc:sldMk cId="2705741922" sldId="285"/>
@@ -685,7 +918,7 @@
         </pc:picChg>
       </pc:sldChg>
       <pc:sldChg chg="addSp delSp modSp new mod ord">
-        <pc:chgData name="Ezra Weible" userId="67bcaf2f89c4552e" providerId="LiveId" clId="{E4E19776-AA89-4579-B0CB-50FEF10C4E93}" dt="2026-04-06T19:21:29.703" v="18994"/>
+        <pc:chgData name="Ezra Weible" userId="67bcaf2f89c4552e" providerId="LiveId" clId="{E4E19776-AA89-4579-B0CB-50FEF10C4E93}" dt="2026-04-21T17:26:52.640" v="21984" actId="20577"/>
         <pc:sldMkLst>
           <pc:docMk/>
           <pc:sldMk cId="3415720354" sldId="287"/>
@@ -699,7 +932,7 @@
           </ac:spMkLst>
         </pc:spChg>
         <pc:spChg chg="mod">
-          <ac:chgData name="Ezra Weible" userId="67bcaf2f89c4552e" providerId="LiveId" clId="{E4E19776-AA89-4579-B0CB-50FEF10C4E93}" dt="2026-04-03T03:05:54.864" v="3889" actId="20577"/>
+          <ac:chgData name="Ezra Weible" userId="67bcaf2f89c4552e" providerId="LiveId" clId="{E4E19776-AA89-4579-B0CB-50FEF10C4E93}" dt="2026-04-21T17:26:52.640" v="21984" actId="20577"/>
           <ac:spMkLst>
             <pc:docMk/>
             <pc:sldMk cId="3415720354" sldId="287"/>
@@ -895,7 +1128,7 @@
         </pc:picChg>
       </pc:sldChg>
       <pc:sldChg chg="modSp new mod modNotesTx">
-        <pc:chgData name="Ezra Weible" userId="67bcaf2f89c4552e" providerId="LiveId" clId="{E4E19776-AA89-4579-B0CB-50FEF10C4E93}" dt="2026-04-06T19:21:55.480" v="18998" actId="20577"/>
+        <pc:chgData name="Ezra Weible" userId="67bcaf2f89c4552e" providerId="LiveId" clId="{E4E19776-AA89-4579-B0CB-50FEF10C4E93}" dt="2026-04-23T02:57:41.733" v="23101" actId="20577"/>
         <pc:sldMkLst>
           <pc:docMk/>
           <pc:sldMk cId="2660264857" sldId="294"/>
@@ -1128,7 +1361,7 @@
         </pc:spChg>
       </pc:sldChg>
       <pc:sldChg chg="modSp new mod modNotesTx">
-        <pc:chgData name="Ezra Weible" userId="67bcaf2f89c4552e" providerId="LiveId" clId="{E4E19776-AA89-4579-B0CB-50FEF10C4E93}" dt="2026-04-05T18:10:05.717" v="15021" actId="20577"/>
+        <pc:chgData name="Ezra Weible" userId="67bcaf2f89c4552e" providerId="LiveId" clId="{E4E19776-AA89-4579-B0CB-50FEF10C4E93}" dt="2026-04-23T14:46:41.006" v="23106" actId="6549"/>
         <pc:sldMkLst>
           <pc:docMk/>
           <pc:sldMk cId="537554498" sldId="301"/>
@@ -1174,7 +1407,7 @@
         </pc:spChg>
       </pc:sldChg>
       <pc:sldChg chg="addSp delSp modSp add mod ord modNotesTx">
-        <pc:chgData name="Ezra Weible" userId="67bcaf2f89c4552e" providerId="LiveId" clId="{E4E19776-AA89-4579-B0CB-50FEF10C4E93}" dt="2026-04-07T20:34:01.699" v="20973" actId="20577"/>
+        <pc:chgData name="Ezra Weible" userId="67bcaf2f89c4552e" providerId="LiveId" clId="{E4E19776-AA89-4579-B0CB-50FEF10C4E93}" dt="2026-04-23T02:55:43.485" v="23051" actId="1076"/>
         <pc:sldMkLst>
           <pc:docMk/>
           <pc:sldMk cId="4136820614" sldId="303"/>
@@ -1188,7 +1421,7 @@
           </ac:spMkLst>
         </pc:spChg>
         <pc:graphicFrameChg chg="add mod modGraphic">
-          <ac:chgData name="Ezra Weible" userId="67bcaf2f89c4552e" providerId="LiveId" clId="{E4E19776-AA89-4579-B0CB-50FEF10C4E93}" dt="2026-04-05T16:06:47.239" v="14214" actId="14734"/>
+          <ac:chgData name="Ezra Weible" userId="67bcaf2f89c4552e" providerId="LiveId" clId="{E4E19776-AA89-4579-B0CB-50FEF10C4E93}" dt="2026-04-23T02:55:43.485" v="23051" actId="1076"/>
           <ac:graphicFrameMkLst>
             <pc:docMk/>
             <pc:sldMk cId="4136820614" sldId="303"/>
@@ -1202,6 +1435,203 @@
           <pc:docMk/>
           <pc:sldMk cId="2948937206" sldId="304"/>
         </pc:sldMkLst>
+      </pc:sldChg>
+      <pc:sldChg chg="modSp new del mod">
+        <pc:chgData name="Ezra Weible" userId="67bcaf2f89c4552e" providerId="LiveId" clId="{E4E19776-AA89-4579-B0CB-50FEF10C4E93}" dt="2026-04-23T02:54:56.886" v="23036" actId="47"/>
+        <pc:sldMkLst>
+          <pc:docMk/>
+          <pc:sldMk cId="3509009384" sldId="305"/>
+        </pc:sldMkLst>
+      </pc:sldChg>
+      <pc:sldChg chg="addSp delSp modSp new mod modNotesTx">
+        <pc:chgData name="Ezra Weible" userId="67bcaf2f89c4552e" providerId="LiveId" clId="{E4E19776-AA89-4579-B0CB-50FEF10C4E93}" dt="2026-04-23T02:26:51.217" v="22710" actId="20577"/>
+        <pc:sldMkLst>
+          <pc:docMk/>
+          <pc:sldMk cId="738446246" sldId="306"/>
+        </pc:sldMkLst>
+        <pc:spChg chg="mod">
+          <ac:chgData name="Ezra Weible" userId="67bcaf2f89c4552e" providerId="LiveId" clId="{E4E19776-AA89-4579-B0CB-50FEF10C4E93}" dt="2026-04-21T16:56:35.622" v="21952" actId="20577"/>
+          <ac:spMkLst>
+            <pc:docMk/>
+            <pc:sldMk cId="738446246" sldId="306"/>
+            <ac:spMk id="2" creationId="{DB73ADCB-0F4B-5186-F9F9-FE2D6F2D9F2A}"/>
+          </ac:spMkLst>
+        </pc:spChg>
+        <pc:spChg chg="mod">
+          <ac:chgData name="Ezra Weible" userId="67bcaf2f89c4552e" providerId="LiveId" clId="{E4E19776-AA89-4579-B0CB-50FEF10C4E93}" dt="2026-04-23T02:26:51.217" v="22710" actId="20577"/>
+          <ac:spMkLst>
+            <pc:docMk/>
+            <pc:sldMk cId="738446246" sldId="306"/>
+            <ac:spMk id="3" creationId="{0B7CB86D-4A61-06E9-346C-7B85991C0B0D}"/>
+          </ac:spMkLst>
+        </pc:spChg>
+        <pc:picChg chg="add del mod">
+          <ac:chgData name="Ezra Weible" userId="67bcaf2f89c4552e" providerId="LiveId" clId="{E4E19776-AA89-4579-B0CB-50FEF10C4E93}" dt="2026-04-23T02:21:45.540" v="22306" actId="478"/>
+          <ac:picMkLst>
+            <pc:docMk/>
+            <pc:sldMk cId="738446246" sldId="306"/>
+            <ac:picMk id="5" creationId="{DD2B0721-36A7-D5A7-40AC-DBDDB33AEBE4}"/>
+          </ac:picMkLst>
+        </pc:picChg>
+        <pc:picChg chg="add mod">
+          <ac:chgData name="Ezra Weible" userId="67bcaf2f89c4552e" providerId="LiveId" clId="{E4E19776-AA89-4579-B0CB-50FEF10C4E93}" dt="2026-04-23T02:21:50.932" v="22308" actId="1076"/>
+          <ac:picMkLst>
+            <pc:docMk/>
+            <pc:sldMk cId="738446246" sldId="306"/>
+            <ac:picMk id="6" creationId="{2244F027-DE92-A6FC-9BF7-A49AB113EFA1}"/>
+          </ac:picMkLst>
+        </pc:picChg>
+      </pc:sldChg>
+      <pc:sldChg chg="addSp delSp modSp add mod delAnim modAnim">
+        <pc:chgData name="Ezra Weible" userId="67bcaf2f89c4552e" providerId="LiveId" clId="{E4E19776-AA89-4579-B0CB-50FEF10C4E93}" dt="2026-04-23T14:55:46.980" v="23282" actId="1076"/>
+        <pc:sldMkLst>
+          <pc:docMk/>
+          <pc:sldMk cId="3716716746" sldId="307"/>
+        </pc:sldMkLst>
+        <pc:graphicFrameChg chg="add del mod ord">
+          <ac:chgData name="Ezra Weible" userId="67bcaf2f89c4552e" providerId="LiveId" clId="{E4E19776-AA89-4579-B0CB-50FEF10C4E93}" dt="2026-04-23T14:53:13.669" v="23239" actId="478"/>
+          <ac:graphicFrameMkLst>
+            <pc:docMk/>
+            <pc:sldMk cId="3716716746" sldId="307"/>
+            <ac:graphicFrameMk id="4" creationId="{199BF063-692F-F232-A4BA-5834E5184BA2}"/>
+          </ac:graphicFrameMkLst>
+        </pc:graphicFrameChg>
+        <pc:graphicFrameChg chg="add del mod">
+          <ac:chgData name="Ezra Weible" userId="67bcaf2f89c4552e" providerId="LiveId" clId="{E4E19776-AA89-4579-B0CB-50FEF10C4E93}" dt="2026-04-23T14:55:16.260" v="23277" actId="478"/>
+          <ac:graphicFrameMkLst>
+            <pc:docMk/>
+            <pc:sldMk cId="3716716746" sldId="307"/>
+            <ac:graphicFrameMk id="5" creationId="{1B507BE0-937A-E568-F708-6810E01D112C}"/>
+          </ac:graphicFrameMkLst>
+        </pc:graphicFrameChg>
+        <pc:graphicFrameChg chg="add del mod ord">
+          <ac:chgData name="Ezra Weible" userId="67bcaf2f89c4552e" providerId="LiveId" clId="{E4E19776-AA89-4579-B0CB-50FEF10C4E93}" dt="2026-04-23T14:55:16.260" v="23277" actId="478"/>
+          <ac:graphicFrameMkLst>
+            <pc:docMk/>
+            <pc:sldMk cId="3716716746" sldId="307"/>
+            <ac:graphicFrameMk id="8" creationId="{7953DDEF-D7FA-79CC-6078-69672B342F91}"/>
+          </ac:graphicFrameMkLst>
+        </pc:graphicFrameChg>
+        <pc:graphicFrameChg chg="del mod modGraphic">
+          <ac:chgData name="Ezra Weible" userId="67bcaf2f89c4552e" providerId="LiveId" clId="{E4E19776-AA89-4579-B0CB-50FEF10C4E93}" dt="2026-04-23T14:55:16.260" v="23277" actId="478"/>
+          <ac:graphicFrameMkLst>
+            <pc:docMk/>
+            <pc:sldMk cId="3716716746" sldId="307"/>
+            <ac:graphicFrameMk id="9" creationId="{DA953CEC-A6F6-02B5-6E2F-06466E732E42}"/>
+          </ac:graphicFrameMkLst>
+        </pc:graphicFrameChg>
+        <pc:graphicFrameChg chg="del mod modGraphic">
+          <ac:chgData name="Ezra Weible" userId="67bcaf2f89c4552e" providerId="LiveId" clId="{E4E19776-AA89-4579-B0CB-50FEF10C4E93}" dt="2026-04-23T14:55:16.260" v="23277" actId="478"/>
+          <ac:graphicFrameMkLst>
+            <pc:docMk/>
+            <pc:sldMk cId="3716716746" sldId="307"/>
+            <ac:graphicFrameMk id="35" creationId="{3964E199-F60B-ACEB-9C15-D74CFCCBB9BE}"/>
+          </ac:graphicFrameMkLst>
+        </pc:graphicFrameChg>
+        <pc:graphicFrameChg chg="del modGraphic">
+          <ac:chgData name="Ezra Weible" userId="67bcaf2f89c4552e" providerId="LiveId" clId="{E4E19776-AA89-4579-B0CB-50FEF10C4E93}" dt="2026-04-23T14:55:16.260" v="23277" actId="478"/>
+          <ac:graphicFrameMkLst>
+            <pc:docMk/>
+            <pc:sldMk cId="3716716746" sldId="307"/>
+            <ac:graphicFrameMk id="36" creationId="{5461F7D3-4098-BD72-8BBC-0DE45324B2A8}"/>
+          </ac:graphicFrameMkLst>
+        </pc:graphicFrameChg>
+        <pc:graphicFrameChg chg="del">
+          <ac:chgData name="Ezra Weible" userId="67bcaf2f89c4552e" providerId="LiveId" clId="{E4E19776-AA89-4579-B0CB-50FEF10C4E93}" dt="2026-04-23T14:50:23.876" v="23180" actId="478"/>
+          <ac:graphicFrameMkLst>
+            <pc:docMk/>
+            <pc:sldMk cId="3716716746" sldId="307"/>
+            <ac:graphicFrameMk id="38" creationId="{2C67BAFF-6006-AF53-7BB2-81ABE02C373E}"/>
+          </ac:graphicFrameMkLst>
+        </pc:graphicFrameChg>
+        <pc:graphicFrameChg chg="del">
+          <ac:chgData name="Ezra Weible" userId="67bcaf2f89c4552e" providerId="LiveId" clId="{E4E19776-AA89-4579-B0CB-50FEF10C4E93}" dt="2026-04-23T14:50:21.382" v="23179" actId="478"/>
+          <ac:graphicFrameMkLst>
+            <pc:docMk/>
+            <pc:sldMk cId="3716716746" sldId="307"/>
+            <ac:graphicFrameMk id="45" creationId="{FBD86B13-3177-116B-EE87-0CF3E1AD3232}"/>
+          </ac:graphicFrameMkLst>
+        </pc:graphicFrameChg>
+        <pc:picChg chg="add mod ord">
+          <ac:chgData name="Ezra Weible" userId="67bcaf2f89c4552e" providerId="LiveId" clId="{E4E19776-AA89-4579-B0CB-50FEF10C4E93}" dt="2026-04-23T14:55:27.454" v="23281" actId="167"/>
+          <ac:picMkLst>
+            <pc:docMk/>
+            <pc:sldMk cId="3716716746" sldId="307"/>
+            <ac:picMk id="7" creationId="{4B0071AF-819C-215D-CB56-372FAD20D1DE}"/>
+          </ac:picMkLst>
+        </pc:picChg>
+        <pc:picChg chg="add mod ord">
+          <ac:chgData name="Ezra Weible" userId="67bcaf2f89c4552e" providerId="LiveId" clId="{E4E19776-AA89-4579-B0CB-50FEF10C4E93}" dt="2026-04-23T14:55:46.980" v="23282" actId="1076"/>
+          <ac:picMkLst>
+            <pc:docMk/>
+            <pc:sldMk cId="3716716746" sldId="307"/>
+            <ac:picMk id="11" creationId="{11D9A95F-60E9-EF03-3A6E-4229F4F9286B}"/>
+          </ac:picMkLst>
+        </pc:picChg>
+        <pc:picChg chg="del mod">
+          <ac:chgData name="Ezra Weible" userId="67bcaf2f89c4552e" providerId="LiveId" clId="{E4E19776-AA89-4579-B0CB-50FEF10C4E93}" dt="2026-04-23T14:47:27.655" v="23109" actId="478"/>
+          <ac:picMkLst>
+            <pc:docMk/>
+            <pc:sldMk cId="3716716746" sldId="307"/>
+            <ac:picMk id="44" creationId="{36442970-497D-F4F6-47BE-E91A6F66E7FA}"/>
+          </ac:picMkLst>
+        </pc:picChg>
+        <pc:picChg chg="del mod">
+          <ac:chgData name="Ezra Weible" userId="67bcaf2f89c4552e" providerId="LiveId" clId="{E4E19776-AA89-4579-B0CB-50FEF10C4E93}" dt="2026-04-23T14:50:48.204" v="23189" actId="478"/>
+          <ac:picMkLst>
+            <pc:docMk/>
+            <pc:sldMk cId="3716716746" sldId="307"/>
+            <ac:picMk id="47" creationId="{D77C6B51-340F-D804-1189-94A7A8D8C496}"/>
+          </ac:picMkLst>
+        </pc:picChg>
+        <pc:picChg chg="del">
+          <ac:chgData name="Ezra Weible" userId="67bcaf2f89c4552e" providerId="LiveId" clId="{E4E19776-AA89-4579-B0CB-50FEF10C4E93}" dt="2026-04-23T14:47:28.196" v="23110" actId="478"/>
+          <ac:picMkLst>
+            <pc:docMk/>
+            <pc:sldMk cId="3716716746" sldId="307"/>
+            <ac:picMk id="49" creationId="{9B99D624-BED9-69C5-15B4-50CCCE7FC0D3}"/>
+          </ac:picMkLst>
+        </pc:picChg>
+        <pc:cxnChg chg="del">
+          <ac:chgData name="Ezra Weible" userId="67bcaf2f89c4552e" providerId="LiveId" clId="{E4E19776-AA89-4579-B0CB-50FEF10C4E93}" dt="2026-04-23T14:55:16.260" v="23277" actId="478"/>
+          <ac:cxnSpMkLst>
+            <pc:docMk/>
+            <pc:sldMk cId="3716716746" sldId="307"/>
+            <ac:cxnSpMk id="12" creationId="{1B7C3ED1-EAA9-683A-FB42-AF90010CD183}"/>
+          </ac:cxnSpMkLst>
+        </pc:cxnChg>
+        <pc:cxnChg chg="del">
+          <ac:chgData name="Ezra Weible" userId="67bcaf2f89c4552e" providerId="LiveId" clId="{E4E19776-AA89-4579-B0CB-50FEF10C4E93}" dt="2026-04-23T14:55:16.260" v="23277" actId="478"/>
+          <ac:cxnSpMkLst>
+            <pc:docMk/>
+            <pc:sldMk cId="3716716746" sldId="307"/>
+            <ac:cxnSpMk id="13" creationId="{BB4C97DB-809F-7B04-44BB-93E7C0C51FEB}"/>
+          </ac:cxnSpMkLst>
+        </pc:cxnChg>
+        <pc:cxnChg chg="del mod">
+          <ac:chgData name="Ezra Weible" userId="67bcaf2f89c4552e" providerId="LiveId" clId="{E4E19776-AA89-4579-B0CB-50FEF10C4E93}" dt="2026-04-23T14:55:16.260" v="23277" actId="478"/>
+          <ac:cxnSpMkLst>
+            <pc:docMk/>
+            <pc:sldMk cId="3716716746" sldId="307"/>
+            <ac:cxnSpMk id="17" creationId="{79B3B83C-3DC3-BD6C-F70E-429282B3DA88}"/>
+          </ac:cxnSpMkLst>
+        </pc:cxnChg>
+        <pc:cxnChg chg="del mod">
+          <ac:chgData name="Ezra Weible" userId="67bcaf2f89c4552e" providerId="LiveId" clId="{E4E19776-AA89-4579-B0CB-50FEF10C4E93}" dt="2026-04-23T14:55:16.260" v="23277" actId="478"/>
+          <ac:cxnSpMkLst>
+            <pc:docMk/>
+            <pc:sldMk cId="3716716746" sldId="307"/>
+            <ac:cxnSpMk id="22" creationId="{9E05B7F9-6570-2025-6FE4-7C505705237B}"/>
+          </ac:cxnSpMkLst>
+        </pc:cxnChg>
+        <pc:cxnChg chg="del mod">
+          <ac:chgData name="Ezra Weible" userId="67bcaf2f89c4552e" providerId="LiveId" clId="{E4E19776-AA89-4579-B0CB-50FEF10C4E93}" dt="2026-04-23T14:55:16.260" v="23277" actId="478"/>
+          <ac:cxnSpMkLst>
+            <pc:docMk/>
+            <pc:sldMk cId="3716716746" sldId="307"/>
+            <ac:cxnSpMk id="24" creationId="{74ECE263-22D3-5B2E-B8C6-4073561D43C6}"/>
+          </ac:cxnSpMkLst>
+        </pc:cxnChg>
       </pc:sldChg>
     </pc:docChg>
   </pc:docChgLst>
@@ -1290,7 +1720,7 @@
           <a:p>
             <a:fld id="{3056B035-F6BA-4127-ACCA-C4B80FF62751}" type="datetimeFigureOut">
               <a:rPr lang="en-US" smtClean="0"/>
-              <a:t>4/7/2026</a:t>
+              <a:t>4/23/2026</a:t>
             </a:fld>
             <a:endParaRPr lang="en-US"/>
           </a:p>
@@ -1802,99 +2232,25 @@
             </a:pPr>
             <a:r>
               <a:rPr lang="en-US" dirty="0"/>
-              <a:t>To expand the spectral clustering, I used a method developed by a previous student here, Charlie Carpenter, called Multi-</a:t>
-            </a:r>
-            <a:r>
-              <a:rPr lang="en-US" dirty="0" err="1"/>
-              <a:t>Omic</a:t>
-            </a:r>
-            <a:r>
-              <a:rPr lang="en-US" dirty="0"/>
-              <a:t> Spectral Clustering using the Flag Manifold, or MMOC</a:t>
-            </a:r>
-          </a:p>
-          <a:p>
-            <a:pPr marL="628650" lvl="1" indent="-171450">
+              <a:t>For a flag, think a line inside a plane inside a volume as visualized below</a:t>
+            </a:r>
+          </a:p>
+          <a:p>
+            <a:pPr marL="171450" indent="-171450">
               <a:buFontTx/>
               <a:buChar char="-"/>
             </a:pPr>
             <a:r>
               <a:rPr lang="en-US" dirty="0"/>
-              <a:t>I spent a lot of time working with his original code to clean, rearrange, and adjust it to apply to this new project</a:t>
-            </a:r>
-          </a:p>
-          <a:p>
-            <a:pPr marL="628650" lvl="1" indent="-171450">
-              <a:buFontTx/>
-              <a:buChar char="-"/>
-            </a:pPr>
-            <a:r>
-              <a:rPr lang="en-US" dirty="0"/>
-              <a:t>We chose this method because it allows for more flexibility in the multi-</a:t>
-            </a:r>
-            <a:r>
-              <a:rPr lang="en-US" dirty="0" err="1"/>
-              <a:t>omic</a:t>
-            </a:r>
-            <a:r>
-              <a:rPr lang="en-US" dirty="0"/>
-              <a:t> clustering due to the flag manifold.</a:t>
-            </a:r>
-          </a:p>
-          <a:p>
-            <a:pPr marL="1085850" lvl="2" indent="-171450">
-              <a:buFontTx/>
-              <a:buChar char="-"/>
-            </a:pPr>
-            <a:r>
-              <a:rPr lang="en-US" dirty="0"/>
-              <a:t>Rather than restricting to the same number of features, or clusters, across the different views, MMOC allows for flexibility in the individual omics when integrating to joint clusters, which is essential for this diverse </a:t>
-            </a:r>
-            <a:r>
-              <a:rPr lang="en-US" dirty="0" err="1"/>
-              <a:t>omic</a:t>
-            </a:r>
-            <a:r>
-              <a:rPr lang="en-US" dirty="0"/>
-              <a:t> data</a:t>
-            </a:r>
-          </a:p>
-          <a:p>
-            <a:pPr marL="171450" lvl="0" indent="-171450">
-              <a:buFontTx/>
-              <a:buChar char="-"/>
-            </a:pPr>
-            <a:r>
-              <a:rPr lang="en-US" dirty="0"/>
-              <a:t>“While this rigid consensus perspective can be effective when views are strongly correlated, it may fail to capture heterogeneity that is biologically meaningful in multi-</a:t>
-            </a:r>
-            <a:r>
-              <a:rPr lang="en-US" dirty="0" err="1"/>
-              <a:t>omic</a:t>
-            </a:r>
-            <a:r>
-              <a:rPr lang="en-US" dirty="0"/>
-              <a:t> studies, where different molecular layers can reflect distinct (yet valid) stratifications of samples.”</a:t>
-            </a:r>
-          </a:p>
-          <a:p>
-            <a:pPr marL="171450" lvl="0" indent="-171450">
-              <a:buFontTx/>
-              <a:buChar char="-"/>
-            </a:pPr>
-            <a:r>
-              <a:rPr lang="en-US" dirty="0"/>
-              <a:t>Features include signal-to-noise </a:t>
-            </a:r>
-          </a:p>
-          <a:p>
-            <a:pPr marL="171450" lvl="0" indent="-171450">
-              <a:buFontTx/>
-              <a:buChar char="-"/>
-            </a:pPr>
-            <a:r>
-              <a:rPr lang="en-US" dirty="0"/>
-              <a:t>Focus on combining the estimated clustering subspaces using the flag mean </a:t>
+              <a:t>Flag manifold is a way to track structure at </a:t>
+            </a:r>
+            <a:r>
+              <a:rPr lang="en-US" b="1" dirty="0"/>
+              <a:t>multiple scales simultaneously</a:t>
+            </a:r>
+            <a:r>
+              <a:rPr lang="en-US" dirty="0"/>
+              <a:t>, not just one projection.</a:t>
             </a:r>
           </a:p>
         </p:txBody>
@@ -1925,7 +2281,7 @@
     </p:spTree>
     <p:extLst>
       <p:ext uri="{BB962C8B-B14F-4D97-AF65-F5344CB8AC3E}">
-        <p14:creationId xmlns:p14="http://schemas.microsoft.com/office/powerpoint/2010/main" val="1497944618"/>
+        <p14:creationId xmlns:p14="http://schemas.microsoft.com/office/powerpoint/2010/main" val="2559574686"/>
       </p:ext>
     </p:extLst>
   </p:cSld>
@@ -1936,6 +2292,299 @@
 </file>
 
 <file path=ppt/notesSlides/notesSlide12.xml><?xml version="1.0" encoding="utf-8"?>
+<p:notes xmlns:a="http://schemas.openxmlformats.org/drawingml/2006/main" xmlns:r="http://schemas.openxmlformats.org/officeDocument/2006/relationships" xmlns:p="http://schemas.openxmlformats.org/presentationml/2006/main">
+  <p:cSld>
+    <p:spTree>
+      <p:nvGrpSpPr>
+        <p:cNvPr id="1" name="">
+          <a:extLst>
+            <a:ext uri="{FF2B5EF4-FFF2-40B4-BE49-F238E27FC236}">
+              <a16:creationId xmlns:a16="http://schemas.microsoft.com/office/drawing/2014/main" id="{A24BFB48-CB07-1670-C2EA-667F46A90F88}"/>
+            </a:ext>
+          </a:extLst>
+        </p:cNvPr>
+        <p:cNvGrpSpPr/>
+        <p:nvPr/>
+      </p:nvGrpSpPr>
+      <p:grpSpPr>
+        <a:xfrm>
+          <a:off x="0" y="0"/>
+          <a:ext cx="0" cy="0"/>
+          <a:chOff x="0" y="0"/>
+          <a:chExt cx="0" cy="0"/>
+        </a:xfrm>
+      </p:grpSpPr>
+      <p:sp>
+        <p:nvSpPr>
+          <p:cNvPr id="2" name="Slide Image Placeholder 1">
+            <a:extLst>
+              <a:ext uri="{FF2B5EF4-FFF2-40B4-BE49-F238E27FC236}">
+                <a16:creationId xmlns:a16="http://schemas.microsoft.com/office/drawing/2014/main" id="{1EEC94A1-F77F-3975-E6C8-3FAB4E39B371}"/>
+              </a:ext>
+            </a:extLst>
+          </p:cNvPr>
+          <p:cNvSpPr>
+            <a:spLocks noGrp="1" noRot="1" noChangeAspect="1"/>
+          </p:cNvSpPr>
+          <p:nvPr>
+            <p:ph type="sldImg"/>
+          </p:nvPr>
+        </p:nvSpPr>
+        <p:spPr/>
+      </p:sp>
+      <p:sp>
+        <p:nvSpPr>
+          <p:cNvPr id="3" name="Notes Placeholder 2">
+            <a:extLst>
+              <a:ext uri="{FF2B5EF4-FFF2-40B4-BE49-F238E27FC236}">
+                <a16:creationId xmlns:a16="http://schemas.microsoft.com/office/drawing/2014/main" id="{7CF57012-3F0A-4B34-C9A9-185C16F4626C}"/>
+              </a:ext>
+            </a:extLst>
+          </p:cNvPr>
+          <p:cNvSpPr>
+            <a:spLocks noGrp="1"/>
+          </p:cNvSpPr>
+          <p:nvPr>
+            <p:ph type="body" idx="1"/>
+          </p:nvPr>
+        </p:nvSpPr>
+        <p:spPr/>
+        <p:txBody>
+          <a:bodyPr/>
+          <a:lstStyle/>
+          <a:p>
+            <a:pPr marL="171450" indent="-171450">
+              <a:buFontTx/>
+              <a:buChar char="-"/>
+            </a:pPr>
+            <a:r>
+              <a:rPr lang="en-US" dirty="0"/>
+              <a:t>To expand the spectral clustering, I used a method developed by a previous student here, Charlie Carpenter, called Multi-</a:t>
+            </a:r>
+            <a:r>
+              <a:rPr lang="en-US" dirty="0" err="1"/>
+              <a:t>Omic</a:t>
+            </a:r>
+            <a:r>
+              <a:rPr lang="en-US" dirty="0"/>
+              <a:t> Spectral Clustering using the Flag Manifold, or MMOC</a:t>
+            </a:r>
+          </a:p>
+          <a:p>
+            <a:pPr marL="628650" lvl="1" indent="-171450">
+              <a:buFontTx/>
+              <a:buChar char="-"/>
+            </a:pPr>
+            <a:r>
+              <a:rPr lang="en-US" dirty="0"/>
+              <a:t>I spent a lot of time working with his original code to clean, rearrange, and adjust it to apply to this new project</a:t>
+            </a:r>
+          </a:p>
+          <a:p>
+            <a:pPr marL="628650" lvl="1" indent="-171450">
+              <a:buFontTx/>
+              <a:buChar char="-"/>
+            </a:pPr>
+            <a:r>
+              <a:rPr lang="en-US" dirty="0"/>
+              <a:t>We chose this method because it allows for more flexibility in the multi-</a:t>
+            </a:r>
+            <a:r>
+              <a:rPr lang="en-US" dirty="0" err="1"/>
+              <a:t>omic</a:t>
+            </a:r>
+            <a:r>
+              <a:rPr lang="en-US" dirty="0"/>
+              <a:t> clustering due to the flag manifold.</a:t>
+            </a:r>
+          </a:p>
+          <a:p>
+            <a:pPr marL="1085850" lvl="2" indent="-171450">
+              <a:buFontTx/>
+              <a:buChar char="-"/>
+            </a:pPr>
+            <a:r>
+              <a:rPr lang="en-US" dirty="0"/>
+              <a:t>Rather than restricting to the same number of features, or clusters, across the different views, MMOC allows for flexibility in the individual omics when integrating to joint clusters, which is essential for this diverse </a:t>
+            </a:r>
+            <a:r>
+              <a:rPr lang="en-US" dirty="0" err="1"/>
+              <a:t>omic</a:t>
+            </a:r>
+            <a:r>
+              <a:rPr lang="en-US" dirty="0"/>
+              <a:t> data</a:t>
+            </a:r>
+          </a:p>
+          <a:p>
+            <a:pPr marL="171450" lvl="0" indent="-171450">
+              <a:buFontTx/>
+              <a:buChar char="-"/>
+            </a:pPr>
+            <a:r>
+              <a:rPr lang="en-US" dirty="0"/>
+              <a:t>“[other methods] may fail to capture heterogeneity that is biologically meaningful in multi-</a:t>
+            </a:r>
+            <a:r>
+              <a:rPr lang="en-US" dirty="0" err="1"/>
+              <a:t>omic</a:t>
+            </a:r>
+            <a:r>
+              <a:rPr lang="en-US" dirty="0"/>
+              <a:t> studies, where different molecular layers can reflect distinct (yet valid) stratifications of samples.”</a:t>
+            </a:r>
+          </a:p>
+          <a:p>
+            <a:pPr marL="171450" lvl="0" indent="-171450">
+              <a:buFontTx/>
+              <a:buChar char="-"/>
+            </a:pPr>
+            <a:endParaRPr lang="en-US" dirty="0"/>
+          </a:p>
+          <a:p>
+            <a:pPr marL="171450" lvl="0" indent="-171450">
+              <a:buFontTx/>
+              <a:buChar char="-"/>
+            </a:pPr>
+            <a:endParaRPr lang="en-US" dirty="0"/>
+          </a:p>
+          <a:p>
+            <a:pPr marL="171450" lvl="0" indent="-171450">
+              <a:buFontTx/>
+              <a:buChar char="-"/>
+            </a:pPr>
+            <a:endParaRPr lang="en-US" dirty="0"/>
+          </a:p>
+          <a:p>
+            <a:pPr marL="171450" lvl="0" indent="-171450">
+              <a:buFontTx/>
+              <a:buChar char="-"/>
+            </a:pPr>
+            <a:endParaRPr lang="en-US" dirty="0"/>
+          </a:p>
+          <a:p>
+            <a:pPr marL="171450" lvl="0" indent="-171450">
+              <a:buFontTx/>
+              <a:buChar char="-"/>
+            </a:pPr>
+            <a:endParaRPr lang="en-US" dirty="0"/>
+          </a:p>
+          <a:p>
+            <a:pPr marL="171450" lvl="0" indent="-171450">
+              <a:buFontTx/>
+              <a:buChar char="-"/>
+            </a:pPr>
+            <a:endParaRPr lang="en-US" dirty="0"/>
+          </a:p>
+          <a:p>
+            <a:pPr marL="171450" lvl="0" indent="-171450">
+              <a:buFontTx/>
+              <a:buChar char="-"/>
+            </a:pPr>
+            <a:endParaRPr lang="en-US" dirty="0"/>
+          </a:p>
+          <a:p>
+            <a:pPr marL="171450" lvl="0" indent="-171450">
+              <a:buFontTx/>
+              <a:buChar char="-"/>
+            </a:pPr>
+            <a:endParaRPr lang="en-US" dirty="0"/>
+          </a:p>
+          <a:p>
+            <a:pPr marL="171450" lvl="0" indent="-171450">
+              <a:buFontTx/>
+              <a:buChar char="-"/>
+            </a:pPr>
+            <a:r>
+              <a:rPr lang="en-US" dirty="0"/>
+              <a:t>Features include signal-to-noise </a:t>
+            </a:r>
+          </a:p>
+          <a:p>
+            <a:pPr marL="171450" lvl="0" indent="-171450">
+              <a:buFontTx/>
+              <a:buChar char="-"/>
+            </a:pPr>
+            <a:r>
+              <a:rPr lang="en-US" dirty="0"/>
+              <a:t>Focus on combining the estimated clustering subspaces using the flag mean </a:t>
+            </a:r>
+          </a:p>
+          <a:p>
+            <a:pPr marL="171450" lvl="0" indent="-171450">
+              <a:buFontTx/>
+              <a:buChar char="-"/>
+            </a:pPr>
+            <a:r>
+              <a:rPr lang="en-US" dirty="0"/>
+              <a:t>Distance matrices are the same size (this looks like that because of diagonal)</a:t>
+            </a:r>
+          </a:p>
+          <a:p>
+            <a:pPr marL="171450" lvl="0" indent="-171450">
+              <a:buFontTx/>
+              <a:buChar char="-"/>
+            </a:pPr>
+            <a:r>
+              <a:rPr lang="en-US" dirty="0"/>
+              <a:t>Same number of samples, different number of features</a:t>
+            </a:r>
+          </a:p>
+          <a:p>
+            <a:pPr marL="628650" lvl="1" indent="-171450">
+              <a:buFontTx/>
+              <a:buChar char="-"/>
+            </a:pPr>
+            <a:r>
+              <a:rPr lang="en-US" dirty="0"/>
+              <a:t>Maybe do a heatmap or blobs or something</a:t>
+            </a:r>
+          </a:p>
+        </p:txBody>
+      </p:sp>
+      <p:sp>
+        <p:nvSpPr>
+          <p:cNvPr id="4" name="Slide Number Placeholder 3">
+            <a:extLst>
+              <a:ext uri="{FF2B5EF4-FFF2-40B4-BE49-F238E27FC236}">
+                <a16:creationId xmlns:a16="http://schemas.microsoft.com/office/drawing/2014/main" id="{B308AC31-F92E-0CE4-045E-B0B6AD725476}"/>
+              </a:ext>
+            </a:extLst>
+          </p:cNvPr>
+          <p:cNvSpPr>
+            <a:spLocks noGrp="1"/>
+          </p:cNvSpPr>
+          <p:nvPr>
+            <p:ph type="sldNum" sz="quarter" idx="5"/>
+          </p:nvPr>
+        </p:nvSpPr>
+        <p:spPr/>
+        <p:txBody>
+          <a:bodyPr/>
+          <a:lstStyle/>
+          <a:p>
+            <a:fld id="{8191C064-8647-4876-9565-66F236AD4655}" type="slidenum">
+              <a:rPr lang="en-US" smtClean="0"/>
+              <a:t>12</a:t>
+            </a:fld>
+            <a:endParaRPr lang="en-US"/>
+          </a:p>
+        </p:txBody>
+      </p:sp>
+    </p:spTree>
+    <p:extLst>
+      <p:ext uri="{BB962C8B-B14F-4D97-AF65-F5344CB8AC3E}">
+        <p14:creationId xmlns:p14="http://schemas.microsoft.com/office/powerpoint/2010/main" val="1622012029"/>
+      </p:ext>
+    </p:extLst>
+  </p:cSld>
+  <p:clrMapOvr>
+    <a:masterClrMapping/>
+  </p:clrMapOvr>
+</p:notes>
+</file>
+
+<file path=ppt/notesSlides/notesSlide13.xml><?xml version="1.0" encoding="utf-8"?>
 <p:notes xmlns:a="http://schemas.openxmlformats.org/drawingml/2006/main" xmlns:r="http://schemas.openxmlformats.org/officeDocument/2006/relationships" xmlns:p="http://schemas.openxmlformats.org/presentationml/2006/main">
   <p:cSld>
     <p:spTree>
@@ -2117,7 +2766,7 @@
           <a:p>
             <a:fld id="{8191C064-8647-4876-9565-66F236AD4655}" type="slidenum">
               <a:rPr lang="en-US" smtClean="0"/>
-              <a:t>12</a:t>
+              <a:t>13</a:t>
             </a:fld>
             <a:endParaRPr lang="en-US"/>
           </a:p>
@@ -2127,90 +2776,6 @@
     <p:extLst>
       <p:ext uri="{BB962C8B-B14F-4D97-AF65-F5344CB8AC3E}">
         <p14:creationId xmlns:p14="http://schemas.microsoft.com/office/powerpoint/2010/main" val="3485159761"/>
-      </p:ext>
-    </p:extLst>
-  </p:cSld>
-  <p:clrMapOvr>
-    <a:masterClrMapping/>
-  </p:clrMapOvr>
-</p:notes>
-</file>
-
-<file path=ppt/notesSlides/notesSlide13.xml><?xml version="1.0" encoding="utf-8"?>
-<p:notes xmlns:a="http://schemas.openxmlformats.org/drawingml/2006/main" xmlns:r="http://schemas.openxmlformats.org/officeDocument/2006/relationships" xmlns:p="http://schemas.openxmlformats.org/presentationml/2006/main">
-  <p:cSld>
-    <p:spTree>
-      <p:nvGrpSpPr>
-        <p:cNvPr id="1" name=""/>
-        <p:cNvGrpSpPr/>
-        <p:nvPr/>
-      </p:nvGrpSpPr>
-      <p:grpSpPr>
-        <a:xfrm>
-          <a:off x="0" y="0"/>
-          <a:ext cx="0" cy="0"/>
-          <a:chOff x="0" y="0"/>
-          <a:chExt cx="0" cy="0"/>
-        </a:xfrm>
-      </p:grpSpPr>
-      <p:sp>
-        <p:nvSpPr>
-          <p:cNvPr id="2" name="Slide Image Placeholder 1"/>
-          <p:cNvSpPr>
-            <a:spLocks noGrp="1" noRot="1" noChangeAspect="1"/>
-          </p:cNvSpPr>
-          <p:nvPr>
-            <p:ph type="sldImg"/>
-          </p:nvPr>
-        </p:nvSpPr>
-        <p:spPr/>
-      </p:sp>
-      <p:sp>
-        <p:nvSpPr>
-          <p:cNvPr id="3" name="Notes Placeholder 2"/>
-          <p:cNvSpPr>
-            <a:spLocks noGrp="1"/>
-          </p:cNvSpPr>
-          <p:nvPr>
-            <p:ph type="body" idx="1"/>
-          </p:nvPr>
-        </p:nvSpPr>
-        <p:spPr/>
-        <p:txBody>
-          <a:bodyPr/>
-          <a:lstStyle/>
-          <a:p>
-            <a:endParaRPr lang="en-US" dirty="0"/>
-          </a:p>
-        </p:txBody>
-      </p:sp>
-      <p:sp>
-        <p:nvSpPr>
-          <p:cNvPr id="4" name="Slide Number Placeholder 3"/>
-          <p:cNvSpPr>
-            <a:spLocks noGrp="1"/>
-          </p:cNvSpPr>
-          <p:nvPr>
-            <p:ph type="sldNum" sz="quarter" idx="5"/>
-          </p:nvPr>
-        </p:nvSpPr>
-        <p:spPr/>
-        <p:txBody>
-          <a:bodyPr/>
-          <a:lstStyle/>
-          <a:p>
-            <a:fld id="{8191C064-8647-4876-9565-66F236AD4655}" type="slidenum">
-              <a:rPr lang="en-US" smtClean="0"/>
-              <a:t>13</a:t>
-            </a:fld>
-            <a:endParaRPr lang="en-US"/>
-          </a:p>
-        </p:txBody>
-      </p:sp>
-    </p:spTree>
-    <p:extLst>
-      <p:ext uri="{BB962C8B-B14F-4D97-AF65-F5344CB8AC3E}">
-        <p14:creationId xmlns:p14="http://schemas.microsoft.com/office/powerpoint/2010/main" val="890842764"/>
       </p:ext>
     </p:extLst>
   </p:cSld>
@@ -2264,46 +2829,6 @@
           <a:bodyPr/>
           <a:lstStyle/>
           <a:p>
-            <a:pPr marL="171450" indent="-171450">
-              <a:buFontTx/>
-              <a:buChar char="-"/>
-            </a:pPr>
-            <a:r>
-              <a:rPr lang="en-US" dirty="0"/>
-              <a:t>The same index was then used to identify the number of clusters after the two omics were integrated</a:t>
-            </a:r>
-          </a:p>
-          <a:p>
-            <a:pPr marL="171450" indent="-171450">
-              <a:buFontTx/>
-              <a:buChar char="-"/>
-            </a:pPr>
-            <a:r>
-              <a:rPr lang="en-US" dirty="0"/>
-              <a:t>The integrated joint clustering split the participants into 4 clusters. Cluster 1 had 9 subjects, …</a:t>
-            </a:r>
-          </a:p>
-          <a:p>
-            <a:pPr marL="628650" lvl="1" indent="-171450">
-              <a:buFontTx/>
-              <a:buChar char="-"/>
-            </a:pPr>
-            <a:r>
-              <a:rPr lang="en-US" dirty="0"/>
-              <a:t>Axes are the left singular vectors from </a:t>
-            </a:r>
-            <a:r>
-              <a:rPr lang="en-US" sz="1200" b="0" i="0" kern="1200" dirty="0">
-                <a:solidFill>
-                  <a:schemeClr val="tx1"/>
-                </a:solidFill>
-                <a:effectLst/>
-                <a:latin typeface="+mn-lt"/>
-                <a:ea typeface="+mn-ea"/>
-                <a:cs typeface="+mn-cs"/>
-              </a:rPr>
-              <a:t>singular value decomposition </a:t>
-            </a:r>
             <a:endParaRPr lang="en-US" dirty="0"/>
           </a:p>
         </p:txBody>
@@ -2334,7 +2859,7 @@
     </p:spTree>
     <p:extLst>
       <p:ext uri="{BB962C8B-B14F-4D97-AF65-F5344CB8AC3E}">
-        <p14:creationId xmlns:p14="http://schemas.microsoft.com/office/powerpoint/2010/main" val="2195481810"/>
+        <p14:creationId xmlns:p14="http://schemas.microsoft.com/office/powerpoint/2010/main" val="890842764"/>
       </p:ext>
     </p:extLst>
   </p:cSld>
@@ -2394,15 +2919,17 @@
             </a:pPr>
             <a:r>
               <a:rPr lang="en-US" dirty="0"/>
-              <a:t>Once we had the joint clustering assignments, we wanted to validate the choice of 4 clusters based on the </a:t>
-            </a:r>
-            <a:r>
-              <a:rPr lang="en-US" dirty="0" err="1"/>
-              <a:t>TraceCovW</a:t>
-            </a:r>
-            <a:r>
-              <a:rPr lang="en-US" dirty="0"/>
-              <a:t> index</a:t>
+              <a:t>The same index was then used to identify the number of clusters after the two omics were integrated</a:t>
+            </a:r>
+          </a:p>
+          <a:p>
+            <a:pPr marL="171450" indent="-171450">
+              <a:buFontTx/>
+              <a:buChar char="-"/>
+            </a:pPr>
+            <a:r>
+              <a:rPr lang="en-US" dirty="0"/>
+              <a:t>The integrated joint clustering split the participants into 4 clusters. Cluster 1 had 9 subjects, …</a:t>
             </a:r>
           </a:p>
           <a:p>
@@ -2412,8 +2939,21 @@
             </a:pPr>
             <a:r>
               <a:rPr lang="en-US" dirty="0"/>
-              <a:t>The groupings are moderately stable when changing the number of clusters chosen. Here, the colors represent 6 clusters and each column is 2-5. Since the groupings were not drastically changing, we felt comfortable moving forward with our original pick of 4</a:t>
-            </a:r>
+              <a:t>Axes are the left singular vectors from </a:t>
+            </a:r>
+            <a:r>
+              <a:rPr lang="en-US" sz="1200" b="0" i="0" kern="1200" dirty="0">
+                <a:solidFill>
+                  <a:schemeClr val="tx1"/>
+                </a:solidFill>
+                <a:effectLst/>
+                <a:latin typeface="+mn-lt"/>
+                <a:ea typeface="+mn-ea"/>
+                <a:cs typeface="+mn-cs"/>
+              </a:rPr>
+              <a:t>singular value decomposition </a:t>
+            </a:r>
+            <a:endParaRPr lang="en-US" dirty="0"/>
           </a:p>
         </p:txBody>
       </p:sp>
@@ -2443,7 +2983,7 @@
     </p:spTree>
     <p:extLst>
       <p:ext uri="{BB962C8B-B14F-4D97-AF65-F5344CB8AC3E}">
-        <p14:creationId xmlns:p14="http://schemas.microsoft.com/office/powerpoint/2010/main" val="117032055"/>
+        <p14:creationId xmlns:p14="http://schemas.microsoft.com/office/powerpoint/2010/main" val="2195481810"/>
       </p:ext>
     </p:extLst>
   </p:cSld>
@@ -2497,6 +3037,115 @@
           <a:bodyPr/>
           <a:lstStyle/>
           <a:p>
+            <a:pPr marL="171450" indent="-171450">
+              <a:buFontTx/>
+              <a:buChar char="-"/>
+            </a:pPr>
+            <a:r>
+              <a:rPr lang="en-US" dirty="0"/>
+              <a:t>Once we had the joint clustering assignments, we wanted to validate the choice of 4 clusters based on the </a:t>
+            </a:r>
+            <a:r>
+              <a:rPr lang="en-US" dirty="0" err="1"/>
+              <a:t>TraceCovW</a:t>
+            </a:r>
+            <a:r>
+              <a:rPr lang="en-US" dirty="0"/>
+              <a:t> index</a:t>
+            </a:r>
+          </a:p>
+          <a:p>
+            <a:pPr marL="628650" lvl="1" indent="-171450">
+              <a:buFontTx/>
+              <a:buChar char="-"/>
+            </a:pPr>
+            <a:r>
+              <a:rPr lang="en-US" dirty="0"/>
+              <a:t>The groupings are moderately stable when changing the number of clusters chosen. Here, the colors represent 6 clusters and each column is 2-5. Since the groupings were not drastically changing, we felt comfortable moving forward with our original pick of 4</a:t>
+            </a:r>
+          </a:p>
+        </p:txBody>
+      </p:sp>
+      <p:sp>
+        <p:nvSpPr>
+          <p:cNvPr id="4" name="Slide Number Placeholder 3"/>
+          <p:cNvSpPr>
+            <a:spLocks noGrp="1"/>
+          </p:cNvSpPr>
+          <p:nvPr>
+            <p:ph type="sldNum" sz="quarter" idx="5"/>
+          </p:nvPr>
+        </p:nvSpPr>
+        <p:spPr/>
+        <p:txBody>
+          <a:bodyPr/>
+          <a:lstStyle/>
+          <a:p>
+            <a:fld id="{8191C064-8647-4876-9565-66F236AD4655}" type="slidenum">
+              <a:rPr lang="en-US" smtClean="0"/>
+              <a:t>16</a:t>
+            </a:fld>
+            <a:endParaRPr lang="en-US"/>
+          </a:p>
+        </p:txBody>
+      </p:sp>
+    </p:spTree>
+    <p:extLst>
+      <p:ext uri="{BB962C8B-B14F-4D97-AF65-F5344CB8AC3E}">
+        <p14:creationId xmlns:p14="http://schemas.microsoft.com/office/powerpoint/2010/main" val="117032055"/>
+      </p:ext>
+    </p:extLst>
+  </p:cSld>
+  <p:clrMapOvr>
+    <a:masterClrMapping/>
+  </p:clrMapOvr>
+</p:notes>
+</file>
+
+<file path=ppt/notesSlides/notesSlide17.xml><?xml version="1.0" encoding="utf-8"?>
+<p:notes xmlns:a="http://schemas.openxmlformats.org/drawingml/2006/main" xmlns:r="http://schemas.openxmlformats.org/officeDocument/2006/relationships" xmlns:p="http://schemas.openxmlformats.org/presentationml/2006/main">
+  <p:cSld>
+    <p:spTree>
+      <p:nvGrpSpPr>
+        <p:cNvPr id="1" name=""/>
+        <p:cNvGrpSpPr/>
+        <p:nvPr/>
+      </p:nvGrpSpPr>
+      <p:grpSpPr>
+        <a:xfrm>
+          <a:off x="0" y="0"/>
+          <a:ext cx="0" cy="0"/>
+          <a:chOff x="0" y="0"/>
+          <a:chExt cx="0" cy="0"/>
+        </a:xfrm>
+      </p:grpSpPr>
+      <p:sp>
+        <p:nvSpPr>
+          <p:cNvPr id="2" name="Slide Image Placeholder 1"/>
+          <p:cNvSpPr>
+            <a:spLocks noGrp="1" noRot="1" noChangeAspect="1"/>
+          </p:cNvSpPr>
+          <p:nvPr>
+            <p:ph type="sldImg"/>
+          </p:nvPr>
+        </p:nvSpPr>
+        <p:spPr/>
+      </p:sp>
+      <p:sp>
+        <p:nvSpPr>
+          <p:cNvPr id="3" name="Notes Placeholder 2"/>
+          <p:cNvSpPr>
+            <a:spLocks noGrp="1"/>
+          </p:cNvSpPr>
+          <p:nvPr>
+            <p:ph type="body" idx="1"/>
+          </p:nvPr>
+        </p:nvSpPr>
+        <p:spPr/>
+        <p:txBody>
+          <a:bodyPr/>
+          <a:lstStyle/>
+          <a:p>
             <a:pPr marL="171450" marR="0" lvl="0" indent="-171450" algn="l" defTabSz="914400" rtl="0" eaLnBrk="1" fontAlgn="auto" latinLnBrk="0" hangingPunct="1">
               <a:lnSpc>
                 <a:spcPct val="100000"/>
@@ -2653,7 +3302,7 @@
           <a:p>
             <a:fld id="{8191C064-8647-4876-9565-66F236AD4655}" type="slidenum">
               <a:rPr lang="en-US" smtClean="0"/>
-              <a:t>16</a:t>
+              <a:t>17</a:t>
             </a:fld>
             <a:endParaRPr lang="en-US"/>
           </a:p>
@@ -2672,7 +3321,7 @@
 </p:notes>
 </file>
 
-<file path=ppt/notesSlides/notesSlide17.xml><?xml version="1.0" encoding="utf-8"?>
+<file path=ppt/notesSlides/notesSlide18.xml><?xml version="1.0" encoding="utf-8"?>
 <p:notes xmlns:a="http://schemas.openxmlformats.org/drawingml/2006/main" xmlns:r="http://schemas.openxmlformats.org/officeDocument/2006/relationships" xmlns:p="http://schemas.openxmlformats.org/presentationml/2006/main">
   <p:cSld>
     <p:spTree>
@@ -2789,154 +3438,50 @@
               <a:buFontTx/>
               <a:buChar char="-"/>
             </a:pPr>
-            <a:r>
-              <a:rPr lang="en-US" dirty="0"/>
-              <a:t>Interesting to see whether things stabilize after you remove the 3 participants who are always separate (may be pushing everything closer together)</a:t>
-            </a:r>
-          </a:p>
-        </p:txBody>
-      </p:sp>
-      <p:sp>
-        <p:nvSpPr>
-          <p:cNvPr id="4" name="Slide Number Placeholder 3">
-            <a:extLst>
-              <a:ext uri="{FF2B5EF4-FFF2-40B4-BE49-F238E27FC236}">
-                <a16:creationId xmlns:a16="http://schemas.microsoft.com/office/drawing/2014/main" id="{0C3C5E37-6A67-66D4-8A31-32316A7FBE0D}"/>
-              </a:ext>
-            </a:extLst>
-          </p:cNvPr>
-          <p:cNvSpPr>
-            <a:spLocks noGrp="1"/>
-          </p:cNvSpPr>
-          <p:nvPr>
-            <p:ph type="sldNum" sz="quarter" idx="5"/>
-          </p:nvPr>
-        </p:nvSpPr>
-        <p:spPr/>
-        <p:txBody>
-          <a:bodyPr/>
-          <a:lstStyle/>
-          <a:p>
-            <a:fld id="{8191C064-8647-4876-9565-66F236AD4655}" type="slidenum">
-              <a:rPr lang="en-US" smtClean="0"/>
-              <a:t>17</a:t>
-            </a:fld>
-            <a:endParaRPr lang="en-US"/>
-          </a:p>
-        </p:txBody>
-      </p:sp>
-    </p:spTree>
-    <p:extLst>
-      <p:ext uri="{BB962C8B-B14F-4D97-AF65-F5344CB8AC3E}">
-        <p14:creationId xmlns:p14="http://schemas.microsoft.com/office/powerpoint/2010/main" val="1991661646"/>
-      </p:ext>
-    </p:extLst>
-  </p:cSld>
-  <p:clrMapOvr>
-    <a:masterClrMapping/>
-  </p:clrMapOvr>
-</p:notes>
-</file>
-
-<file path=ppt/notesSlides/notesSlide18.xml><?xml version="1.0" encoding="utf-8"?>
-<p:notes xmlns:a="http://schemas.openxmlformats.org/drawingml/2006/main" xmlns:r="http://schemas.openxmlformats.org/officeDocument/2006/relationships" xmlns:p="http://schemas.openxmlformats.org/presentationml/2006/main">
-  <p:cSld>
-    <p:spTree>
-      <p:nvGrpSpPr>
-        <p:cNvPr id="1" name=""/>
-        <p:cNvGrpSpPr/>
-        <p:nvPr/>
-      </p:nvGrpSpPr>
-      <p:grpSpPr>
-        <a:xfrm>
-          <a:off x="0" y="0"/>
-          <a:ext cx="0" cy="0"/>
-          <a:chOff x="0" y="0"/>
-          <a:chExt cx="0" cy="0"/>
-        </a:xfrm>
-      </p:grpSpPr>
-      <p:sp>
-        <p:nvSpPr>
-          <p:cNvPr id="2" name="Slide Image Placeholder 1"/>
-          <p:cNvSpPr>
-            <a:spLocks noGrp="1" noRot="1" noChangeAspect="1"/>
-          </p:cNvSpPr>
-          <p:nvPr>
-            <p:ph type="sldImg"/>
-          </p:nvPr>
-        </p:nvSpPr>
-        <p:spPr/>
-      </p:sp>
-      <p:sp>
-        <p:nvSpPr>
-          <p:cNvPr id="3" name="Notes Placeholder 2"/>
-          <p:cNvSpPr>
-            <a:spLocks noGrp="1"/>
-          </p:cNvSpPr>
-          <p:nvPr>
-            <p:ph type="body" idx="1"/>
-          </p:nvPr>
-        </p:nvSpPr>
-        <p:spPr/>
-        <p:txBody>
-          <a:bodyPr/>
-          <a:lstStyle/>
-          <a:p>
-            <a:pPr marL="171450" indent="-171450">
+            <a:endParaRPr lang="en-US" dirty="0"/>
+          </a:p>
+          <a:p>
+            <a:pPr marL="628650" lvl="1" indent="-171450">
               <a:buFontTx/>
               <a:buChar char="-"/>
             </a:pPr>
-            <a:r>
-              <a:rPr lang="en-US" dirty="0"/>
-              <a:t>Cluster 1 showed the highest median relative abundance of </a:t>
-            </a:r>
-            <a:r>
-              <a:rPr lang="en-US" dirty="0" err="1"/>
-              <a:t>PRevotella</a:t>
-            </a:r>
             <a:endParaRPr lang="en-US" dirty="0"/>
           </a:p>
           <a:p>
-            <a:pPr marL="171450" indent="-171450">
+            <a:pPr marL="628650" lvl="1" indent="-171450">
               <a:buFontTx/>
               <a:buChar char="-"/>
             </a:pPr>
-            <a:r>
-              <a:rPr lang="en-US" dirty="0"/>
-              <a:t>Cluster 2 showed higher relative abundances of </a:t>
-            </a:r>
-            <a:r>
-              <a:rPr lang="en-US" dirty="0" err="1"/>
-              <a:t>Veillonella</a:t>
-            </a:r>
-            <a:r>
-              <a:rPr lang="en-US" dirty="0"/>
-              <a:t> (C) and Pseudomonas</a:t>
-            </a:r>
-          </a:p>
-          <a:p>
-            <a:pPr marL="171450" indent="-171450">
+            <a:endParaRPr lang="en-US" dirty="0"/>
+          </a:p>
+          <a:p>
+            <a:pPr marL="628650" lvl="1" indent="-171450">
               <a:buFontTx/>
               <a:buChar char="-"/>
             </a:pPr>
-            <a:r>
-              <a:rPr lang="en-US" dirty="0"/>
-              <a:t>Clusters 3 and 4 had similar relative abundances of </a:t>
-            </a:r>
-            <a:r>
-              <a:rPr lang="en-US" dirty="0" err="1"/>
-              <a:t>Prevotella</a:t>
-            </a:r>
-            <a:r>
-              <a:rPr lang="en-US" dirty="0"/>
-              <a:t>, Streptococcus, Neisseria, and Pseudomonas</a:t>
-            </a:r>
-          </a:p>
-        </p:txBody>
-      </p:sp>
-      <p:sp>
-        <p:nvSpPr>
-          <p:cNvPr id="4" name="Slide Number Placeholder 3"/>
+            <a:endParaRPr lang="en-US" dirty="0"/>
+          </a:p>
+          <a:p>
+            <a:pPr marL="628650" lvl="1" indent="-171450">
+              <a:buFontTx/>
+              <a:buChar char="-"/>
+            </a:pPr>
+            <a:r>
+              <a:rPr lang="en-US" dirty="0"/>
+              <a:t>Interesting to see whether things stabilize after you remove the 3 participants who are always separate (may be pushing everything closer together)</a:t>
+            </a:r>
+          </a:p>
+        </p:txBody>
+      </p:sp>
+      <p:sp>
+        <p:nvSpPr>
+          <p:cNvPr id="4" name="Slide Number Placeholder 3">
+            <a:extLst>
+              <a:ext uri="{FF2B5EF4-FFF2-40B4-BE49-F238E27FC236}">
+                <a16:creationId xmlns:a16="http://schemas.microsoft.com/office/drawing/2014/main" id="{0C3C5E37-6A67-66D4-8A31-32316A7FBE0D}"/>
+              </a:ext>
+            </a:extLst>
+          </p:cNvPr>
           <p:cNvSpPr>
             <a:spLocks noGrp="1"/>
           </p:cNvSpPr>
@@ -2960,7 +3505,7 @@
     </p:spTree>
     <p:extLst>
       <p:ext uri="{BB962C8B-B14F-4D97-AF65-F5344CB8AC3E}">
-        <p14:creationId xmlns:p14="http://schemas.microsoft.com/office/powerpoint/2010/main" val="2796829493"/>
+        <p14:creationId xmlns:p14="http://schemas.microsoft.com/office/powerpoint/2010/main" val="1991661646"/>
       </p:ext>
     </p:extLst>
   </p:cSld>
@@ -3020,8 +3565,13 @@
             </a:pPr>
             <a:r>
               <a:rPr lang="en-US" dirty="0"/>
-              <a:t>Cluster 2 showed higher relative abundance of Neisseriaceae</a:t>
-            </a:r>
+              <a:t>Cluster 1 showed the highest median relative abundance of </a:t>
+            </a:r>
+            <a:r>
+              <a:rPr lang="en-US" dirty="0" err="1"/>
+              <a:t>PRevotella</a:t>
+            </a:r>
+            <a:endParaRPr lang="en-US" dirty="0"/>
           </a:p>
           <a:p>
             <a:pPr marL="171450" indent="-171450">
@@ -3030,7 +3580,7 @@
             </a:pPr>
             <a:r>
               <a:rPr lang="en-US" dirty="0"/>
-              <a:t>Clusters 3 and 4 showed higher relative abundance of </a:t>
+              <a:t>Cluster 2 showed higher relative abundances of </a:t>
             </a:r>
             <a:r>
               <a:rPr lang="en-US" dirty="0" err="1"/>
@@ -3038,7 +3588,25 @@
             </a:r>
             <a:r>
               <a:rPr lang="en-US" dirty="0"/>
-              <a:t> (S) </a:t>
+              <a:t> (C) and Pseudomonas</a:t>
+            </a:r>
+          </a:p>
+          <a:p>
+            <a:pPr marL="171450" indent="-171450">
+              <a:buFontTx/>
+              <a:buChar char="-"/>
+            </a:pPr>
+            <a:r>
+              <a:rPr lang="en-US" dirty="0"/>
+              <a:t>Clusters 3 and 4 had similar relative abundances of </a:t>
+            </a:r>
+            <a:r>
+              <a:rPr lang="en-US" dirty="0" err="1"/>
+              <a:t>Prevotella</a:t>
+            </a:r>
+            <a:r>
+              <a:rPr lang="en-US" dirty="0"/>
+              <a:t>, Streptococcus, Neisseria, and Pseudomonas</a:t>
             </a:r>
           </a:p>
         </p:txBody>
@@ -3069,7 +3637,7 @@
     </p:spTree>
     <p:extLst>
       <p:ext uri="{BB962C8B-B14F-4D97-AF65-F5344CB8AC3E}">
-        <p14:creationId xmlns:p14="http://schemas.microsoft.com/office/powerpoint/2010/main" val="1041257150"/>
+        <p14:creationId xmlns:p14="http://schemas.microsoft.com/office/powerpoint/2010/main" val="2796829493"/>
       </p:ext>
     </p:extLst>
   </p:cSld>
@@ -3332,34 +3900,14 @@
           <a:bodyPr/>
           <a:lstStyle/>
           <a:p>
-            <a:pPr marL="171450" marR="0" lvl="0" indent="-171450" algn="l" defTabSz="914400" rtl="0" eaLnBrk="1" fontAlgn="auto" latinLnBrk="0" hangingPunct="1">
-              <a:lnSpc>
-                <a:spcPct val="100000"/>
-              </a:lnSpc>
-              <a:spcBef>
-                <a:spcPts val="0"/>
-              </a:spcBef>
-              <a:spcAft>
-                <a:spcPts val="0"/>
-              </a:spcAft>
-              <a:buClrTx/>
-              <a:buSzTx/>
-              <a:buFontTx/>
-              <a:buChar char="-"/>
-              <a:tabLst/>
-              <a:defRPr/>
-            </a:pPr>
-            <a:r>
-              <a:rPr lang="en-US" dirty="0"/>
-              <a:t>No proteins were statistically significant after FDR adjustment</a:t>
-            </a:r>
-          </a:p>
-          <a:p>
             <a:pPr marL="171450" indent="-171450">
               <a:buFontTx/>
               <a:buChar char="-"/>
             </a:pPr>
-            <a:endParaRPr lang="en-US" dirty="0"/>
+            <a:r>
+              <a:rPr lang="en-US" dirty="0"/>
+              <a:t>Cluster 2 showed higher relative abundance of Neisseriaceae</a:t>
+            </a:r>
           </a:p>
           <a:p>
             <a:pPr marL="171450" indent="-171450">
@@ -3368,55 +3916,16 @@
             </a:pPr>
             <a:r>
               <a:rPr lang="en-US" dirty="0"/>
-              <a:t>Cluster 1 had higher elastase levels than Clusters 3 and 4, but similar IL-1b and MMP-2 levels</a:t>
-            </a:r>
-          </a:p>
-          <a:p>
-            <a:pPr marL="171450" indent="-171450">
-              <a:buFontTx/>
-              <a:buChar char="-"/>
-            </a:pPr>
-            <a:r>
-              <a:rPr lang="en-US" dirty="0"/>
-              <a:t>Cluster 2 was characterized by higher levels of Elastase, IL-1b, TIMP-1, and HMG-1 and:</a:t>
-            </a:r>
-          </a:p>
-          <a:p>
-            <a:pPr marL="628650" lvl="1" indent="-171450">
-              <a:buFontTx/>
-              <a:buChar char="-"/>
-            </a:pPr>
-            <a:r>
-              <a:rPr lang="en-US" dirty="0"/>
-              <a:t>Lower levels of MMP-2, TNF-alpha, SLPI, and IFN-g</a:t>
-            </a:r>
-          </a:p>
-          <a:p>
-            <a:pPr marL="171450" lvl="0" indent="-171450">
-              <a:buFontTx/>
-              <a:buChar char="-"/>
-            </a:pPr>
-            <a:r>
-              <a:rPr lang="en-US" dirty="0"/>
-              <a:t>Clusters 3 and 4 had comparable levels of most clinically relevant proteins</a:t>
-            </a:r>
-          </a:p>
-          <a:p>
-            <a:pPr marL="628650" lvl="1" indent="-171450">
-              <a:buFontTx/>
-              <a:buChar char="-"/>
-            </a:pPr>
-            <a:r>
-              <a:rPr lang="en-US" dirty="0"/>
-              <a:t>Cluster 3 had higher HMG-1 levels and lower TNF-alpha levels than Cluster 4</a:t>
-            </a:r>
-          </a:p>
-          <a:p>
-            <a:pPr marL="171450" lvl="0" indent="-171450">
-              <a:buFontTx/>
-              <a:buChar char="-"/>
-            </a:pPr>
-            <a:endParaRPr lang="en-US" dirty="0"/>
+              <a:t>Clusters 3 and 4 showed higher relative abundance of </a:t>
+            </a:r>
+            <a:r>
+              <a:rPr lang="en-US" dirty="0" err="1"/>
+              <a:t>Veillonella</a:t>
+            </a:r>
+            <a:r>
+              <a:rPr lang="en-US" dirty="0"/>
+              <a:t> (S) </a:t>
+            </a:r>
           </a:p>
         </p:txBody>
       </p:sp>
@@ -3446,7 +3955,7 @@
     </p:spTree>
     <p:extLst>
       <p:ext uri="{BB962C8B-B14F-4D97-AF65-F5344CB8AC3E}">
-        <p14:creationId xmlns:p14="http://schemas.microsoft.com/office/powerpoint/2010/main" val="8098621"/>
+        <p14:creationId xmlns:p14="http://schemas.microsoft.com/office/powerpoint/2010/main" val="1041257150"/>
       </p:ext>
     </p:extLst>
   </p:cSld>
@@ -3500,19 +4009,91 @@
           <a:bodyPr/>
           <a:lstStyle/>
           <a:p>
-            <a:r>
-              <a:rPr lang="en-US" dirty="0"/>
-              <a:t>Add a summary of each cluster and the general trends/patterns (striking stuff, doesn’t need to be too detailed).</a:t>
-            </a:r>
-          </a:p>
-          <a:p>
+            <a:pPr marL="171450" marR="0" lvl="0" indent="-171450" algn="l" defTabSz="914400" rtl="0" eaLnBrk="1" fontAlgn="auto" latinLnBrk="0" hangingPunct="1">
+              <a:lnSpc>
+                <a:spcPct val="100000"/>
+              </a:lnSpc>
+              <a:spcBef>
+                <a:spcPts val="0"/>
+              </a:spcBef>
+              <a:spcAft>
+                <a:spcPts val="0"/>
+              </a:spcAft>
+              <a:buClrTx/>
+              <a:buSzTx/>
+              <a:buFontTx/>
+              <a:buChar char="-"/>
+              <a:tabLst/>
+              <a:defRPr/>
+            </a:pPr>
+            <a:r>
+              <a:rPr lang="en-US" dirty="0"/>
+              <a:t>No proteins were statistically significant after FDR adjustment</a:t>
+            </a:r>
+          </a:p>
+          <a:p>
+            <a:pPr marL="171450" indent="-171450">
+              <a:buFontTx/>
+              <a:buChar char="-"/>
+            </a:pPr>
             <a:endParaRPr lang="en-US" dirty="0"/>
           </a:p>
           <a:p>
-            <a:r>
-              <a:rPr lang="en-US" dirty="0"/>
-              <a:t>Helpful for context of inflammation, traditional/nontraditional pathogens, etc. </a:t>
-            </a:r>
+            <a:pPr marL="171450" indent="-171450">
+              <a:buFontTx/>
+              <a:buChar char="-"/>
+            </a:pPr>
+            <a:r>
+              <a:rPr lang="en-US" dirty="0"/>
+              <a:t>Cluster 1 had higher elastase levels than Clusters 3 and 4, but similar IL-1b and MMP-2 levels</a:t>
+            </a:r>
+          </a:p>
+          <a:p>
+            <a:pPr marL="171450" indent="-171450">
+              <a:buFontTx/>
+              <a:buChar char="-"/>
+            </a:pPr>
+            <a:r>
+              <a:rPr lang="en-US" dirty="0"/>
+              <a:t>Cluster 2 was characterized by higher levels of Elastase, IL-1b, TIMP-1, and HMG-1 and:</a:t>
+            </a:r>
+          </a:p>
+          <a:p>
+            <a:pPr marL="628650" lvl="1" indent="-171450">
+              <a:buFontTx/>
+              <a:buChar char="-"/>
+            </a:pPr>
+            <a:r>
+              <a:rPr lang="en-US" dirty="0"/>
+              <a:t>Lower levels of MMP-2, TNF-alpha, SLPI, and IFN-g</a:t>
+            </a:r>
+          </a:p>
+          <a:p>
+            <a:pPr marL="171450" lvl="0" indent="-171450">
+              <a:buFontTx/>
+              <a:buChar char="-"/>
+            </a:pPr>
+            <a:r>
+              <a:rPr lang="en-US" dirty="0"/>
+              <a:t>Clusters 3 and 4 had comparable levels of most clinically relevant proteins</a:t>
+            </a:r>
+          </a:p>
+          <a:p>
+            <a:pPr marL="628650" lvl="1" indent="-171450">
+              <a:buFontTx/>
+              <a:buChar char="-"/>
+            </a:pPr>
+            <a:r>
+              <a:rPr lang="en-US" dirty="0"/>
+              <a:t>Cluster 3 had higher HMG-1 levels and lower TNF-alpha levels than Cluster 4</a:t>
+            </a:r>
+          </a:p>
+          <a:p>
+            <a:pPr marL="171450" lvl="0" indent="-171450">
+              <a:buFontTx/>
+              <a:buChar char="-"/>
+            </a:pPr>
+            <a:endParaRPr lang="en-US" dirty="0"/>
           </a:p>
         </p:txBody>
       </p:sp>
@@ -3542,7 +4123,7 @@
     </p:spTree>
     <p:extLst>
       <p:ext uri="{BB962C8B-B14F-4D97-AF65-F5344CB8AC3E}">
-        <p14:creationId xmlns:p14="http://schemas.microsoft.com/office/powerpoint/2010/main" val="918102475"/>
+        <p14:creationId xmlns:p14="http://schemas.microsoft.com/office/powerpoint/2010/main" val="8098621"/>
       </p:ext>
     </p:extLst>
   </p:cSld>
@@ -3596,55 +4177,9 @@
           <a:bodyPr/>
           <a:lstStyle/>
           <a:p>
-            <a:pPr marL="0" lvl="0" indent="0">
-              <a:buFontTx/>
-              <a:buNone/>
-            </a:pPr>
-            <a:r>
-              <a:rPr lang="en-US" dirty="0"/>
-              <a:t>Cluster 2 exhibited a higher number of prior </a:t>
-            </a:r>
-            <a:r>
-              <a:rPr lang="en-US" dirty="0" err="1"/>
-              <a:t>Pex</a:t>
-            </a:r>
-            <a:r>
-              <a:rPr lang="en-US" dirty="0"/>
-              <a:t> events and hospitalizations in the preceding year</a:t>
-            </a:r>
-          </a:p>
-          <a:p>
-            <a:pPr marL="0" lvl="0" indent="0">
-              <a:buFontTx/>
-              <a:buNone/>
-            </a:pPr>
-            <a:endParaRPr lang="en-US" dirty="0"/>
-          </a:p>
-          <a:p>
-            <a:pPr marL="0" lvl="0" indent="0">
-              <a:buFontTx/>
-              <a:buNone/>
-            </a:pPr>
-            <a:r>
-              <a:rPr lang="en-US" dirty="0"/>
-              <a:t>Cut down tables (remove TP2/3), weight/height. Good to know where they started </a:t>
-            </a:r>
-          </a:p>
-          <a:p>
-            <a:pPr marL="0" lvl="0" indent="0">
-              <a:buFontTx/>
-              <a:buNone/>
-            </a:pPr>
-            <a:endParaRPr lang="en-US" dirty="0"/>
-          </a:p>
-          <a:p>
-            <a:pPr marL="0" lvl="0" indent="0">
-              <a:buFontTx/>
-              <a:buNone/>
-            </a:pPr>
-            <a:r>
-              <a:rPr lang="en-US" dirty="0"/>
-              <a:t>Make point that they are not all starting at very different spots (not what is driving the improvement)</a:t>
+            <a:r>
+              <a:rPr lang="en-US" dirty="0"/>
+              <a:t>Helpful for context of inflammation, traditional/nontraditional pathogens, etc. </a:t>
             </a:r>
           </a:p>
         </p:txBody>
@@ -3675,7 +4210,7 @@
     </p:spTree>
     <p:extLst>
       <p:ext uri="{BB962C8B-B14F-4D97-AF65-F5344CB8AC3E}">
-        <p14:creationId xmlns:p14="http://schemas.microsoft.com/office/powerpoint/2010/main" val="1434818915"/>
+        <p14:creationId xmlns:p14="http://schemas.microsoft.com/office/powerpoint/2010/main" val="918102475"/>
       </p:ext>
     </p:extLst>
   </p:cSld>
@@ -3729,115 +4264,38 @@
           <a:bodyPr/>
           <a:lstStyle/>
           <a:p>
-            <a:pPr marL="171450" indent="-171450">
+            <a:pPr marL="0" lvl="0" indent="0">
               <a:buFontTx/>
-              <a:buChar char="-"/>
+              <a:buNone/>
             </a:pPr>
             <a:r>
               <a:rPr lang="en-US" dirty="0"/>
-              <a:t>This figure represents lung function recovery by looking at the differences in FEV1 and FVC across time points. The times are admission (T1, focus of analysis), discharge, and a 1 month </a:t>
+              <a:t>Cluster 2 exhibited a higher number of prior </a:t>
             </a:r>
             <a:r>
               <a:rPr lang="en-US" dirty="0" err="1"/>
-              <a:t>followup</a:t>
-            </a:r>
-            <a:r>
-              <a:rPr lang="en-US" dirty="0"/>
-              <a:t> </a:t>
-            </a:r>
-          </a:p>
-          <a:p>
-            <a:pPr marL="171450" indent="-171450">
+              <a:t>Pex</a:t>
+            </a:r>
+            <a:r>
+              <a:rPr lang="en-US" dirty="0"/>
+              <a:t> events and hospitalizations in the preceding year</a:t>
+            </a:r>
+          </a:p>
+          <a:p>
+            <a:pPr marL="0" lvl="0" indent="0">
               <a:buFontTx/>
-              <a:buChar char="-"/>
-            </a:pPr>
-            <a:r>
-              <a:rPr lang="en-US" dirty="0"/>
-              <a:t>Clusters 1 and 2 demonstrated the largest median improvements in both FEV1pp and FVC at later timepoints</a:t>
-            </a:r>
-          </a:p>
-          <a:p>
-            <a:pPr marL="628650" lvl="1" indent="-171450">
-              <a:buFontTx/>
-              <a:buChar char="-"/>
-            </a:pPr>
-            <a:r>
-              <a:rPr lang="en-US" dirty="0"/>
-              <a:t>Not statistically significant after FDR correction</a:t>
-            </a:r>
-          </a:p>
-          <a:p>
-            <a:pPr marL="628650" lvl="1" indent="-171450">
-              <a:buFontTx/>
-              <a:buChar char="-"/>
+              <a:buNone/>
             </a:pPr>
             <a:endParaRPr lang="en-US" dirty="0"/>
           </a:p>
           <a:p>
-            <a:pPr marL="628650" lvl="1" indent="-171450">
+            <a:pPr marL="0" lvl="0" indent="0">
               <a:buFontTx/>
-              <a:buChar char="-"/>
+              <a:buNone/>
             </a:pPr>
-            <a:endParaRPr lang="en-US" dirty="0"/>
-          </a:p>
-          <a:p>
-            <a:pPr marL="628650" lvl="1" indent="-171450">
-              <a:buFontTx/>
-              <a:buChar char="-"/>
-            </a:pPr>
-            <a:endParaRPr lang="en-US" dirty="0"/>
-          </a:p>
-          <a:p>
-            <a:pPr marL="628650" lvl="1" indent="-171450">
-              <a:buFontTx/>
-              <a:buChar char="-"/>
-            </a:pPr>
-            <a:r>
-              <a:rPr lang="en-US" dirty="0"/>
-              <a:t>Compare across time for bac and </a:t>
-            </a:r>
-            <a:r>
-              <a:rPr lang="en-US" dirty="0" err="1"/>
-              <a:t>prots</a:t>
-            </a:r>
-            <a:endParaRPr lang="en-US" dirty="0"/>
-          </a:p>
-          <a:p>
-            <a:pPr marL="1085850" lvl="2" indent="-171450">
-              <a:buFontTx/>
-              <a:buChar char="-"/>
-            </a:pPr>
-            <a:r>
-              <a:rPr lang="en-US" dirty="0"/>
-              <a:t>Could we also longitudinally add views for later timepoints with bac and </a:t>
-            </a:r>
-            <a:r>
-              <a:rPr lang="en-US" dirty="0" err="1"/>
-              <a:t>prots</a:t>
-            </a:r>
-            <a:r>
-              <a:rPr lang="en-US" dirty="0"/>
-              <a:t>? Maybe some concern with non-independence/correlations </a:t>
-            </a:r>
-          </a:p>
-          <a:p>
-            <a:pPr marL="1543050" lvl="3" indent="-171450">
-              <a:buFontTx/>
-              <a:buChar char="-"/>
-            </a:pPr>
-            <a:r>
-              <a:rPr lang="en-US" dirty="0"/>
-              <a:t>Ecological turnover (1 vs 2 m-age)</a:t>
-            </a:r>
-          </a:p>
-          <a:p>
-            <a:pPr marL="1543050" lvl="3" indent="-171450">
-              <a:buFontTx/>
-              <a:buChar char="-"/>
-            </a:pPr>
-            <a:r>
-              <a:rPr lang="en-US" dirty="0"/>
-              <a:t>Scope creep </a:t>
+            <a:r>
+              <a:rPr lang="en-US" dirty="0"/>
+              <a:t>They are not all starting at very different spots (not what is driving the improvement)</a:t>
             </a:r>
           </a:p>
         </p:txBody>
@@ -3868,7 +4326,7 @@
     </p:spTree>
     <p:extLst>
       <p:ext uri="{BB962C8B-B14F-4D97-AF65-F5344CB8AC3E}">
-        <p14:creationId xmlns:p14="http://schemas.microsoft.com/office/powerpoint/2010/main" val="2195882232"/>
+        <p14:creationId xmlns:p14="http://schemas.microsoft.com/office/powerpoint/2010/main" val="1434818915"/>
       </p:ext>
     </p:extLst>
   </p:cSld>
@@ -3928,7 +4386,15 @@
             </a:pPr>
             <a:r>
               <a:rPr lang="en-US" dirty="0"/>
-              <a:t>The integrated clusters were characterized by coordinated but distinct microbial and inflammatory patterns. </a:t>
+              <a:t>This figure represents lung function recovery by looking at the differences in FEV1 and FVC across time points. The times are admission (T1, focus of analysis), discharge, and a 1 month </a:t>
+            </a:r>
+            <a:r>
+              <a:rPr lang="en-US" dirty="0" err="1"/>
+              <a:t>followup</a:t>
+            </a:r>
+            <a:r>
+              <a:rPr lang="en-US" dirty="0"/>
+              <a:t> </a:t>
             </a:r>
           </a:p>
           <a:p>
@@ -3938,13 +4404,8 @@
             </a:pPr>
             <a:r>
               <a:rPr lang="en-US" dirty="0"/>
-              <a:t>Highlights complex relationship between inflammation and clinical recovery during </a:t>
-            </a:r>
-            <a:r>
-              <a:rPr lang="en-US" dirty="0" err="1"/>
-              <a:t>Pex</a:t>
-            </a:r>
-            <a:endParaRPr lang="en-US" dirty="0"/>
+              <a:t>Clusters 1 and 2 demonstrated the largest median improvements in both FEV1pp and FVC at later timepoints</a:t>
+            </a:r>
           </a:p>
           <a:p>
             <a:pPr marL="628650" lvl="1" indent="-171450">
@@ -3953,8 +4414,79 @@
             </a:pPr>
             <a:r>
               <a:rPr lang="en-US" dirty="0"/>
-              <a:t>Cluster 2 had higher relative abundance of Neisseria and a heightened systemic inflammatory profile, but relatively greater recovery in FEV1pp</a:t>
-            </a:r>
+              <a:t>Not statistically significant after FDR correction</a:t>
+            </a:r>
+          </a:p>
+          <a:p>
+            <a:pPr marL="628650" lvl="1" indent="-171450">
+              <a:buFontTx/>
+              <a:buChar char="-"/>
+            </a:pPr>
+            <a:endParaRPr lang="en-US" dirty="0"/>
+          </a:p>
+          <a:p>
+            <a:pPr marL="628650" lvl="1" indent="-171450">
+              <a:buFontTx/>
+              <a:buChar char="-"/>
+            </a:pPr>
+            <a:endParaRPr lang="en-US" dirty="0"/>
+          </a:p>
+          <a:p>
+            <a:pPr marL="628650" lvl="1" indent="-171450">
+              <a:buFontTx/>
+              <a:buChar char="-"/>
+            </a:pPr>
+            <a:endParaRPr lang="en-US" dirty="0"/>
+          </a:p>
+          <a:p>
+            <a:pPr marL="628650" lvl="1" indent="-171450">
+              <a:buFontTx/>
+              <a:buChar char="-"/>
+            </a:pPr>
+            <a:endParaRPr lang="en-US" dirty="0"/>
+          </a:p>
+          <a:p>
+            <a:pPr marL="628650" lvl="1" indent="-171450">
+              <a:buFontTx/>
+              <a:buChar char="-"/>
+            </a:pPr>
+            <a:endParaRPr lang="en-US" dirty="0"/>
+          </a:p>
+          <a:p>
+            <a:pPr marL="628650" lvl="1" indent="-171450">
+              <a:buFontTx/>
+              <a:buChar char="-"/>
+            </a:pPr>
+            <a:endParaRPr lang="en-US" dirty="0"/>
+          </a:p>
+          <a:p>
+            <a:pPr marL="628650" lvl="1" indent="-171450">
+              <a:buFontTx/>
+              <a:buChar char="-"/>
+            </a:pPr>
+            <a:endParaRPr lang="en-US" dirty="0"/>
+          </a:p>
+          <a:p>
+            <a:pPr marL="628650" lvl="1" indent="-171450">
+              <a:buFontTx/>
+              <a:buChar char="-"/>
+            </a:pPr>
+            <a:endParaRPr lang="en-US" dirty="0"/>
+          </a:p>
+          <a:p>
+            <a:pPr marL="628650" lvl="1" indent="-171450">
+              <a:buFontTx/>
+              <a:buChar char="-"/>
+            </a:pPr>
+            <a:r>
+              <a:rPr lang="en-US" dirty="0"/>
+              <a:t>Compare across time for bac and </a:t>
+            </a:r>
+            <a:r>
+              <a:rPr lang="en-US" dirty="0" err="1"/>
+              <a:t>prots</a:t>
+            </a:r>
+            <a:endParaRPr lang="en-US" dirty="0"/>
           </a:p>
           <a:p>
             <a:pPr marL="1085850" lvl="2" indent="-171450">
@@ -3963,95 +4495,36 @@
             </a:pPr>
             <a:r>
               <a:rPr lang="en-US" dirty="0"/>
-              <a:t>Suggests that heightened inflammatory signaling at onset may not prevent short-term lung function improvement</a:t>
-            </a:r>
-          </a:p>
-          <a:p>
-            <a:pPr marL="628650" lvl="1" indent="-171450">
+              <a:t>Could we also longitudinally add views for later timepoints with bac and </a:t>
+            </a:r>
+            <a:r>
+              <a:rPr lang="en-US" dirty="0" err="1"/>
+              <a:t>prots</a:t>
+            </a:r>
+            <a:r>
+              <a:rPr lang="en-US" dirty="0"/>
+              <a:t>? Maybe some concern with non-independence/correlations </a:t>
+            </a:r>
+          </a:p>
+          <a:p>
+            <a:pPr marL="1543050" lvl="3" indent="-171450">
               <a:buFontTx/>
               <a:buChar char="-"/>
             </a:pPr>
             <a:r>
               <a:rPr lang="en-US" dirty="0"/>
-              <a:t>Clusters 3 and 4 had similar microbiota but differed in select inflammatory mediators and showed less improvement in FEV1 percent predicted over follow-up.</a:t>
-            </a:r>
-          </a:p>
-          <a:p>
-            <a:pPr marL="1085850" lvl="2" indent="-171450">
+              <a:t>Ecological turnover (1 vs 2 m-age)</a:t>
+            </a:r>
+          </a:p>
+          <a:p>
+            <a:pPr marL="1543050" lvl="3" indent="-171450">
               <a:buFontTx/>
               <a:buChar char="-"/>
             </a:pPr>
             <a:r>
               <a:rPr lang="en-US" dirty="0"/>
-              <a:t>Host-response differences, even in the presence of comparable microbial communities, may contribute meaningfully to variability in </a:t>
-            </a:r>
-            <a:r>
-              <a:rPr lang="en-US" dirty="0" err="1"/>
-              <a:t>PEx</a:t>
-            </a:r>
-            <a:r>
-              <a:rPr lang="en-US" dirty="0"/>
-              <a:t> outcomes</a:t>
-            </a:r>
-          </a:p>
-          <a:p>
-            <a:pPr marL="171450" lvl="0" indent="-171450">
-              <a:buFontTx/>
-              <a:buChar char="-"/>
-            </a:pPr>
-            <a:r>
-              <a:rPr lang="en-US" dirty="0"/>
-              <a:t>Collectively, these results argue against simple pathogen-centric or inflammation-centric models and instead support a multidimensional view of </a:t>
-            </a:r>
-            <a:r>
-              <a:rPr lang="en-US" dirty="0" err="1"/>
-              <a:t>PEx</a:t>
-            </a:r>
-            <a:r>
-              <a:rPr lang="en-US" dirty="0"/>
-              <a:t> biology</a:t>
-            </a:r>
-          </a:p>
-          <a:p>
-            <a:pPr marL="171450" lvl="0" indent="-171450">
-              <a:buFontTx/>
-              <a:buChar char="-"/>
-            </a:pPr>
-            <a:endParaRPr lang="en-US" dirty="0"/>
-          </a:p>
-          <a:p>
-            <a:pPr marL="171450" lvl="0" indent="-171450">
-              <a:buFontTx/>
-              <a:buChar char="-"/>
-            </a:pPr>
-            <a:endParaRPr lang="en-US" dirty="0"/>
-          </a:p>
-          <a:p>
-            <a:pPr marL="171450" lvl="0" indent="-171450">
-              <a:buFontTx/>
-              <a:buChar char="-"/>
-            </a:pPr>
-            <a:endParaRPr lang="en-US" dirty="0"/>
-          </a:p>
-          <a:p>
-            <a:pPr marL="171450" lvl="0" indent="-171450">
-              <a:buFontTx/>
-              <a:buChar char="-"/>
-            </a:pPr>
-            <a:endParaRPr lang="en-US" dirty="0"/>
-          </a:p>
-          <a:p>
-            <a:pPr marL="0" lvl="0" indent="0">
-              <a:buFontTx/>
-              <a:buNone/>
-            </a:pPr>
-            <a:r>
-              <a:rPr lang="en-US" dirty="0"/>
-              <a:t>- Cluster 2 has inflammatory response but they are improving =&gt; may provide evidence for bacterial infection that was successfully treated rather than a viral infection</a:t>
-            </a:r>
-          </a:p>
-          <a:p>
-            <a:endParaRPr lang="en-US" dirty="0"/>
+              <a:t>Scope creep </a:t>
+            </a:r>
           </a:p>
         </p:txBody>
       </p:sp>
@@ -4081,7 +4554,7 @@
     </p:spTree>
     <p:extLst>
       <p:ext uri="{BB962C8B-B14F-4D97-AF65-F5344CB8AC3E}">
-        <p14:creationId xmlns:p14="http://schemas.microsoft.com/office/powerpoint/2010/main" val="3146157451"/>
+        <p14:creationId xmlns:p14="http://schemas.microsoft.com/office/powerpoint/2010/main" val="2195882232"/>
       </p:ext>
     </p:extLst>
   </p:cSld>
@@ -4141,11 +4614,21 @@
             </a:pPr>
             <a:r>
               <a:rPr lang="en-US" dirty="0"/>
-              <a:t>Previous work used this dataset with multi-omics strategy </a:t>
+              <a:t>The integrated clusters were characterized by coordinated but distinct microbial and inflammatory patterns. </a:t>
+            </a:r>
+          </a:p>
+          <a:p>
+            <a:pPr marL="171450" indent="-171450">
+              <a:buFontTx/>
+              <a:buChar char="-"/>
+            </a:pPr>
+            <a:r>
+              <a:rPr lang="en-US" dirty="0"/>
+              <a:t>Highlights complex relationship between inflammation and clinical recovery during </a:t>
             </a:r>
             <a:r>
               <a:rPr lang="en-US" dirty="0" err="1"/>
-              <a:t>SmCCNet</a:t>
+              <a:t>Pex</a:t>
             </a:r>
             <a:endParaRPr lang="en-US" dirty="0"/>
           </a:p>
@@ -4155,26 +4638,19 @@
               <a:buChar char="-"/>
             </a:pPr>
             <a:r>
-              <a:rPr lang="en-US" dirty="0" err="1"/>
-              <a:t>SmCCNet</a:t>
-            </a:r>
-            <a:r>
-              <a:rPr lang="en-US" dirty="0"/>
-              <a:t>: Sparse Multiple Canonical Correlation Network Analysis, i</a:t>
-            </a:r>
-            <a:r>
-              <a:rPr lang="en-US" sz="1200" b="0" i="0" kern="1200" dirty="0">
-                <a:solidFill>
-                  <a:schemeClr val="tx1"/>
-                </a:solidFill>
-                <a:effectLst/>
-                <a:latin typeface="+mn-lt"/>
-                <a:ea typeface="+mn-ea"/>
-                <a:cs typeface="+mn-cs"/>
-              </a:rPr>
-              <a:t>ntegrates multiple types of omics data with a specific phenotype of interest for molecular networks</a:t>
-            </a:r>
-            <a:endParaRPr lang="en-US" dirty="0"/>
+              <a:rPr lang="en-US" dirty="0"/>
+              <a:t>Cluster 2 had higher relative abundance of Neisseria and a heightened systemic inflammatory profile, but relatively greater recovery in FEV1pp</a:t>
+            </a:r>
+          </a:p>
+          <a:p>
+            <a:pPr marL="1085850" lvl="2" indent="-171450">
+              <a:buFontTx/>
+              <a:buChar char="-"/>
+            </a:pPr>
+            <a:r>
+              <a:rPr lang="en-US" dirty="0"/>
+              <a:t>Suggests that heightened inflammatory signaling at onset may not prevent short-term lung function improvement</a:t>
+            </a:r>
           </a:p>
           <a:p>
             <a:pPr marL="628650" lvl="1" indent="-171450">
@@ -4183,151 +4659,44 @@
             </a:pPr>
             <a:r>
               <a:rPr lang="en-US" dirty="0"/>
-              <a:t>Identified subnetworks of taxa and proteins associated with </a:t>
+              <a:t>Clusters 3 and 4 had similar microbiota but differed in select inflammatory mediators and showed less improvement in FEV1 percent predicted over follow-up.</a:t>
+            </a:r>
+          </a:p>
+          <a:p>
+            <a:pPr marL="1085850" lvl="2" indent="-171450">
+              <a:buFontTx/>
+              <a:buChar char="-"/>
+            </a:pPr>
+            <a:r>
+              <a:rPr lang="en-US" dirty="0"/>
+              <a:t>Host-response differences, even in the presence of comparable microbial communities, may contribute meaningfully to variability in </a:t>
             </a:r>
             <a:r>
               <a:rPr lang="en-US" dirty="0" err="1"/>
               <a:t>PEx</a:t>
             </a:r>
-            <a:endParaRPr lang="en-US" dirty="0"/>
-          </a:p>
-          <a:p>
-            <a:pPr marL="171450" marR="0" lvl="0" indent="-171450" algn="l" defTabSz="914400" rtl="0" eaLnBrk="1" fontAlgn="auto" latinLnBrk="0" hangingPunct="1">
-              <a:lnSpc>
-                <a:spcPct val="100000"/>
-              </a:lnSpc>
-              <a:spcBef>
-                <a:spcPts val="0"/>
-              </a:spcBef>
-              <a:spcAft>
-                <a:spcPts val="0"/>
-              </a:spcAft>
-              <a:buClrTx/>
-              <a:buSzTx/>
+            <a:r>
+              <a:rPr lang="en-US" dirty="0"/>
+              <a:t> outcomes</a:t>
+            </a:r>
+          </a:p>
+          <a:p>
+            <a:pPr marL="171450" lvl="0" indent="-171450">
               <a:buFontTx/>
               <a:buChar char="-"/>
-              <a:tabLst/>
-              <a:defRPr/>
             </a:pPr>
             <a:r>
               <a:rPr lang="en-US" dirty="0"/>
-              <a:t>Immune pathways: B cell proliferation, regulation of T-helper17 cell lineage commitment, positive regulation of NF-B transcription factor </a:t>
+              <a:t>Collectively, these results argue against simple pathogen-centric or inflammation-centric models and instead support a multidimensional view of </a:t>
             </a:r>
             <a:r>
               <a:rPr lang="en-US" dirty="0" err="1"/>
-              <a:t>activit</a:t>
-            </a:r>
-            <a:endParaRPr lang="en-US" dirty="0"/>
-          </a:p>
-          <a:p>
-            <a:pPr marL="171450" marR="0" lvl="0" indent="-171450" algn="l" defTabSz="914400" rtl="0" eaLnBrk="1" fontAlgn="auto" latinLnBrk="0" hangingPunct="1">
-              <a:lnSpc>
-                <a:spcPct val="100000"/>
-              </a:lnSpc>
-              <a:spcBef>
-                <a:spcPts val="0"/>
-              </a:spcBef>
-              <a:spcAft>
-                <a:spcPts val="0"/>
-              </a:spcAft>
-              <a:buClrTx/>
-              <a:buSzTx/>
-              <a:buFontTx/>
-              <a:buChar char="-"/>
-              <a:tabLst/>
-              <a:defRPr/>
-            </a:pPr>
-            <a:r>
-              <a:rPr lang="en-US" dirty="0"/>
-              <a:t>More focusing on networks of individual bacteria and proteins (different than trying to create groups of people based on the data, grouping bacteria and </a:t>
-            </a:r>
-            <a:r>
-              <a:rPr lang="en-US" dirty="0" err="1"/>
-              <a:t>proteisn</a:t>
-            </a:r>
-            <a:r>
-              <a:rPr lang="en-US" dirty="0"/>
-              <a:t>).</a:t>
-            </a:r>
-          </a:p>
-          <a:p>
-            <a:pPr marL="628650" marR="0" lvl="1" indent="-171450" algn="l" defTabSz="914400" rtl="0" eaLnBrk="1" fontAlgn="auto" latinLnBrk="0" hangingPunct="1">
-              <a:lnSpc>
-                <a:spcPct val="100000"/>
-              </a:lnSpc>
-              <a:spcBef>
-                <a:spcPts val="0"/>
-              </a:spcBef>
-              <a:spcAft>
-                <a:spcPts val="0"/>
-              </a:spcAft>
-              <a:buClrTx/>
-              <a:buSzTx/>
-              <a:buFontTx/>
-              <a:buChar char="-"/>
-              <a:tabLst/>
-              <a:defRPr/>
-            </a:pPr>
-            <a:r>
-              <a:rPr lang="en-US" dirty="0"/>
-              <a:t>Also supervised analysis, defining groups based on FEV. Me unsupervised approach without FEV and look at it later</a:t>
-            </a:r>
-          </a:p>
-          <a:p>
-            <a:pPr marL="628650" marR="0" lvl="1" indent="-171450" algn="l" defTabSz="914400" rtl="0" eaLnBrk="1" fontAlgn="auto" latinLnBrk="0" hangingPunct="1">
-              <a:lnSpc>
-                <a:spcPct val="100000"/>
-              </a:lnSpc>
-              <a:spcBef>
-                <a:spcPts val="0"/>
-              </a:spcBef>
-              <a:spcAft>
-                <a:spcPts val="0"/>
-              </a:spcAft>
-              <a:buClrTx/>
-              <a:buSzTx/>
-              <a:buFontTx/>
-              <a:buChar char="-"/>
-              <a:tabLst/>
-              <a:defRPr/>
-            </a:pPr>
-            <a:r>
-              <a:rPr lang="en-US" dirty="0"/>
-              <a:t>Not surprising that different, answering different questions</a:t>
-            </a:r>
-          </a:p>
-          <a:p>
-            <a:pPr marL="628650" marR="0" lvl="1" indent="-171450" algn="l" defTabSz="914400" rtl="0" eaLnBrk="1" fontAlgn="auto" latinLnBrk="0" hangingPunct="1">
-              <a:lnSpc>
-                <a:spcPct val="100000"/>
-              </a:lnSpc>
-              <a:spcBef>
-                <a:spcPts val="0"/>
-              </a:spcBef>
-              <a:spcAft>
-                <a:spcPts val="0"/>
-              </a:spcAft>
-              <a:buClrTx/>
-              <a:buSzTx/>
-              <a:buFontTx/>
-              <a:buChar char="-"/>
-              <a:tabLst/>
-              <a:defRPr/>
-            </a:pPr>
-            <a:r>
-              <a:rPr lang="en-US" dirty="0"/>
-              <a:t>Highlight that the final list is very different in the paper and </a:t>
-            </a:r>
-            <a:r>
-              <a:rPr lang="en-US" dirty="0" err="1"/>
-              <a:t>queston</a:t>
-            </a:r>
-            <a:r>
-              <a:rPr lang="en-US" dirty="0"/>
-              <a:t> is different. Difference in nodes</a:t>
-            </a:r>
-          </a:p>
-          <a:p>
+              <a:t>PEx</a:t>
+            </a:r>
+            <a:r>
+              <a:rPr lang="en-US"/>
+              <a:t> biology</a:t>
+            </a:r>
             <a:endParaRPr lang="en-US" dirty="0"/>
           </a:p>
         </p:txBody>
@@ -4358,7 +4727,7 @@
     </p:spTree>
     <p:extLst>
       <p:ext uri="{BB962C8B-B14F-4D97-AF65-F5344CB8AC3E}">
-        <p14:creationId xmlns:p14="http://schemas.microsoft.com/office/powerpoint/2010/main" val="961329649"/>
+        <p14:creationId xmlns:p14="http://schemas.microsoft.com/office/powerpoint/2010/main" val="3146157451"/>
       </p:ext>
     </p:extLst>
   </p:cSld>
@@ -4417,13 +4786,14 @@
               <a:buChar char="-"/>
             </a:pPr>
             <a:r>
+              <a:rPr lang="en-US" dirty="0"/>
+              <a:t>Previous work used this dataset with multi-omics strategy </a:t>
+            </a:r>
+            <a:r>
               <a:rPr lang="en-US" dirty="0" err="1"/>
-              <a:t>Somascan</a:t>
-            </a:r>
-            <a:r>
-              <a:rPr lang="en-US" dirty="0"/>
-              <a:t> 1000$ for a sample </a:t>
-            </a:r>
+              <a:t>SmCCNet</a:t>
+            </a:r>
+            <a:endParaRPr lang="en-US" dirty="0"/>
           </a:p>
           <a:p>
             <a:pPr marL="628650" lvl="1" indent="-171450">
@@ -4431,9 +4801,26 @@
               <a:buChar char="-"/>
             </a:pPr>
             <a:r>
-              <a:rPr lang="en-US" dirty="0"/>
-              <a:t>Especially because 2010-2012 collection dates</a:t>
-            </a:r>
+              <a:rPr lang="en-US" dirty="0" err="1"/>
+              <a:t>SmCCNet</a:t>
+            </a:r>
+            <a:r>
+              <a:rPr lang="en-US" dirty="0"/>
+              <a:t>: Sparse Multiple Canonical Correlation Network Analysis, i</a:t>
+            </a:r>
+            <a:r>
+              <a:rPr lang="en-US" sz="1200" b="0" i="0" kern="1200" dirty="0">
+                <a:solidFill>
+                  <a:schemeClr val="tx1"/>
+                </a:solidFill>
+                <a:effectLst/>
+                <a:latin typeface="+mn-lt"/>
+                <a:ea typeface="+mn-ea"/>
+                <a:cs typeface="+mn-cs"/>
+              </a:rPr>
+              <a:t>ntegrates multiple types of omics data with a specific phenotype of interest for molecular networks</a:t>
+            </a:r>
+            <a:endParaRPr lang="en-US" dirty="0"/>
           </a:p>
           <a:p>
             <a:pPr marL="628650" lvl="1" indent="-171450">
@@ -4442,32 +4829,149 @@
             </a:pPr>
             <a:r>
               <a:rPr lang="en-US" dirty="0"/>
-              <a:t>Recruiting patients is expensive</a:t>
-            </a:r>
-          </a:p>
-          <a:p>
-            <a:pPr marL="628650" lvl="1" indent="-171450">
+              <a:t>Identified subnetworks of taxa and proteins associated with </a:t>
+            </a:r>
+            <a:r>
+              <a:rPr lang="en-US" dirty="0" err="1"/>
+              <a:t>PEx</a:t>
+            </a:r>
+            <a:endParaRPr lang="en-US" dirty="0"/>
+          </a:p>
+          <a:p>
+            <a:pPr marL="171450" marR="0" lvl="0" indent="-171450" algn="l" defTabSz="914400" rtl="0" eaLnBrk="1" fontAlgn="auto" latinLnBrk="0" hangingPunct="1">
+              <a:lnSpc>
+                <a:spcPct val="100000"/>
+              </a:lnSpc>
+              <a:spcBef>
+                <a:spcPts val="0"/>
+              </a:spcBef>
+              <a:spcAft>
+                <a:spcPts val="0"/>
+              </a:spcAft>
+              <a:buClrTx/>
+              <a:buSzTx/>
               <a:buFontTx/>
               <a:buChar char="-"/>
+              <a:tabLst/>
+              <a:defRPr/>
             </a:pPr>
             <a:r>
               <a:rPr lang="en-US" dirty="0"/>
-              <a:t>Overall expensive study</a:t>
-            </a:r>
-          </a:p>
-          <a:p>
-            <a:pPr marL="628650" lvl="1" indent="-171450">
+              <a:t>Immune pathways: B cell proliferation, regulation of T-helper17 cell lineage commitment, positive regulation of NF-B transcription factor </a:t>
+            </a:r>
+            <a:r>
+              <a:rPr lang="en-US" dirty="0" err="1"/>
+              <a:t>activit</a:t>
+            </a:r>
+            <a:endParaRPr lang="en-US" dirty="0"/>
+          </a:p>
+          <a:p>
+            <a:pPr marL="171450" marR="0" lvl="0" indent="-171450" algn="l" defTabSz="914400" rtl="0" eaLnBrk="1" fontAlgn="auto" latinLnBrk="0" hangingPunct="1">
+              <a:lnSpc>
+                <a:spcPct val="100000"/>
+              </a:lnSpc>
+              <a:spcBef>
+                <a:spcPts val="0"/>
+              </a:spcBef>
+              <a:spcAft>
+                <a:spcPts val="0"/>
+              </a:spcAft>
+              <a:buClrTx/>
+              <a:buSzTx/>
               <a:buFontTx/>
               <a:buChar char="-"/>
+              <a:tabLst/>
+              <a:defRPr/>
             </a:pPr>
-            <a:endParaRPr lang="en-US" dirty="0"/>
-          </a:p>
-          <a:p>
-            <a:pPr marL="628650" lvl="1" indent="-171450">
+            <a:r>
+              <a:rPr lang="en-US" dirty="0"/>
+              <a:t>More focusing on networks of individual bacteria and proteins (different than trying to create groups of people based on the data, grouping bacteria and </a:t>
+            </a:r>
+            <a:r>
+              <a:rPr lang="en-US" dirty="0" err="1"/>
+              <a:t>proteisn</a:t>
+            </a:r>
+            <a:r>
+              <a:rPr lang="en-US" dirty="0"/>
+              <a:t>).</a:t>
+            </a:r>
+          </a:p>
+          <a:p>
+            <a:pPr marL="628650" marR="0" lvl="1" indent="-171450" algn="l" defTabSz="914400" rtl="0" eaLnBrk="1" fontAlgn="auto" latinLnBrk="0" hangingPunct="1">
+              <a:lnSpc>
+                <a:spcPct val="100000"/>
+              </a:lnSpc>
+              <a:spcBef>
+                <a:spcPts val="0"/>
+              </a:spcBef>
+              <a:spcAft>
+                <a:spcPts val="0"/>
+              </a:spcAft>
+              <a:buClrTx/>
+              <a:buSzTx/>
               <a:buFontTx/>
               <a:buChar char="-"/>
+              <a:tabLst/>
+              <a:defRPr/>
             </a:pPr>
-            <a:endParaRPr lang="en-US" dirty="0"/>
+            <a:r>
+              <a:rPr lang="en-US" dirty="0"/>
+              <a:t>Also supervised analysis, defining groups based on FEV. Me unsupervised approach without FEV and look at it later</a:t>
+            </a:r>
+          </a:p>
+          <a:p>
+            <a:pPr marL="628650" marR="0" lvl="1" indent="-171450" algn="l" defTabSz="914400" rtl="0" eaLnBrk="1" fontAlgn="auto" latinLnBrk="0" hangingPunct="1">
+              <a:lnSpc>
+                <a:spcPct val="100000"/>
+              </a:lnSpc>
+              <a:spcBef>
+                <a:spcPts val="0"/>
+              </a:spcBef>
+              <a:spcAft>
+                <a:spcPts val="0"/>
+              </a:spcAft>
+              <a:buClrTx/>
+              <a:buSzTx/>
+              <a:buFontTx/>
+              <a:buChar char="-"/>
+              <a:tabLst/>
+              <a:defRPr/>
+            </a:pPr>
+            <a:r>
+              <a:rPr lang="en-US" dirty="0"/>
+              <a:t>Not surprising that different, answering different questions</a:t>
+            </a:r>
+          </a:p>
+          <a:p>
+            <a:pPr marL="628650" marR="0" lvl="1" indent="-171450" algn="l" defTabSz="914400" rtl="0" eaLnBrk="1" fontAlgn="auto" latinLnBrk="0" hangingPunct="1">
+              <a:lnSpc>
+                <a:spcPct val="100000"/>
+              </a:lnSpc>
+              <a:spcBef>
+                <a:spcPts val="0"/>
+              </a:spcBef>
+              <a:spcAft>
+                <a:spcPts val="0"/>
+              </a:spcAft>
+              <a:buClrTx/>
+              <a:buSzTx/>
+              <a:buFontTx/>
+              <a:buChar char="-"/>
+              <a:tabLst/>
+              <a:defRPr/>
+            </a:pPr>
+            <a:r>
+              <a:rPr lang="en-US" dirty="0"/>
+              <a:t>Highlight that the final list is very different in the paper and </a:t>
+            </a:r>
+            <a:r>
+              <a:rPr lang="en-US" dirty="0" err="1"/>
+              <a:t>queston</a:t>
+            </a:r>
+            <a:r>
+              <a:rPr lang="en-US" dirty="0"/>
+              <a:t> is different. Difference in nodes</a:t>
+            </a:r>
           </a:p>
           <a:p>
             <a:endParaRPr lang="en-US" dirty="0"/>
@@ -4491,7 +4995,7 @@
           <a:p>
             <a:fld id="{8191C064-8647-4876-9565-66F236AD4655}" type="slidenum">
               <a:rPr lang="en-US" smtClean="0"/>
-              <a:t>27</a:t>
+              <a:t>26</a:t>
             </a:fld>
             <a:endParaRPr lang="en-US"/>
           </a:p>
@@ -4500,7 +5004,7 @@
     </p:spTree>
     <p:extLst>
       <p:ext uri="{BB962C8B-B14F-4D97-AF65-F5344CB8AC3E}">
-        <p14:creationId xmlns:p14="http://schemas.microsoft.com/office/powerpoint/2010/main" val="2186718525"/>
+        <p14:creationId xmlns:p14="http://schemas.microsoft.com/office/powerpoint/2010/main" val="961329649"/>
       </p:ext>
     </p:extLst>
   </p:cSld>
@@ -4554,6 +5058,64 @@
           <a:bodyPr/>
           <a:lstStyle/>
           <a:p>
+            <a:pPr marL="171450" indent="-171450">
+              <a:buFontTx/>
+              <a:buChar char="-"/>
+            </a:pPr>
+            <a:r>
+              <a:rPr lang="en-US" dirty="0" err="1"/>
+              <a:t>Somascan</a:t>
+            </a:r>
+            <a:r>
+              <a:rPr lang="en-US" dirty="0"/>
+              <a:t> 1000$ for a sample </a:t>
+            </a:r>
+          </a:p>
+          <a:p>
+            <a:pPr marL="628650" lvl="1" indent="-171450">
+              <a:buFontTx/>
+              <a:buChar char="-"/>
+            </a:pPr>
+            <a:r>
+              <a:rPr lang="en-US" dirty="0"/>
+              <a:t>Especially because 2010-2012 collection dates</a:t>
+            </a:r>
+          </a:p>
+          <a:p>
+            <a:pPr marL="628650" lvl="1" indent="-171450">
+              <a:buFontTx/>
+              <a:buChar char="-"/>
+            </a:pPr>
+            <a:r>
+              <a:rPr lang="en-US" dirty="0"/>
+              <a:t>Recruiting patients is expensive</a:t>
+            </a:r>
+          </a:p>
+          <a:p>
+            <a:pPr marL="628650" lvl="1" indent="-171450">
+              <a:buFontTx/>
+              <a:buChar char="-"/>
+            </a:pPr>
+            <a:r>
+              <a:rPr lang="en-US" dirty="0"/>
+              <a:t>Overall expensive study</a:t>
+            </a:r>
+          </a:p>
+          <a:p>
+            <a:pPr marL="628650" lvl="1" indent="-171450">
+              <a:buFontTx/>
+              <a:buChar char="-"/>
+            </a:pPr>
+            <a:endParaRPr lang="en-US" dirty="0"/>
+          </a:p>
+          <a:p>
+            <a:pPr marL="628650" lvl="1" indent="-171450">
+              <a:buFontTx/>
+              <a:buChar char="-"/>
+            </a:pPr>
+            <a:endParaRPr lang="en-US" dirty="0"/>
+          </a:p>
+          <a:p>
             <a:endParaRPr lang="en-US" dirty="0"/>
           </a:p>
         </p:txBody>
@@ -4575,7 +5137,7 @@
           <a:p>
             <a:fld id="{8191C064-8647-4876-9565-66F236AD4655}" type="slidenum">
               <a:rPr lang="en-US" smtClean="0"/>
-              <a:t>29</a:t>
+              <a:t>28</a:t>
             </a:fld>
             <a:endParaRPr lang="en-US"/>
           </a:p>
@@ -4584,7 +5146,7 @@
     </p:spTree>
     <p:extLst>
       <p:ext uri="{BB962C8B-B14F-4D97-AF65-F5344CB8AC3E}">
-        <p14:creationId xmlns:p14="http://schemas.microsoft.com/office/powerpoint/2010/main" val="3682090676"/>
+        <p14:creationId xmlns:p14="http://schemas.microsoft.com/office/powerpoint/2010/main" val="2186718525"/>
       </p:ext>
     </p:extLst>
   </p:cSld>
@@ -4638,16 +5200,7 @@
           <a:bodyPr/>
           <a:lstStyle/>
           <a:p>
-            <a:r>
-              <a:rPr lang="en-US" dirty="0"/>
-              <a:t>Microbiome: how many taxa as the final count for time point 1 and then the final count overall</a:t>
-            </a:r>
-          </a:p>
-          <a:p>
-            <a:r>
-              <a:rPr lang="en-US" dirty="0"/>
-              <a:t>Proteome: how many proteins final count </a:t>
-            </a:r>
+            <a:endParaRPr lang="en-US" dirty="0"/>
           </a:p>
         </p:txBody>
       </p:sp>
@@ -4668,7 +5221,7 @@
           <a:p>
             <a:fld id="{8191C064-8647-4876-9565-66F236AD4655}" type="slidenum">
               <a:rPr lang="en-US" smtClean="0"/>
-              <a:t>32</a:t>
+              <a:t>30</a:t>
             </a:fld>
             <a:endParaRPr lang="en-US"/>
           </a:p>
@@ -4677,7 +5230,7 @@
     </p:spTree>
     <p:extLst>
       <p:ext uri="{BB962C8B-B14F-4D97-AF65-F5344CB8AC3E}">
-        <p14:creationId xmlns:p14="http://schemas.microsoft.com/office/powerpoint/2010/main" val="1514366710"/>
+        <p14:creationId xmlns:p14="http://schemas.microsoft.com/office/powerpoint/2010/main" val="3682090676"/>
       </p:ext>
     </p:extLst>
   </p:cSld>
@@ -4733,226 +5286,14 @@
           <a:p>
             <a:r>
               <a:rPr lang="en-US" dirty="0"/>
-              <a:t>Mathematically like Hellinger (densities are nice objects</a:t>
-            </a:r>
-          </a:p>
-          <a:p>
-            <a:endParaRPr lang="en-US" dirty="0"/>
-          </a:p>
-          <a:p>
-            <a:r>
-              <a:rPr lang="en-US" dirty="0"/>
-              <a:t>No clusters for proteomics, microbiome Kirk could believe 9 </a:t>
-            </a:r>
-          </a:p>
-          <a:p>
-            <a:endParaRPr lang="en-US" dirty="0"/>
-          </a:p>
-          <a:p>
-            <a:r>
-              <a:rPr lang="en-US" dirty="0"/>
-              <a:t>Blood is systemic</a:t>
-            </a:r>
-          </a:p>
-          <a:p>
-            <a:endParaRPr lang="en-US" dirty="0"/>
-          </a:p>
-          <a:p>
-            <a:r>
-              <a:rPr lang="en-US" dirty="0"/>
-              <a:t>Probably some weighting to balance 4000 vs 70 (standardizing matrix by trace?) </a:t>
-            </a:r>
-          </a:p>
-          <a:p>
-            <a:r>
-              <a:rPr lang="en-US" dirty="0"/>
-              <a:t>Diff numbers of features in distances</a:t>
-            </a:r>
-          </a:p>
-          <a:p>
-            <a:endParaRPr lang="en-US" dirty="0"/>
-          </a:p>
-          <a:p>
-            <a:r>
-              <a:rPr lang="en-US" dirty="0"/>
-              <a:t>Hellinger bounded 0-1 by definition compresses the eigen values (by definition no variation)</a:t>
-            </a:r>
-          </a:p>
-          <a:p>
-            <a:pPr marL="171450" indent="-171450">
-              <a:buFontTx/>
-              <a:buChar char="-"/>
-            </a:pPr>
-            <a:r>
-              <a:rPr lang="en-US" dirty="0" err="1"/>
-              <a:t>Downweight</a:t>
-            </a:r>
-            <a:r>
-              <a:rPr lang="en-US" dirty="0"/>
-              <a:t> the Laplacian </a:t>
-            </a:r>
-          </a:p>
-          <a:p>
-            <a:pPr marL="171450" indent="-171450">
-              <a:buFontTx/>
-              <a:buChar char="-"/>
-            </a:pPr>
-            <a:endParaRPr lang="en-US" dirty="0"/>
-          </a:p>
-          <a:p>
-            <a:pPr marL="171450" indent="-171450">
-              <a:buFontTx/>
-              <a:buChar char="-"/>
-            </a:pPr>
-            <a:r>
-              <a:rPr lang="en-US" dirty="0"/>
-              <a:t>CLR skews things (never use robust CLR). What do you do with 0s for the CLR? </a:t>
-            </a:r>
-          </a:p>
-          <a:p>
-            <a:pPr marL="171450" indent="-171450">
-              <a:buFontTx/>
-              <a:buChar char="-"/>
-            </a:pPr>
-            <a:r>
-              <a:rPr lang="en-US" dirty="0"/>
-              <a:t>Include 2 different metrics and a consensus clustering </a:t>
-            </a:r>
-          </a:p>
-          <a:p>
-            <a:pPr marL="628650" lvl="1" indent="-171450">
-              <a:buFontTx/>
-              <a:buChar char="-"/>
-            </a:pPr>
-            <a:r>
-              <a:rPr lang="en-US" dirty="0"/>
-              <a:t>How well do the clusters line up with each other? </a:t>
-            </a:r>
-          </a:p>
-          <a:p>
-            <a:pPr marL="628650" lvl="1" indent="-171450">
-              <a:buFontTx/>
-              <a:buChar char="-"/>
-            </a:pPr>
-            <a:r>
-              <a:rPr lang="en-US" dirty="0"/>
-              <a:t>What is common across clusters -&gt; most stable findings (robust to different assumptions =&gt; more likely to be real) </a:t>
-            </a:r>
-          </a:p>
-          <a:p>
-            <a:pPr marL="1085850" lvl="2" indent="-171450">
-              <a:buFontTx/>
-              <a:buChar char="-"/>
-            </a:pPr>
-            <a:r>
-              <a:rPr lang="en-US" dirty="0"/>
-              <a:t>Only keep the people who have maintained clusters across algorithms (may be really small, changes downstream). </a:t>
-            </a:r>
-          </a:p>
-          <a:p>
-            <a:pPr marL="1543050" lvl="3" indent="-171450">
-              <a:buFontTx/>
-              <a:buChar char="-"/>
-            </a:pPr>
-            <a:r>
-              <a:rPr lang="en-US" dirty="0"/>
-              <a:t>Ability to comment on stability of clustering</a:t>
-            </a:r>
-          </a:p>
-          <a:p>
-            <a:pPr marL="1543050" lvl="3" indent="-171450">
-              <a:buFontTx/>
-              <a:buChar char="-"/>
-            </a:pPr>
-            <a:r>
-              <a:rPr lang="en-US" dirty="0"/>
-              <a:t>Biological interpretation is hard because it is too reductionist (what does average pseudomonas actually mean biologically)</a:t>
-            </a:r>
-          </a:p>
-          <a:p>
-            <a:pPr marL="1543050" lvl="3" indent="-171450">
-              <a:buFontTx/>
-              <a:buChar char="-"/>
-            </a:pPr>
-            <a:endParaRPr lang="en-US" dirty="0"/>
-          </a:p>
-          <a:p>
-            <a:pPr marL="1543050" lvl="3" indent="-171450">
-              <a:buFontTx/>
-              <a:buChar char="-"/>
-            </a:pPr>
-            <a:endParaRPr lang="en-US" dirty="0"/>
-          </a:p>
-          <a:p>
-            <a:pPr marL="1543050" lvl="3" indent="-171450">
-              <a:buFontTx/>
-              <a:buChar char="-"/>
-            </a:pPr>
-            <a:endParaRPr lang="en-US" dirty="0"/>
-          </a:p>
-          <a:p>
-            <a:pPr marL="1543050" lvl="3" indent="-171450">
-              <a:buFontTx/>
-              <a:buChar char="-"/>
-            </a:pPr>
-            <a:endParaRPr lang="en-US" dirty="0"/>
-          </a:p>
-          <a:p>
-            <a:pPr marL="1543050" lvl="3" indent="-171450">
-              <a:buFontTx/>
-              <a:buChar char="-"/>
-            </a:pPr>
-            <a:r>
-              <a:rPr lang="en-US" dirty="0"/>
-              <a:t>Plan – horn for microbiome, Euclidian for proteome and transform it. Use Euclidian for MMOC clustering assignments as on the distances. </a:t>
-            </a:r>
-          </a:p>
-          <a:p>
-            <a:pPr marL="1543050" lvl="3" indent="-171450">
-              <a:buFontTx/>
-              <a:buChar char="-"/>
-            </a:pPr>
-            <a:r>
-              <a:rPr lang="en-US" dirty="0"/>
-              <a:t>Merge everything with the same name (look for other ones – </a:t>
-            </a:r>
-            <a:r>
-              <a:rPr lang="en-US" dirty="0" err="1"/>
-              <a:t>fermicutes</a:t>
-            </a:r>
-            <a:r>
-              <a:rPr lang="en-US" dirty="0"/>
-              <a:t> (</a:t>
-            </a:r>
-            <a:r>
-              <a:rPr lang="en-US" dirty="0" err="1"/>
-              <a:t>enfusobacterium</a:t>
-            </a:r>
-            <a:r>
-              <a:rPr lang="en-US"/>
-              <a:t>)</a:t>
-            </a:r>
-          </a:p>
-          <a:p>
-            <a:pPr marL="1543050" lvl="3" indent="-171450">
-              <a:buFontTx/>
-              <a:buChar char="-"/>
-            </a:pPr>
-            <a:endParaRPr lang="en-US" dirty="0"/>
-          </a:p>
-          <a:p>
-            <a:pPr marL="1543050" lvl="3" indent="-171450">
-              <a:buFontTx/>
-              <a:buChar char="-"/>
-            </a:pPr>
-            <a:endParaRPr lang="en-US" dirty="0"/>
-          </a:p>
-          <a:p>
-            <a:pPr marL="1543050" lvl="3" indent="-171450">
-              <a:buFontTx/>
-              <a:buChar char="-"/>
-            </a:pPr>
-            <a:endParaRPr lang="en-US" dirty="0"/>
+              <a:t>Microbiome: how many taxa as the final count for time point 1 and then the final count overall</a:t>
+            </a:r>
+          </a:p>
+          <a:p>
+            <a:r>
+              <a:rPr lang="en-US" dirty="0"/>
+              <a:t>Proteome: how many proteins final count </a:t>
+            </a:r>
           </a:p>
         </p:txBody>
       </p:sp>
@@ -4973,7 +5314,7 @@
           <a:p>
             <a:fld id="{8191C064-8647-4876-9565-66F236AD4655}" type="slidenum">
               <a:rPr lang="en-US" smtClean="0"/>
-              <a:t>34</a:t>
+              <a:t>33</a:t>
             </a:fld>
             <a:endParaRPr lang="en-US"/>
           </a:p>
@@ -4982,7 +5323,7 @@
     </p:spTree>
     <p:extLst>
       <p:ext uri="{BB962C8B-B14F-4D97-AF65-F5344CB8AC3E}">
-        <p14:creationId xmlns:p14="http://schemas.microsoft.com/office/powerpoint/2010/main" val="3574811433"/>
+        <p14:creationId xmlns:p14="http://schemas.microsoft.com/office/powerpoint/2010/main" val="1514366710"/>
       </p:ext>
     </p:extLst>
   </p:cSld>
@@ -5253,6 +5594,311 @@
           <a:bodyPr/>
           <a:lstStyle/>
           <a:p>
+            <a:r>
+              <a:rPr lang="en-US" dirty="0"/>
+              <a:t>Mathematically like Hellinger (densities are nice objects</a:t>
+            </a:r>
+          </a:p>
+          <a:p>
+            <a:endParaRPr lang="en-US" dirty="0"/>
+          </a:p>
+          <a:p>
+            <a:r>
+              <a:rPr lang="en-US" dirty="0"/>
+              <a:t>No clusters for proteomics, microbiome Kirk could believe 9 </a:t>
+            </a:r>
+          </a:p>
+          <a:p>
+            <a:endParaRPr lang="en-US" dirty="0"/>
+          </a:p>
+          <a:p>
+            <a:r>
+              <a:rPr lang="en-US" dirty="0"/>
+              <a:t>Blood is systemic</a:t>
+            </a:r>
+          </a:p>
+          <a:p>
+            <a:endParaRPr lang="en-US" dirty="0"/>
+          </a:p>
+          <a:p>
+            <a:r>
+              <a:rPr lang="en-US" dirty="0"/>
+              <a:t>Probably some weighting to balance 4000 vs 70 (standardizing matrix by trace?) </a:t>
+            </a:r>
+          </a:p>
+          <a:p>
+            <a:r>
+              <a:rPr lang="en-US" dirty="0"/>
+              <a:t>Diff numbers of features in distances</a:t>
+            </a:r>
+          </a:p>
+          <a:p>
+            <a:endParaRPr lang="en-US" dirty="0"/>
+          </a:p>
+          <a:p>
+            <a:r>
+              <a:rPr lang="en-US" dirty="0"/>
+              <a:t>Hellinger bounded 0-1 by definition compresses the eigen values (by definition no variation)</a:t>
+            </a:r>
+          </a:p>
+          <a:p>
+            <a:pPr marL="171450" indent="-171450">
+              <a:buFontTx/>
+              <a:buChar char="-"/>
+            </a:pPr>
+            <a:r>
+              <a:rPr lang="en-US" dirty="0" err="1"/>
+              <a:t>Downweight</a:t>
+            </a:r>
+            <a:r>
+              <a:rPr lang="en-US" dirty="0"/>
+              <a:t> the Laplacian </a:t>
+            </a:r>
+          </a:p>
+          <a:p>
+            <a:pPr marL="171450" indent="-171450">
+              <a:buFontTx/>
+              <a:buChar char="-"/>
+            </a:pPr>
+            <a:endParaRPr lang="en-US" dirty="0"/>
+          </a:p>
+          <a:p>
+            <a:pPr marL="171450" indent="-171450">
+              <a:buFontTx/>
+              <a:buChar char="-"/>
+            </a:pPr>
+            <a:r>
+              <a:rPr lang="en-US" dirty="0"/>
+              <a:t>CLR skews things (never use robust CLR). What do you do with 0s for the CLR? </a:t>
+            </a:r>
+          </a:p>
+          <a:p>
+            <a:pPr marL="171450" indent="-171450">
+              <a:buFontTx/>
+              <a:buChar char="-"/>
+            </a:pPr>
+            <a:r>
+              <a:rPr lang="en-US" dirty="0"/>
+              <a:t>Include 2 different metrics and a consensus clustering </a:t>
+            </a:r>
+          </a:p>
+          <a:p>
+            <a:pPr marL="628650" lvl="1" indent="-171450">
+              <a:buFontTx/>
+              <a:buChar char="-"/>
+            </a:pPr>
+            <a:r>
+              <a:rPr lang="en-US" dirty="0"/>
+              <a:t>How well do the clusters line up with each other? </a:t>
+            </a:r>
+          </a:p>
+          <a:p>
+            <a:pPr marL="628650" lvl="1" indent="-171450">
+              <a:buFontTx/>
+              <a:buChar char="-"/>
+            </a:pPr>
+            <a:r>
+              <a:rPr lang="en-US" dirty="0"/>
+              <a:t>What is common across clusters -&gt; most stable findings (robust to different assumptions =&gt; more likely to be real) </a:t>
+            </a:r>
+          </a:p>
+          <a:p>
+            <a:pPr marL="1085850" lvl="2" indent="-171450">
+              <a:buFontTx/>
+              <a:buChar char="-"/>
+            </a:pPr>
+            <a:r>
+              <a:rPr lang="en-US" dirty="0"/>
+              <a:t>Only keep the people who have maintained clusters across algorithms (may be really small, changes downstream). </a:t>
+            </a:r>
+          </a:p>
+          <a:p>
+            <a:pPr marL="1543050" lvl="3" indent="-171450">
+              <a:buFontTx/>
+              <a:buChar char="-"/>
+            </a:pPr>
+            <a:r>
+              <a:rPr lang="en-US" dirty="0"/>
+              <a:t>Ability to comment on stability of clustering</a:t>
+            </a:r>
+          </a:p>
+          <a:p>
+            <a:pPr marL="1543050" lvl="3" indent="-171450">
+              <a:buFontTx/>
+              <a:buChar char="-"/>
+            </a:pPr>
+            <a:r>
+              <a:rPr lang="en-US" dirty="0"/>
+              <a:t>Biological interpretation is hard because it is too reductionist (what does average pseudomonas actually mean biologically)</a:t>
+            </a:r>
+          </a:p>
+          <a:p>
+            <a:pPr marL="1543050" lvl="3" indent="-171450">
+              <a:buFontTx/>
+              <a:buChar char="-"/>
+            </a:pPr>
+            <a:endParaRPr lang="en-US" dirty="0"/>
+          </a:p>
+          <a:p>
+            <a:pPr marL="1543050" lvl="3" indent="-171450">
+              <a:buFontTx/>
+              <a:buChar char="-"/>
+            </a:pPr>
+            <a:endParaRPr lang="en-US" dirty="0"/>
+          </a:p>
+          <a:p>
+            <a:pPr marL="1543050" lvl="3" indent="-171450">
+              <a:buFontTx/>
+              <a:buChar char="-"/>
+            </a:pPr>
+            <a:endParaRPr lang="en-US" dirty="0"/>
+          </a:p>
+          <a:p>
+            <a:pPr marL="1543050" lvl="3" indent="-171450">
+              <a:buFontTx/>
+              <a:buChar char="-"/>
+            </a:pPr>
+            <a:endParaRPr lang="en-US" dirty="0"/>
+          </a:p>
+          <a:p>
+            <a:pPr marL="1543050" lvl="3" indent="-171450">
+              <a:buFontTx/>
+              <a:buChar char="-"/>
+            </a:pPr>
+            <a:r>
+              <a:rPr lang="en-US" dirty="0"/>
+              <a:t>Plan – horn for microbiome, Euclidian for proteome and transform it. Use Euclidian for MMOC clustering assignments as on the distances. </a:t>
+            </a:r>
+          </a:p>
+          <a:p>
+            <a:pPr marL="1543050" lvl="3" indent="-171450">
+              <a:buFontTx/>
+              <a:buChar char="-"/>
+            </a:pPr>
+            <a:r>
+              <a:rPr lang="en-US" dirty="0"/>
+              <a:t>Merge everything with the same name (look for other ones – </a:t>
+            </a:r>
+            <a:r>
+              <a:rPr lang="en-US" dirty="0" err="1"/>
+              <a:t>fermicutes</a:t>
+            </a:r>
+            <a:r>
+              <a:rPr lang="en-US" dirty="0"/>
+              <a:t> (</a:t>
+            </a:r>
+            <a:r>
+              <a:rPr lang="en-US" dirty="0" err="1"/>
+              <a:t>enfusobacterium</a:t>
+            </a:r>
+            <a:r>
+              <a:rPr lang="en-US"/>
+              <a:t>)</a:t>
+            </a:r>
+          </a:p>
+          <a:p>
+            <a:pPr marL="1543050" lvl="3" indent="-171450">
+              <a:buFontTx/>
+              <a:buChar char="-"/>
+            </a:pPr>
+            <a:endParaRPr lang="en-US" dirty="0"/>
+          </a:p>
+          <a:p>
+            <a:pPr marL="1543050" lvl="3" indent="-171450">
+              <a:buFontTx/>
+              <a:buChar char="-"/>
+            </a:pPr>
+            <a:endParaRPr lang="en-US" dirty="0"/>
+          </a:p>
+          <a:p>
+            <a:pPr marL="1543050" lvl="3" indent="-171450">
+              <a:buFontTx/>
+              <a:buChar char="-"/>
+            </a:pPr>
+            <a:endParaRPr lang="en-US" dirty="0"/>
+          </a:p>
+        </p:txBody>
+      </p:sp>
+      <p:sp>
+        <p:nvSpPr>
+          <p:cNvPr id="4" name="Slide Number Placeholder 3"/>
+          <p:cNvSpPr>
+            <a:spLocks noGrp="1"/>
+          </p:cNvSpPr>
+          <p:nvPr>
+            <p:ph type="sldNum" sz="quarter" idx="5"/>
+          </p:nvPr>
+        </p:nvSpPr>
+        <p:spPr/>
+        <p:txBody>
+          <a:bodyPr/>
+          <a:lstStyle/>
+          <a:p>
+            <a:fld id="{8191C064-8647-4876-9565-66F236AD4655}" type="slidenum">
+              <a:rPr lang="en-US" smtClean="0"/>
+              <a:t>35</a:t>
+            </a:fld>
+            <a:endParaRPr lang="en-US"/>
+          </a:p>
+        </p:txBody>
+      </p:sp>
+    </p:spTree>
+    <p:extLst>
+      <p:ext uri="{BB962C8B-B14F-4D97-AF65-F5344CB8AC3E}">
+        <p14:creationId xmlns:p14="http://schemas.microsoft.com/office/powerpoint/2010/main" val="3574811433"/>
+      </p:ext>
+    </p:extLst>
+  </p:cSld>
+  <p:clrMapOvr>
+    <a:masterClrMapping/>
+  </p:clrMapOvr>
+</p:notes>
+</file>
+
+<file path=ppt/notesSlides/notesSlide31.xml><?xml version="1.0" encoding="utf-8"?>
+<p:notes xmlns:a="http://schemas.openxmlformats.org/drawingml/2006/main" xmlns:r="http://schemas.openxmlformats.org/officeDocument/2006/relationships" xmlns:p="http://schemas.openxmlformats.org/presentationml/2006/main">
+  <p:cSld>
+    <p:spTree>
+      <p:nvGrpSpPr>
+        <p:cNvPr id="1" name=""/>
+        <p:cNvGrpSpPr/>
+        <p:nvPr/>
+      </p:nvGrpSpPr>
+      <p:grpSpPr>
+        <a:xfrm>
+          <a:off x="0" y="0"/>
+          <a:ext cx="0" cy="0"/>
+          <a:chOff x="0" y="0"/>
+          <a:chExt cx="0" cy="0"/>
+        </a:xfrm>
+      </p:grpSpPr>
+      <p:sp>
+        <p:nvSpPr>
+          <p:cNvPr id="2" name="Slide Image Placeholder 1"/>
+          <p:cNvSpPr>
+            <a:spLocks noGrp="1" noRot="1" noChangeAspect="1"/>
+          </p:cNvSpPr>
+          <p:nvPr>
+            <p:ph type="sldImg"/>
+          </p:nvPr>
+        </p:nvSpPr>
+        <p:spPr/>
+      </p:sp>
+      <p:sp>
+        <p:nvSpPr>
+          <p:cNvPr id="3" name="Notes Placeholder 2"/>
+          <p:cNvSpPr>
+            <a:spLocks noGrp="1"/>
+          </p:cNvSpPr>
+          <p:nvPr>
+            <p:ph type="body" idx="1"/>
+          </p:nvPr>
+        </p:nvSpPr>
+        <p:spPr/>
+        <p:txBody>
+          <a:bodyPr/>
+          <a:lstStyle/>
+          <a:p>
             <a:pPr marL="171450" marR="0" lvl="0" indent="-171450" algn="l" defTabSz="914400" rtl="0" eaLnBrk="1" fontAlgn="auto" latinLnBrk="0" hangingPunct="1">
               <a:lnSpc>
                 <a:spcPct val="100000"/>
@@ -5294,7 +5940,7 @@
           <a:p>
             <a:fld id="{8191C064-8647-4876-9565-66F236AD4655}" type="slidenum">
               <a:rPr lang="en-US" smtClean="0"/>
-              <a:t>35</a:t>
+              <a:t>36</a:t>
             </a:fld>
             <a:endParaRPr lang="en-US"/>
           </a:p>
@@ -5313,7 +5959,7 @@
 </p:notes>
 </file>
 
-<file path=ppt/notesSlides/notesSlide31.xml><?xml version="1.0" encoding="utf-8"?>
+<file path=ppt/notesSlides/notesSlide32.xml><?xml version="1.0" encoding="utf-8"?>
 <p:notes xmlns:a="http://schemas.openxmlformats.org/drawingml/2006/main" xmlns:r="http://schemas.openxmlformats.org/officeDocument/2006/relationships" xmlns:p="http://schemas.openxmlformats.org/presentationml/2006/main">
   <p:cSld>
     <p:spTree>
@@ -5409,7 +6055,7 @@
           <a:p>
             <a:fld id="{8191C064-8647-4876-9565-66F236AD4655}" type="slidenum">
               <a:rPr lang="en-US" smtClean="0"/>
-              <a:t>36</a:t>
+              <a:t>37</a:t>
             </a:fld>
             <a:endParaRPr lang="en-US"/>
           </a:p>
@@ -6133,6 +6779,226 @@
               <a:tabLst/>
               <a:defRPr/>
             </a:pPr>
+            <a:endParaRPr lang="en-US" dirty="0"/>
+          </a:p>
+          <a:p>
+            <a:pPr marL="1085850" marR="0" lvl="2" indent="-171450" algn="l" defTabSz="914400" rtl="0" eaLnBrk="1" fontAlgn="auto" latinLnBrk="0" hangingPunct="1">
+              <a:lnSpc>
+                <a:spcPct val="100000"/>
+              </a:lnSpc>
+              <a:spcBef>
+                <a:spcPts val="0"/>
+              </a:spcBef>
+              <a:spcAft>
+                <a:spcPts val="0"/>
+              </a:spcAft>
+              <a:buClrTx/>
+              <a:buSzTx/>
+              <a:buFontTx/>
+              <a:buChar char="-"/>
+              <a:tabLst/>
+              <a:defRPr/>
+            </a:pPr>
+            <a:endParaRPr lang="en-US" dirty="0"/>
+          </a:p>
+          <a:p>
+            <a:pPr marL="1085850" marR="0" lvl="2" indent="-171450" algn="l" defTabSz="914400" rtl="0" eaLnBrk="1" fontAlgn="auto" latinLnBrk="0" hangingPunct="1">
+              <a:lnSpc>
+                <a:spcPct val="100000"/>
+              </a:lnSpc>
+              <a:spcBef>
+                <a:spcPts val="0"/>
+              </a:spcBef>
+              <a:spcAft>
+                <a:spcPts val="0"/>
+              </a:spcAft>
+              <a:buClrTx/>
+              <a:buSzTx/>
+              <a:buFontTx/>
+              <a:buChar char="-"/>
+              <a:tabLst/>
+              <a:defRPr/>
+            </a:pPr>
+            <a:endParaRPr lang="en-US" dirty="0"/>
+          </a:p>
+          <a:p>
+            <a:pPr marL="1085850" marR="0" lvl="2" indent="-171450" algn="l" defTabSz="914400" rtl="0" eaLnBrk="1" fontAlgn="auto" latinLnBrk="0" hangingPunct="1">
+              <a:lnSpc>
+                <a:spcPct val="100000"/>
+              </a:lnSpc>
+              <a:spcBef>
+                <a:spcPts val="0"/>
+              </a:spcBef>
+              <a:spcAft>
+                <a:spcPts val="0"/>
+              </a:spcAft>
+              <a:buClrTx/>
+              <a:buSzTx/>
+              <a:buFontTx/>
+              <a:buChar char="-"/>
+              <a:tabLst/>
+              <a:defRPr/>
+            </a:pPr>
+            <a:endParaRPr lang="en-US" dirty="0"/>
+          </a:p>
+          <a:p>
+            <a:pPr marL="1085850" marR="0" lvl="2" indent="-171450" algn="l" defTabSz="914400" rtl="0" eaLnBrk="1" fontAlgn="auto" latinLnBrk="0" hangingPunct="1">
+              <a:lnSpc>
+                <a:spcPct val="100000"/>
+              </a:lnSpc>
+              <a:spcBef>
+                <a:spcPts val="0"/>
+              </a:spcBef>
+              <a:spcAft>
+                <a:spcPts val="0"/>
+              </a:spcAft>
+              <a:buClrTx/>
+              <a:buSzTx/>
+              <a:buFontTx/>
+              <a:buChar char="-"/>
+              <a:tabLst/>
+              <a:defRPr/>
+            </a:pPr>
+            <a:endParaRPr lang="en-US" dirty="0"/>
+          </a:p>
+          <a:p>
+            <a:pPr marL="1085850" marR="0" lvl="2" indent="-171450" algn="l" defTabSz="914400" rtl="0" eaLnBrk="1" fontAlgn="auto" latinLnBrk="0" hangingPunct="1">
+              <a:lnSpc>
+                <a:spcPct val="100000"/>
+              </a:lnSpc>
+              <a:spcBef>
+                <a:spcPts val="0"/>
+              </a:spcBef>
+              <a:spcAft>
+                <a:spcPts val="0"/>
+              </a:spcAft>
+              <a:buClrTx/>
+              <a:buSzTx/>
+              <a:buFontTx/>
+              <a:buChar char="-"/>
+              <a:tabLst/>
+              <a:defRPr/>
+            </a:pPr>
+            <a:endParaRPr lang="en-US" dirty="0"/>
+          </a:p>
+          <a:p>
+            <a:pPr marL="1085850" marR="0" lvl="2" indent="-171450" algn="l" defTabSz="914400" rtl="0" eaLnBrk="1" fontAlgn="auto" latinLnBrk="0" hangingPunct="1">
+              <a:lnSpc>
+                <a:spcPct val="100000"/>
+              </a:lnSpc>
+              <a:spcBef>
+                <a:spcPts val="0"/>
+              </a:spcBef>
+              <a:spcAft>
+                <a:spcPts val="0"/>
+              </a:spcAft>
+              <a:buClrTx/>
+              <a:buSzTx/>
+              <a:buFontTx/>
+              <a:buChar char="-"/>
+              <a:tabLst/>
+              <a:defRPr/>
+            </a:pPr>
+            <a:endParaRPr lang="en-US" dirty="0"/>
+          </a:p>
+          <a:p>
+            <a:pPr marL="1085850" marR="0" lvl="2" indent="-171450" algn="l" defTabSz="914400" rtl="0" eaLnBrk="1" fontAlgn="auto" latinLnBrk="0" hangingPunct="1">
+              <a:lnSpc>
+                <a:spcPct val="100000"/>
+              </a:lnSpc>
+              <a:spcBef>
+                <a:spcPts val="0"/>
+              </a:spcBef>
+              <a:spcAft>
+                <a:spcPts val="0"/>
+              </a:spcAft>
+              <a:buClrTx/>
+              <a:buSzTx/>
+              <a:buFontTx/>
+              <a:buChar char="-"/>
+              <a:tabLst/>
+              <a:defRPr/>
+            </a:pPr>
+            <a:endParaRPr lang="en-US" dirty="0"/>
+          </a:p>
+          <a:p>
+            <a:pPr marL="1085850" marR="0" lvl="2" indent="-171450" algn="l" defTabSz="914400" rtl="0" eaLnBrk="1" fontAlgn="auto" latinLnBrk="0" hangingPunct="1">
+              <a:lnSpc>
+                <a:spcPct val="100000"/>
+              </a:lnSpc>
+              <a:spcBef>
+                <a:spcPts val="0"/>
+              </a:spcBef>
+              <a:spcAft>
+                <a:spcPts val="0"/>
+              </a:spcAft>
+              <a:buClrTx/>
+              <a:buSzTx/>
+              <a:buFontTx/>
+              <a:buChar char="-"/>
+              <a:tabLst/>
+              <a:defRPr/>
+            </a:pPr>
+            <a:endParaRPr lang="en-US" dirty="0"/>
+          </a:p>
+          <a:p>
+            <a:pPr marL="1085850" marR="0" lvl="2" indent="-171450" algn="l" defTabSz="914400" rtl="0" eaLnBrk="1" fontAlgn="auto" latinLnBrk="0" hangingPunct="1">
+              <a:lnSpc>
+                <a:spcPct val="100000"/>
+              </a:lnSpc>
+              <a:spcBef>
+                <a:spcPts val="0"/>
+              </a:spcBef>
+              <a:spcAft>
+                <a:spcPts val="0"/>
+              </a:spcAft>
+              <a:buClrTx/>
+              <a:buSzTx/>
+              <a:buFontTx/>
+              <a:buChar char="-"/>
+              <a:tabLst/>
+              <a:defRPr/>
+            </a:pPr>
+            <a:endParaRPr lang="en-US" dirty="0"/>
+          </a:p>
+          <a:p>
+            <a:pPr marL="1085850" marR="0" lvl="2" indent="-171450" algn="l" defTabSz="914400" rtl="0" eaLnBrk="1" fontAlgn="auto" latinLnBrk="0" hangingPunct="1">
+              <a:lnSpc>
+                <a:spcPct val="100000"/>
+              </a:lnSpc>
+              <a:spcBef>
+                <a:spcPts val="0"/>
+              </a:spcBef>
+              <a:spcAft>
+                <a:spcPts val="0"/>
+              </a:spcAft>
+              <a:buClrTx/>
+              <a:buSzTx/>
+              <a:buFontTx/>
+              <a:buChar char="-"/>
+              <a:tabLst/>
+              <a:defRPr/>
+            </a:pPr>
+            <a:endParaRPr lang="en-US" dirty="0"/>
+          </a:p>
+          <a:p>
+            <a:pPr marL="1085850" marR="0" lvl="2" indent="-171450" algn="l" defTabSz="914400" rtl="0" eaLnBrk="1" fontAlgn="auto" latinLnBrk="0" hangingPunct="1">
+              <a:lnSpc>
+                <a:spcPct val="100000"/>
+              </a:lnSpc>
+              <a:spcBef>
+                <a:spcPts val="0"/>
+              </a:spcBef>
+              <a:spcAft>
+                <a:spcPts val="0"/>
+              </a:spcAft>
+              <a:buClrTx/>
+              <a:buSzTx/>
+              <a:buFontTx/>
+              <a:buChar char="-"/>
+              <a:tabLst/>
+              <a:defRPr/>
+            </a:pPr>
             <a:r>
               <a:rPr lang="en-US" dirty="0"/>
               <a:t>Add details about study (inclusion/exclusion criteria)</a:t>
@@ -6600,7 +7466,7 @@
           <a:p>
             <a:fld id="{8C2D25AA-EB80-4850-95EF-F61C8C15279B}" type="datetimeFigureOut">
               <a:rPr lang="en-US" smtClean="0"/>
-              <a:t>4/7/2026</a:t>
+              <a:t>4/23/2026</a:t>
             </a:fld>
             <a:endParaRPr lang="en-US"/>
           </a:p>
@@ -6798,7 +7664,7 @@
           <a:p>
             <a:fld id="{8C2D25AA-EB80-4850-95EF-F61C8C15279B}" type="datetimeFigureOut">
               <a:rPr lang="en-US" smtClean="0"/>
-              <a:t>4/7/2026</a:t>
+              <a:t>4/23/2026</a:t>
             </a:fld>
             <a:endParaRPr lang="en-US"/>
           </a:p>
@@ -7006,7 +7872,7 @@
           <a:p>
             <a:fld id="{8C2D25AA-EB80-4850-95EF-F61C8C15279B}" type="datetimeFigureOut">
               <a:rPr lang="en-US" smtClean="0"/>
-              <a:t>4/7/2026</a:t>
+              <a:t>4/23/2026</a:t>
             </a:fld>
             <a:endParaRPr lang="en-US"/>
           </a:p>
@@ -7204,7 +8070,7 @@
           <a:p>
             <a:fld id="{8C2D25AA-EB80-4850-95EF-F61C8C15279B}" type="datetimeFigureOut">
               <a:rPr lang="en-US" smtClean="0"/>
-              <a:t>4/7/2026</a:t>
+              <a:t>4/23/2026</a:t>
             </a:fld>
             <a:endParaRPr lang="en-US"/>
           </a:p>
@@ -7479,7 +8345,7 @@
           <a:p>
             <a:fld id="{8C2D25AA-EB80-4850-95EF-F61C8C15279B}" type="datetimeFigureOut">
               <a:rPr lang="en-US" smtClean="0"/>
-              <a:t>4/7/2026</a:t>
+              <a:t>4/23/2026</a:t>
             </a:fld>
             <a:endParaRPr lang="en-US"/>
           </a:p>
@@ -7744,7 +8610,7 @@
           <a:p>
             <a:fld id="{8C2D25AA-EB80-4850-95EF-F61C8C15279B}" type="datetimeFigureOut">
               <a:rPr lang="en-US" smtClean="0"/>
-              <a:t>4/7/2026</a:t>
+              <a:t>4/23/2026</a:t>
             </a:fld>
             <a:endParaRPr lang="en-US"/>
           </a:p>
@@ -8156,7 +9022,7 @@
           <a:p>
             <a:fld id="{8C2D25AA-EB80-4850-95EF-F61C8C15279B}" type="datetimeFigureOut">
               <a:rPr lang="en-US" smtClean="0"/>
-              <a:t>4/7/2026</a:t>
+              <a:t>4/23/2026</a:t>
             </a:fld>
             <a:endParaRPr lang="en-US"/>
           </a:p>
@@ -8297,7 +9163,7 @@
           <a:p>
             <a:fld id="{8C2D25AA-EB80-4850-95EF-F61C8C15279B}" type="datetimeFigureOut">
               <a:rPr lang="en-US" smtClean="0"/>
-              <a:t>4/7/2026</a:t>
+              <a:t>4/23/2026</a:t>
             </a:fld>
             <a:endParaRPr lang="en-US"/>
           </a:p>
@@ -8410,7 +9276,7 @@
           <a:p>
             <a:fld id="{8C2D25AA-EB80-4850-95EF-F61C8C15279B}" type="datetimeFigureOut">
               <a:rPr lang="en-US" smtClean="0"/>
-              <a:t>4/7/2026</a:t>
+              <a:t>4/23/2026</a:t>
             </a:fld>
             <a:endParaRPr lang="en-US"/>
           </a:p>
@@ -8721,7 +9587,7 @@
           <a:p>
             <a:fld id="{8C2D25AA-EB80-4850-95EF-F61C8C15279B}" type="datetimeFigureOut">
               <a:rPr lang="en-US" smtClean="0"/>
-              <a:t>4/7/2026</a:t>
+              <a:t>4/23/2026</a:t>
             </a:fld>
             <a:endParaRPr lang="en-US"/>
           </a:p>
@@ -9009,7 +9875,7 @@
           <a:p>
             <a:fld id="{8C2D25AA-EB80-4850-95EF-F61C8C15279B}" type="datetimeFigureOut">
               <a:rPr lang="en-US" smtClean="0"/>
-              <a:t>4/7/2026</a:t>
+              <a:t>4/23/2026</a:t>
             </a:fld>
             <a:endParaRPr lang="en-US"/>
           </a:p>
@@ -9250,7 +10116,7 @@
           <a:p>
             <a:fld id="{8C2D25AA-EB80-4850-95EF-F61C8C15279B}" type="datetimeFigureOut">
               <a:rPr lang="en-US" smtClean="0"/>
-              <a:t>4/7/2026</a:t>
+              <a:t>4/23/2026</a:t>
             </a:fld>
             <a:endParaRPr lang="en-US"/>
           </a:p>
@@ -9744,7 +10610,7 @@
           <a:p>
             <a:r>
               <a:rPr lang="en-US" dirty="0"/>
-              <a:t>7 April 2026</a:t>
+              <a:t>23 April 2026</a:t>
             </a:r>
           </a:p>
         </p:txBody>
@@ -9934,528 +10800,12 @@
           <a:chExt cx="0" cy="0"/>
         </a:xfrm>
       </p:grpSpPr>
-      <p:graphicFrame>
-        <p:nvGraphicFramePr>
-          <p:cNvPr id="29" name="Table 28">
-            <a:extLst>
-              <a:ext uri="{FF2B5EF4-FFF2-40B4-BE49-F238E27FC236}">
-                <a16:creationId xmlns:a16="http://schemas.microsoft.com/office/drawing/2014/main" id="{464F2507-7604-CADB-B93B-2590A44E42C1}"/>
-              </a:ext>
-            </a:extLst>
-          </p:cNvPr>
-          <p:cNvGraphicFramePr>
-            <a:graphicFrameLocks noGrp="1"/>
-          </p:cNvGraphicFramePr>
-          <p:nvPr>
-            <p:extLst>
-              <p:ext uri="{D42A27DB-BD31-4B8C-83A1-F6EECF244321}">
-                <p14:modId xmlns:p14="http://schemas.microsoft.com/office/powerpoint/2010/main" val="3189983716"/>
-              </p:ext>
-            </p:extLst>
-          </p:nvPr>
-        </p:nvGraphicFramePr>
-        <p:xfrm>
-          <a:off x="5840562" y="3764613"/>
-          <a:ext cx="1041400" cy="1092260"/>
-        </p:xfrm>
-        <a:graphic>
-          <a:graphicData uri="http://schemas.openxmlformats.org/drawingml/2006/table">
-            <a:tbl>
-              <a:tblPr bandRow="1">
-                <a:tableStyleId>{5C22544A-7EE6-4342-B048-85BDC9FD1C3A}</a:tableStyleId>
-              </a:tblPr>
-              <a:tblGrid>
-                <a:gridCol w="208280">
-                  <a:extLst>
-                    <a:ext uri="{9D8B030D-6E8A-4147-A177-3AD203B41FA5}">
-                      <a16:colId xmlns:a16="http://schemas.microsoft.com/office/drawing/2014/main" val="3797489107"/>
-                    </a:ext>
-                  </a:extLst>
-                </a:gridCol>
-                <a:gridCol w="208280">
-                  <a:extLst>
-                    <a:ext uri="{9D8B030D-6E8A-4147-A177-3AD203B41FA5}">
-                      <a16:colId xmlns:a16="http://schemas.microsoft.com/office/drawing/2014/main" val="1923188939"/>
-                    </a:ext>
-                  </a:extLst>
-                </a:gridCol>
-                <a:gridCol w="208280">
-                  <a:extLst>
-                    <a:ext uri="{9D8B030D-6E8A-4147-A177-3AD203B41FA5}">
-                      <a16:colId xmlns:a16="http://schemas.microsoft.com/office/drawing/2014/main" val="3761141565"/>
-                    </a:ext>
-                  </a:extLst>
-                </a:gridCol>
-                <a:gridCol w="208280">
-                  <a:extLst>
-                    <a:ext uri="{9D8B030D-6E8A-4147-A177-3AD203B41FA5}">
-                      <a16:colId xmlns:a16="http://schemas.microsoft.com/office/drawing/2014/main" val="1761226943"/>
-                    </a:ext>
-                  </a:extLst>
-                </a:gridCol>
-                <a:gridCol w="208280">
-                  <a:extLst>
-                    <a:ext uri="{9D8B030D-6E8A-4147-A177-3AD203B41FA5}">
-                      <a16:colId xmlns:a16="http://schemas.microsoft.com/office/drawing/2014/main" val="2790257538"/>
-                    </a:ext>
-                  </a:extLst>
-                </a:gridCol>
-              </a:tblGrid>
-              <a:tr h="218452">
-                <a:tc>
-                  <a:txBody>
-                    <a:bodyPr/>
-                    <a:lstStyle/>
-                    <a:p>
-                      <a:endParaRPr lang="en-US" sz="100" dirty="0"/>
-                    </a:p>
-                  </a:txBody>
-                  <a:tcPr>
-                    <a:solidFill>
-                      <a:srgbClr val="00B0F0"/>
-                    </a:solidFill>
-                  </a:tcPr>
-                </a:tc>
-                <a:tc>
-                  <a:txBody>
-                    <a:bodyPr/>
-                    <a:lstStyle/>
-                    <a:p>
-                      <a:endParaRPr lang="en-US" sz="100" dirty="0"/>
-                    </a:p>
-                  </a:txBody>
-                  <a:tcPr>
-                    <a:solidFill>
-                      <a:schemeClr val="accent4">
-                        <a:lumMod val="40000"/>
-                        <a:lumOff val="60000"/>
-                      </a:schemeClr>
-                    </a:solidFill>
-                  </a:tcPr>
-                </a:tc>
-                <a:tc>
-                  <a:txBody>
-                    <a:bodyPr/>
-                    <a:lstStyle/>
-                    <a:p>
-                      <a:endParaRPr lang="en-US" sz="100" dirty="0"/>
-                    </a:p>
-                  </a:txBody>
-                  <a:tcPr>
-                    <a:solidFill>
-                      <a:schemeClr val="accent4">
-                        <a:lumMod val="40000"/>
-                        <a:lumOff val="60000"/>
-                      </a:schemeClr>
-                    </a:solidFill>
-                  </a:tcPr>
-                </a:tc>
-                <a:tc>
-                  <a:txBody>
-                    <a:bodyPr/>
-                    <a:lstStyle/>
-                    <a:p>
-                      <a:endParaRPr lang="en-US" sz="100" dirty="0"/>
-                    </a:p>
-                  </a:txBody>
-                  <a:tcPr>
-                    <a:solidFill>
-                      <a:schemeClr val="accent4">
-                        <a:lumMod val="40000"/>
-                        <a:lumOff val="60000"/>
-                      </a:schemeClr>
-                    </a:solidFill>
-                  </a:tcPr>
-                </a:tc>
-                <a:tc>
-                  <a:txBody>
-                    <a:bodyPr/>
-                    <a:lstStyle/>
-                    <a:p>
-                      <a:endParaRPr lang="en-US" sz="100" dirty="0"/>
-                    </a:p>
-                  </a:txBody>
-                  <a:tcPr>
-                    <a:solidFill>
-                      <a:schemeClr val="accent4">
-                        <a:lumMod val="40000"/>
-                        <a:lumOff val="60000"/>
-                      </a:schemeClr>
-                    </a:solidFill>
-                  </a:tcPr>
-                </a:tc>
-                <a:extLst>
-                  <a:ext uri="{0D108BD9-81ED-4DB2-BD59-A6C34878D82A}">
-                    <a16:rowId xmlns:a16="http://schemas.microsoft.com/office/drawing/2014/main" val="3217724806"/>
-                  </a:ext>
-                </a:extLst>
-              </a:tr>
-              <a:tr h="218452">
-                <a:tc>
-                  <a:txBody>
-                    <a:bodyPr/>
-                    <a:lstStyle/>
-                    <a:p>
-                      <a:endParaRPr lang="en-US" sz="100" dirty="0"/>
-                    </a:p>
-                  </a:txBody>
-                  <a:tcPr>
-                    <a:solidFill>
-                      <a:schemeClr val="accent4">
-                        <a:lumMod val="40000"/>
-                        <a:lumOff val="60000"/>
-                      </a:schemeClr>
-                    </a:solidFill>
-                  </a:tcPr>
-                </a:tc>
-                <a:tc>
-                  <a:txBody>
-                    <a:bodyPr/>
-                    <a:lstStyle/>
-                    <a:p>
-                      <a:endParaRPr lang="en-US" sz="100" dirty="0"/>
-                    </a:p>
-                  </a:txBody>
-                  <a:tcPr>
-                    <a:solidFill>
-                      <a:srgbClr val="00B0F0"/>
-                    </a:solidFill>
-                  </a:tcPr>
-                </a:tc>
-                <a:tc>
-                  <a:txBody>
-                    <a:bodyPr/>
-                    <a:lstStyle/>
-                    <a:p>
-                      <a:endParaRPr lang="en-US" sz="100" dirty="0"/>
-                    </a:p>
-                  </a:txBody>
-                  <a:tcPr>
-                    <a:solidFill>
-                      <a:schemeClr val="accent4">
-                        <a:lumMod val="40000"/>
-                        <a:lumOff val="60000"/>
-                      </a:schemeClr>
-                    </a:solidFill>
-                  </a:tcPr>
-                </a:tc>
-                <a:tc>
-                  <a:txBody>
-                    <a:bodyPr/>
-                    <a:lstStyle/>
-                    <a:p>
-                      <a:endParaRPr lang="en-US" sz="100" dirty="0"/>
-                    </a:p>
-                  </a:txBody>
-                  <a:tcPr>
-                    <a:solidFill>
-                      <a:schemeClr val="accent4">
-                        <a:lumMod val="40000"/>
-                        <a:lumOff val="60000"/>
-                      </a:schemeClr>
-                    </a:solidFill>
-                  </a:tcPr>
-                </a:tc>
-                <a:tc>
-                  <a:txBody>
-                    <a:bodyPr/>
-                    <a:lstStyle/>
-                    <a:p>
-                      <a:endParaRPr lang="en-US" sz="100" dirty="0"/>
-                    </a:p>
-                  </a:txBody>
-                  <a:tcPr>
-                    <a:solidFill>
-                      <a:schemeClr val="accent4">
-                        <a:lumMod val="40000"/>
-                        <a:lumOff val="60000"/>
-                      </a:schemeClr>
-                    </a:solidFill>
-                  </a:tcPr>
-                </a:tc>
-                <a:extLst>
-                  <a:ext uri="{0D108BD9-81ED-4DB2-BD59-A6C34878D82A}">
-                    <a16:rowId xmlns:a16="http://schemas.microsoft.com/office/drawing/2014/main" val="3401334349"/>
-                  </a:ext>
-                </a:extLst>
-              </a:tr>
-              <a:tr h="218452">
-                <a:tc>
-                  <a:txBody>
-                    <a:bodyPr/>
-                    <a:lstStyle/>
-                    <a:p>
-                      <a:endParaRPr lang="en-US" sz="100" dirty="0"/>
-                    </a:p>
-                  </a:txBody>
-                  <a:tcPr>
-                    <a:solidFill>
-                      <a:schemeClr val="accent4">
-                        <a:lumMod val="40000"/>
-                        <a:lumOff val="60000"/>
-                      </a:schemeClr>
-                    </a:solidFill>
-                  </a:tcPr>
-                </a:tc>
-                <a:tc>
-                  <a:txBody>
-                    <a:bodyPr/>
-                    <a:lstStyle/>
-                    <a:p>
-                      <a:endParaRPr lang="en-US" sz="100" dirty="0"/>
-                    </a:p>
-                  </a:txBody>
-                  <a:tcPr>
-                    <a:solidFill>
-                      <a:schemeClr val="accent4">
-                        <a:lumMod val="40000"/>
-                        <a:lumOff val="60000"/>
-                      </a:schemeClr>
-                    </a:solidFill>
-                  </a:tcPr>
-                </a:tc>
-                <a:tc>
-                  <a:txBody>
-                    <a:bodyPr/>
-                    <a:lstStyle/>
-                    <a:p>
-                      <a:endParaRPr lang="en-US" sz="100" dirty="0"/>
-                    </a:p>
-                  </a:txBody>
-                  <a:tcPr>
-                    <a:solidFill>
-                      <a:srgbClr val="00B0F0"/>
-                    </a:solidFill>
-                  </a:tcPr>
-                </a:tc>
-                <a:tc>
-                  <a:txBody>
-                    <a:bodyPr/>
-                    <a:lstStyle/>
-                    <a:p>
-                      <a:endParaRPr lang="en-US" sz="100" dirty="0"/>
-                    </a:p>
-                  </a:txBody>
-                  <a:tcPr>
-                    <a:solidFill>
-                      <a:schemeClr val="accent4">
-                        <a:lumMod val="40000"/>
-                        <a:lumOff val="60000"/>
-                      </a:schemeClr>
-                    </a:solidFill>
-                  </a:tcPr>
-                </a:tc>
-                <a:tc>
-                  <a:txBody>
-                    <a:bodyPr/>
-                    <a:lstStyle/>
-                    <a:p>
-                      <a:endParaRPr lang="en-US" sz="100" dirty="0"/>
-                    </a:p>
-                  </a:txBody>
-                  <a:tcPr>
-                    <a:solidFill>
-                      <a:schemeClr val="accent4">
-                        <a:lumMod val="40000"/>
-                        <a:lumOff val="60000"/>
-                      </a:schemeClr>
-                    </a:solidFill>
-                  </a:tcPr>
-                </a:tc>
-                <a:extLst>
-                  <a:ext uri="{0D108BD9-81ED-4DB2-BD59-A6C34878D82A}">
-                    <a16:rowId xmlns:a16="http://schemas.microsoft.com/office/drawing/2014/main" val="1444785584"/>
-                  </a:ext>
-                </a:extLst>
-              </a:tr>
-              <a:tr h="218452">
-                <a:tc>
-                  <a:txBody>
-                    <a:bodyPr/>
-                    <a:lstStyle/>
-                    <a:p>
-                      <a:endParaRPr lang="en-US" sz="100" dirty="0"/>
-                    </a:p>
-                  </a:txBody>
-                  <a:tcPr>
-                    <a:solidFill>
-                      <a:schemeClr val="accent4">
-                        <a:lumMod val="40000"/>
-                        <a:lumOff val="60000"/>
-                      </a:schemeClr>
-                    </a:solidFill>
-                  </a:tcPr>
-                </a:tc>
-                <a:tc>
-                  <a:txBody>
-                    <a:bodyPr/>
-                    <a:lstStyle/>
-                    <a:p>
-                      <a:endParaRPr lang="en-US" sz="100" dirty="0"/>
-                    </a:p>
-                  </a:txBody>
-                  <a:tcPr>
-                    <a:solidFill>
-                      <a:schemeClr val="accent4">
-                        <a:lumMod val="40000"/>
-                        <a:lumOff val="60000"/>
-                      </a:schemeClr>
-                    </a:solidFill>
-                  </a:tcPr>
-                </a:tc>
-                <a:tc>
-                  <a:txBody>
-                    <a:bodyPr/>
-                    <a:lstStyle/>
-                    <a:p>
-                      <a:endParaRPr lang="en-US" sz="100" dirty="0"/>
-                    </a:p>
-                  </a:txBody>
-                  <a:tcPr>
-                    <a:solidFill>
-                      <a:schemeClr val="accent4">
-                        <a:lumMod val="40000"/>
-                        <a:lumOff val="60000"/>
-                      </a:schemeClr>
-                    </a:solidFill>
-                  </a:tcPr>
-                </a:tc>
-                <a:tc>
-                  <a:txBody>
-                    <a:bodyPr/>
-                    <a:lstStyle/>
-                    <a:p>
-                      <a:endParaRPr lang="en-US" sz="100" dirty="0"/>
-                    </a:p>
-                  </a:txBody>
-                  <a:tcPr>
-                    <a:solidFill>
-                      <a:srgbClr val="00B0F0"/>
-                    </a:solidFill>
-                  </a:tcPr>
-                </a:tc>
-                <a:tc>
-                  <a:txBody>
-                    <a:bodyPr/>
-                    <a:lstStyle/>
-                    <a:p>
-                      <a:endParaRPr lang="en-US" sz="100" dirty="0"/>
-                    </a:p>
-                  </a:txBody>
-                  <a:tcPr>
-                    <a:solidFill>
-                      <a:schemeClr val="accent4">
-                        <a:lumMod val="40000"/>
-                        <a:lumOff val="60000"/>
-                      </a:schemeClr>
-                    </a:solidFill>
-                  </a:tcPr>
-                </a:tc>
-                <a:extLst>
-                  <a:ext uri="{0D108BD9-81ED-4DB2-BD59-A6C34878D82A}">
-                    <a16:rowId xmlns:a16="http://schemas.microsoft.com/office/drawing/2014/main" val="2849649782"/>
-                  </a:ext>
-                </a:extLst>
-              </a:tr>
-              <a:tr h="218452">
-                <a:tc>
-                  <a:txBody>
-                    <a:bodyPr/>
-                    <a:lstStyle/>
-                    <a:p>
-                      <a:endParaRPr lang="en-US" sz="100" dirty="0"/>
-                    </a:p>
-                  </a:txBody>
-                  <a:tcPr>
-                    <a:solidFill>
-                      <a:schemeClr val="accent4">
-                        <a:lumMod val="40000"/>
-                        <a:lumOff val="60000"/>
-                      </a:schemeClr>
-                    </a:solidFill>
-                  </a:tcPr>
-                </a:tc>
-                <a:tc>
-                  <a:txBody>
-                    <a:bodyPr/>
-                    <a:lstStyle/>
-                    <a:p>
-                      <a:endParaRPr lang="en-US" sz="100" dirty="0"/>
-                    </a:p>
-                  </a:txBody>
-                  <a:tcPr>
-                    <a:solidFill>
-                      <a:schemeClr val="accent4">
-                        <a:lumMod val="40000"/>
-                        <a:lumOff val="60000"/>
-                      </a:schemeClr>
-                    </a:solidFill>
-                  </a:tcPr>
-                </a:tc>
-                <a:tc>
-                  <a:txBody>
-                    <a:bodyPr/>
-                    <a:lstStyle/>
-                    <a:p>
-                      <a:endParaRPr lang="en-US" sz="100" dirty="0"/>
-                    </a:p>
-                  </a:txBody>
-                  <a:tcPr>
-                    <a:solidFill>
-                      <a:schemeClr val="accent4">
-                        <a:lumMod val="40000"/>
-                        <a:lumOff val="60000"/>
-                      </a:schemeClr>
-                    </a:solidFill>
-                  </a:tcPr>
-                </a:tc>
-                <a:tc>
-                  <a:txBody>
-                    <a:bodyPr/>
-                    <a:lstStyle/>
-                    <a:p>
-                      <a:endParaRPr lang="en-US" sz="100" dirty="0"/>
-                    </a:p>
-                  </a:txBody>
-                  <a:tcPr>
-                    <a:solidFill>
-                      <a:schemeClr val="accent4">
-                        <a:lumMod val="40000"/>
-                        <a:lumOff val="60000"/>
-                      </a:schemeClr>
-                    </a:solidFill>
-                  </a:tcPr>
-                </a:tc>
-                <a:tc>
-                  <a:txBody>
-                    <a:bodyPr/>
-                    <a:lstStyle/>
-                    <a:p>
-                      <a:endParaRPr lang="en-US" sz="100" dirty="0"/>
-                    </a:p>
-                  </a:txBody>
-                  <a:tcPr>
-                    <a:solidFill>
-                      <a:srgbClr val="00B0F0"/>
-                    </a:solidFill>
-                  </a:tcPr>
-                </a:tc>
-                <a:extLst>
-                  <a:ext uri="{0D108BD9-81ED-4DB2-BD59-A6C34878D82A}">
-                    <a16:rowId xmlns:a16="http://schemas.microsoft.com/office/drawing/2014/main" val="782997678"/>
-                  </a:ext>
-                </a:extLst>
-              </a:tr>
-            </a:tbl>
-          </a:graphicData>
-        </a:graphic>
-      </p:graphicFrame>
       <p:sp>
         <p:nvSpPr>
           <p:cNvPr id="2" name="Title 1">
             <a:extLst>
               <a:ext uri="{FF2B5EF4-FFF2-40B4-BE49-F238E27FC236}">
-                <a16:creationId xmlns:a16="http://schemas.microsoft.com/office/drawing/2014/main" id="{33795986-277D-56D4-4D36-CEF315D807C2}"/>
+                <a16:creationId xmlns:a16="http://schemas.microsoft.com/office/drawing/2014/main" id="{DB73ADCB-0F4B-5186-F9F9-FE2D6F2D9F2A}"/>
               </a:ext>
             </a:extLst>
           </p:cNvPr>
@@ -10467,1332 +10817,78 @@
           </p:nvPr>
         </p:nvSpPr>
         <p:spPr/>
-        <p:txBody>
-          <a:bodyPr>
-            <a:normAutofit/>
-          </a:bodyPr>
-          <a:lstStyle/>
-          <a:p>
-            <a:r>
-              <a:rPr lang="en-US" dirty="0"/>
-              <a:t>Multi-</a:t>
-            </a:r>
-            <a:r>
-              <a:rPr lang="en-US" dirty="0" err="1"/>
-              <a:t>Omic</a:t>
-            </a:r>
-            <a:r>
-              <a:rPr lang="en-US" dirty="0"/>
-              <a:t> Spectral Clustering using the Flag Manifold (MMOC) 		                    </a:t>
-            </a:r>
-            <a:r>
-              <a:rPr lang="en-US" sz="2800" dirty="0"/>
-              <a:t>Charlie Carpenter</a:t>
-            </a:r>
-            <a:endParaRPr lang="en-US" dirty="0"/>
-          </a:p>
-        </p:txBody>
-      </p:sp>
-      <p:sp>
-        <p:nvSpPr>
-          <p:cNvPr id="3" name="Content Placeholder 2">
-            <a:extLst>
-              <a:ext uri="{FF2B5EF4-FFF2-40B4-BE49-F238E27FC236}">
-                <a16:creationId xmlns:a16="http://schemas.microsoft.com/office/drawing/2014/main" id="{41478F2E-9D04-8D83-7477-95FC9D46E58A}"/>
-              </a:ext>
-            </a:extLst>
-          </p:cNvPr>
-          <p:cNvSpPr>
-            <a:spLocks noGrp="1"/>
-          </p:cNvSpPr>
-          <p:nvPr>
-            <p:ph idx="1"/>
-          </p:nvPr>
-        </p:nvSpPr>
-        <p:spPr>
-          <a:xfrm>
-            <a:off x="838200" y="1825625"/>
-            <a:ext cx="10515600" cy="957319"/>
-          </a:xfrm>
-        </p:spPr>
         <p:txBody>
           <a:bodyPr/>
           <a:lstStyle/>
           <a:p>
             <a:r>
               <a:rPr lang="en-US" dirty="0"/>
-              <a:t>Flag manifold allows for multi-view clustering</a:t>
+              <a:t>Flag Manifold</a:t>
+            </a:r>
+          </a:p>
+        </p:txBody>
+      </p:sp>
+      <p:sp>
+        <p:nvSpPr>
+          <p:cNvPr id="3" name="Content Placeholder 2">
+            <a:extLst>
+              <a:ext uri="{FF2B5EF4-FFF2-40B4-BE49-F238E27FC236}">
+                <a16:creationId xmlns:a16="http://schemas.microsoft.com/office/drawing/2014/main" id="{0B7CB86D-4A61-06E9-346C-7B85991C0B0D}"/>
+              </a:ext>
+            </a:extLst>
+          </p:cNvPr>
+          <p:cNvSpPr>
+            <a:spLocks noGrp="1"/>
+          </p:cNvSpPr>
+          <p:nvPr>
+            <p:ph idx="1"/>
+          </p:nvPr>
+        </p:nvSpPr>
+        <p:spPr/>
+        <p:txBody>
+          <a:bodyPr/>
+          <a:lstStyle/>
+          <a:p>
+            <a:r>
+              <a:rPr lang="en-US" dirty="0"/>
+              <a:t>A flag is a sequence of nested subspaces</a:t>
             </a:r>
           </a:p>
           <a:p>
             <a:pPr lvl="1"/>
             <a:r>
               <a:rPr lang="en-US" dirty="0"/>
-              <a:t>Can handle difference in number of features or clusters across views</a:t>
-            </a:r>
-          </a:p>
-          <a:p>
-            <a:endParaRPr lang="en-US" dirty="0"/>
-          </a:p>
-          <a:p>
-            <a:endParaRPr lang="en-US" dirty="0"/>
-          </a:p>
-        </p:txBody>
-      </p:sp>
-      <p:graphicFrame>
-        <p:nvGraphicFramePr>
-          <p:cNvPr id="6" name="Table 5">
-            <a:extLst>
-              <a:ext uri="{FF2B5EF4-FFF2-40B4-BE49-F238E27FC236}">
-                <a16:creationId xmlns:a16="http://schemas.microsoft.com/office/drawing/2014/main" id="{8EF1DD9A-15D6-1ECB-B162-E7432C084779}"/>
-              </a:ext>
-            </a:extLst>
-          </p:cNvPr>
-          <p:cNvGraphicFramePr>
-            <a:graphicFrameLocks noGrp="1"/>
-          </p:cNvGraphicFramePr>
-          <p:nvPr>
-            <p:extLst>
-              <p:ext uri="{D42A27DB-BD31-4B8C-83A1-F6EECF244321}">
-                <p14:modId xmlns:p14="http://schemas.microsoft.com/office/powerpoint/2010/main" val="2877151683"/>
-              </p:ext>
-            </p:extLst>
-          </p:nvPr>
-        </p:nvGraphicFramePr>
-        <p:xfrm>
-          <a:off x="4329405" y="4771838"/>
-          <a:ext cx="631270" cy="655356"/>
-        </p:xfrm>
-        <a:graphic>
-          <a:graphicData uri="http://schemas.openxmlformats.org/drawingml/2006/table">
-            <a:tbl>
-              <a:tblPr bandRow="1">
-                <a:tableStyleId>{5C22544A-7EE6-4342-B048-85BDC9FD1C3A}</a:tableStyleId>
-              </a:tblPr>
-              <a:tblGrid>
-                <a:gridCol w="208280">
-                  <a:extLst>
-                    <a:ext uri="{9D8B030D-6E8A-4147-A177-3AD203B41FA5}">
-                      <a16:colId xmlns:a16="http://schemas.microsoft.com/office/drawing/2014/main" val="3761141565"/>
-                    </a:ext>
-                  </a:extLst>
-                </a:gridCol>
-                <a:gridCol w="211495">
-                  <a:extLst>
-                    <a:ext uri="{9D8B030D-6E8A-4147-A177-3AD203B41FA5}">
-                      <a16:colId xmlns:a16="http://schemas.microsoft.com/office/drawing/2014/main" val="1761226943"/>
-                    </a:ext>
-                  </a:extLst>
-                </a:gridCol>
-                <a:gridCol w="211495">
-                  <a:extLst>
-                    <a:ext uri="{9D8B030D-6E8A-4147-A177-3AD203B41FA5}">
-                      <a16:colId xmlns:a16="http://schemas.microsoft.com/office/drawing/2014/main" val="2790257538"/>
-                    </a:ext>
-                  </a:extLst>
-                </a:gridCol>
-              </a:tblGrid>
-              <a:tr h="218452">
-                <a:tc>
-                  <a:txBody>
-                    <a:bodyPr/>
-                    <a:lstStyle/>
-                    <a:p>
-                      <a:endParaRPr lang="en-US" sz="100" dirty="0"/>
-                    </a:p>
-                  </a:txBody>
-                  <a:tcPr>
-                    <a:solidFill>
-                      <a:schemeClr val="accent2"/>
-                    </a:solidFill>
-                  </a:tcPr>
-                </a:tc>
-                <a:tc>
-                  <a:txBody>
-                    <a:bodyPr/>
-                    <a:lstStyle/>
-                    <a:p>
-                      <a:endParaRPr lang="en-US" sz="100" dirty="0"/>
-                    </a:p>
-                  </a:txBody>
-                  <a:tcPr>
-                    <a:solidFill>
-                      <a:srgbClr val="FFC000"/>
-                    </a:solidFill>
-                  </a:tcPr>
-                </a:tc>
-                <a:tc>
-                  <a:txBody>
-                    <a:bodyPr/>
-                    <a:lstStyle/>
-                    <a:p>
-                      <a:endParaRPr lang="en-US" sz="100" dirty="0"/>
-                    </a:p>
-                  </a:txBody>
-                  <a:tcPr>
-                    <a:solidFill>
-                      <a:srgbClr val="FFC000"/>
-                    </a:solidFill>
-                  </a:tcPr>
-                </a:tc>
-                <a:extLst>
-                  <a:ext uri="{0D108BD9-81ED-4DB2-BD59-A6C34878D82A}">
-                    <a16:rowId xmlns:a16="http://schemas.microsoft.com/office/drawing/2014/main" val="3401334349"/>
-                  </a:ext>
-                </a:extLst>
-              </a:tr>
-              <a:tr h="218452">
-                <a:tc>
-                  <a:txBody>
-                    <a:bodyPr/>
-                    <a:lstStyle/>
-                    <a:p>
-                      <a:endParaRPr lang="en-US" sz="100" dirty="0"/>
-                    </a:p>
-                  </a:txBody>
-                  <a:tcPr>
-                    <a:solidFill>
-                      <a:srgbClr val="FFC000"/>
-                    </a:solidFill>
-                  </a:tcPr>
-                </a:tc>
-                <a:tc>
-                  <a:txBody>
-                    <a:bodyPr/>
-                    <a:lstStyle/>
-                    <a:p>
-                      <a:endParaRPr lang="en-US" sz="100" dirty="0"/>
-                    </a:p>
-                  </a:txBody>
-                  <a:tcPr>
-                    <a:solidFill>
-                      <a:schemeClr val="accent2"/>
-                    </a:solidFill>
-                  </a:tcPr>
-                </a:tc>
-                <a:tc>
-                  <a:txBody>
-                    <a:bodyPr/>
-                    <a:lstStyle/>
-                    <a:p>
-                      <a:endParaRPr lang="en-US" sz="100" dirty="0"/>
-                    </a:p>
-                  </a:txBody>
-                  <a:tcPr>
-                    <a:solidFill>
-                      <a:srgbClr val="FFC000"/>
-                    </a:solidFill>
-                  </a:tcPr>
-                </a:tc>
-                <a:extLst>
-                  <a:ext uri="{0D108BD9-81ED-4DB2-BD59-A6C34878D82A}">
-                    <a16:rowId xmlns:a16="http://schemas.microsoft.com/office/drawing/2014/main" val="251990501"/>
-                  </a:ext>
-                </a:extLst>
-              </a:tr>
-              <a:tr h="218452">
-                <a:tc>
-                  <a:txBody>
-                    <a:bodyPr/>
-                    <a:lstStyle/>
-                    <a:p>
-                      <a:endParaRPr lang="en-US" sz="100" dirty="0"/>
-                    </a:p>
-                  </a:txBody>
-                  <a:tcPr>
-                    <a:solidFill>
-                      <a:srgbClr val="FFC000"/>
-                    </a:solidFill>
-                  </a:tcPr>
-                </a:tc>
-                <a:tc>
-                  <a:txBody>
-                    <a:bodyPr/>
-                    <a:lstStyle/>
-                    <a:p>
-                      <a:endParaRPr lang="en-US" sz="100" dirty="0"/>
-                    </a:p>
-                  </a:txBody>
-                  <a:tcPr>
-                    <a:solidFill>
-                      <a:srgbClr val="FFC000"/>
-                    </a:solidFill>
-                  </a:tcPr>
-                </a:tc>
-                <a:tc>
-                  <a:txBody>
-                    <a:bodyPr/>
-                    <a:lstStyle/>
-                    <a:p>
-                      <a:endParaRPr lang="en-US" sz="100" dirty="0"/>
-                    </a:p>
-                  </a:txBody>
-                  <a:tcPr>
-                    <a:solidFill>
-                      <a:schemeClr val="accent2"/>
-                    </a:solidFill>
-                  </a:tcPr>
-                </a:tc>
-                <a:extLst>
-                  <a:ext uri="{0D108BD9-81ED-4DB2-BD59-A6C34878D82A}">
-                    <a16:rowId xmlns:a16="http://schemas.microsoft.com/office/drawing/2014/main" val="400429151"/>
-                  </a:ext>
-                </a:extLst>
-              </a:tr>
-            </a:tbl>
-          </a:graphicData>
-        </a:graphic>
-      </p:graphicFrame>
-      <p:graphicFrame>
-        <p:nvGraphicFramePr>
-          <p:cNvPr id="9" name="Table 8">
-            <a:extLst>
-              <a:ext uri="{FF2B5EF4-FFF2-40B4-BE49-F238E27FC236}">
-                <a16:creationId xmlns:a16="http://schemas.microsoft.com/office/drawing/2014/main" id="{0CF60853-D038-8390-3029-9427AF7CE1C0}"/>
-              </a:ext>
-            </a:extLst>
-          </p:cNvPr>
-          <p:cNvGraphicFramePr>
-            <a:graphicFrameLocks noGrp="1"/>
-          </p:cNvGraphicFramePr>
-          <p:nvPr>
-            <p:extLst>
-              <p:ext uri="{D42A27DB-BD31-4B8C-83A1-F6EECF244321}">
-                <p14:modId xmlns:p14="http://schemas.microsoft.com/office/powerpoint/2010/main" val="41918076"/>
-              </p:ext>
-            </p:extLst>
-          </p:nvPr>
-        </p:nvGraphicFramePr>
-        <p:xfrm>
-          <a:off x="3918624" y="3041106"/>
-          <a:ext cx="1041400" cy="1092260"/>
-        </p:xfrm>
-        <a:graphic>
-          <a:graphicData uri="http://schemas.openxmlformats.org/drawingml/2006/table">
-            <a:tbl>
-              <a:tblPr bandRow="1">
-                <a:tableStyleId>{5C22544A-7EE6-4342-B048-85BDC9FD1C3A}</a:tableStyleId>
-              </a:tblPr>
-              <a:tblGrid>
-                <a:gridCol w="208280">
-                  <a:extLst>
-                    <a:ext uri="{9D8B030D-6E8A-4147-A177-3AD203B41FA5}">
-                      <a16:colId xmlns:a16="http://schemas.microsoft.com/office/drawing/2014/main" val="3797489107"/>
-                    </a:ext>
-                  </a:extLst>
-                </a:gridCol>
-                <a:gridCol w="208280">
-                  <a:extLst>
-                    <a:ext uri="{9D8B030D-6E8A-4147-A177-3AD203B41FA5}">
-                      <a16:colId xmlns:a16="http://schemas.microsoft.com/office/drawing/2014/main" val="1923188939"/>
-                    </a:ext>
-                  </a:extLst>
-                </a:gridCol>
-                <a:gridCol w="208280">
-                  <a:extLst>
-                    <a:ext uri="{9D8B030D-6E8A-4147-A177-3AD203B41FA5}">
-                      <a16:colId xmlns:a16="http://schemas.microsoft.com/office/drawing/2014/main" val="3761141565"/>
-                    </a:ext>
-                  </a:extLst>
-                </a:gridCol>
-                <a:gridCol w="208280">
-                  <a:extLst>
-                    <a:ext uri="{9D8B030D-6E8A-4147-A177-3AD203B41FA5}">
-                      <a16:colId xmlns:a16="http://schemas.microsoft.com/office/drawing/2014/main" val="1761226943"/>
-                    </a:ext>
-                  </a:extLst>
-                </a:gridCol>
-                <a:gridCol w="208280">
-                  <a:extLst>
-                    <a:ext uri="{9D8B030D-6E8A-4147-A177-3AD203B41FA5}">
-                      <a16:colId xmlns:a16="http://schemas.microsoft.com/office/drawing/2014/main" val="2790257538"/>
-                    </a:ext>
-                  </a:extLst>
-                </a:gridCol>
-              </a:tblGrid>
-              <a:tr h="218452">
-                <a:tc>
-                  <a:txBody>
-                    <a:bodyPr/>
-                    <a:lstStyle/>
-                    <a:p>
-                      <a:endParaRPr lang="en-US" sz="100" dirty="0"/>
-                    </a:p>
-                  </a:txBody>
-                  <a:tcPr>
-                    <a:solidFill>
-                      <a:srgbClr val="00B0F0"/>
-                    </a:solidFill>
-                  </a:tcPr>
-                </a:tc>
-                <a:tc>
-                  <a:txBody>
-                    <a:bodyPr/>
-                    <a:lstStyle/>
-                    <a:p>
-                      <a:endParaRPr lang="en-US" sz="100" dirty="0"/>
-                    </a:p>
-                  </a:txBody>
-                  <a:tcPr>
-                    <a:solidFill>
-                      <a:schemeClr val="accent4">
-                        <a:lumMod val="40000"/>
-                        <a:lumOff val="60000"/>
-                      </a:schemeClr>
-                    </a:solidFill>
-                  </a:tcPr>
-                </a:tc>
-                <a:tc>
-                  <a:txBody>
-                    <a:bodyPr/>
-                    <a:lstStyle/>
-                    <a:p>
-                      <a:endParaRPr lang="en-US" sz="100" dirty="0"/>
-                    </a:p>
-                  </a:txBody>
-                  <a:tcPr>
-                    <a:solidFill>
-                      <a:schemeClr val="accent4">
-                        <a:lumMod val="40000"/>
-                        <a:lumOff val="60000"/>
-                      </a:schemeClr>
-                    </a:solidFill>
-                  </a:tcPr>
-                </a:tc>
-                <a:tc>
-                  <a:txBody>
-                    <a:bodyPr/>
-                    <a:lstStyle/>
-                    <a:p>
-                      <a:endParaRPr lang="en-US" sz="100" dirty="0"/>
-                    </a:p>
-                  </a:txBody>
-                  <a:tcPr>
-                    <a:solidFill>
-                      <a:schemeClr val="accent4">
-                        <a:lumMod val="40000"/>
-                        <a:lumOff val="60000"/>
-                      </a:schemeClr>
-                    </a:solidFill>
-                  </a:tcPr>
-                </a:tc>
-                <a:tc>
-                  <a:txBody>
-                    <a:bodyPr/>
-                    <a:lstStyle/>
-                    <a:p>
-                      <a:endParaRPr lang="en-US" sz="100" dirty="0"/>
-                    </a:p>
-                  </a:txBody>
-                  <a:tcPr>
-                    <a:solidFill>
-                      <a:schemeClr val="accent4">
-                        <a:lumMod val="40000"/>
-                        <a:lumOff val="60000"/>
-                      </a:schemeClr>
-                    </a:solidFill>
-                  </a:tcPr>
-                </a:tc>
-                <a:extLst>
-                  <a:ext uri="{0D108BD9-81ED-4DB2-BD59-A6C34878D82A}">
-                    <a16:rowId xmlns:a16="http://schemas.microsoft.com/office/drawing/2014/main" val="3217724806"/>
-                  </a:ext>
-                </a:extLst>
-              </a:tr>
-              <a:tr h="218452">
-                <a:tc>
-                  <a:txBody>
-                    <a:bodyPr/>
-                    <a:lstStyle/>
-                    <a:p>
-                      <a:endParaRPr lang="en-US" sz="100" dirty="0"/>
-                    </a:p>
-                  </a:txBody>
-                  <a:tcPr>
-                    <a:solidFill>
-                      <a:schemeClr val="accent4">
-                        <a:lumMod val="40000"/>
-                        <a:lumOff val="60000"/>
-                      </a:schemeClr>
-                    </a:solidFill>
-                  </a:tcPr>
-                </a:tc>
-                <a:tc>
-                  <a:txBody>
-                    <a:bodyPr/>
-                    <a:lstStyle/>
-                    <a:p>
-                      <a:endParaRPr lang="en-US" sz="100" dirty="0"/>
-                    </a:p>
-                  </a:txBody>
-                  <a:tcPr>
-                    <a:solidFill>
-                      <a:srgbClr val="00B0F0"/>
-                    </a:solidFill>
-                  </a:tcPr>
-                </a:tc>
-                <a:tc>
-                  <a:txBody>
-                    <a:bodyPr/>
-                    <a:lstStyle/>
-                    <a:p>
-                      <a:endParaRPr lang="en-US" sz="100" dirty="0"/>
-                    </a:p>
-                  </a:txBody>
-                  <a:tcPr>
-                    <a:solidFill>
-                      <a:schemeClr val="accent4">
-                        <a:lumMod val="40000"/>
-                        <a:lumOff val="60000"/>
-                      </a:schemeClr>
-                    </a:solidFill>
-                  </a:tcPr>
-                </a:tc>
-                <a:tc>
-                  <a:txBody>
-                    <a:bodyPr/>
-                    <a:lstStyle/>
-                    <a:p>
-                      <a:endParaRPr lang="en-US" sz="100" dirty="0"/>
-                    </a:p>
-                  </a:txBody>
-                  <a:tcPr>
-                    <a:solidFill>
-                      <a:schemeClr val="accent4">
-                        <a:lumMod val="40000"/>
-                        <a:lumOff val="60000"/>
-                      </a:schemeClr>
-                    </a:solidFill>
-                  </a:tcPr>
-                </a:tc>
-                <a:tc>
-                  <a:txBody>
-                    <a:bodyPr/>
-                    <a:lstStyle/>
-                    <a:p>
-                      <a:endParaRPr lang="en-US" sz="100" dirty="0"/>
-                    </a:p>
-                  </a:txBody>
-                  <a:tcPr>
-                    <a:solidFill>
-                      <a:schemeClr val="accent4">
-                        <a:lumMod val="40000"/>
-                        <a:lumOff val="60000"/>
-                      </a:schemeClr>
-                    </a:solidFill>
-                  </a:tcPr>
-                </a:tc>
-                <a:extLst>
-                  <a:ext uri="{0D108BD9-81ED-4DB2-BD59-A6C34878D82A}">
-                    <a16:rowId xmlns:a16="http://schemas.microsoft.com/office/drawing/2014/main" val="3401334349"/>
-                  </a:ext>
-                </a:extLst>
-              </a:tr>
-              <a:tr h="218452">
-                <a:tc>
-                  <a:txBody>
-                    <a:bodyPr/>
-                    <a:lstStyle/>
-                    <a:p>
-                      <a:endParaRPr lang="en-US" sz="100" dirty="0"/>
-                    </a:p>
-                  </a:txBody>
-                  <a:tcPr>
-                    <a:solidFill>
-                      <a:schemeClr val="accent4">
-                        <a:lumMod val="40000"/>
-                        <a:lumOff val="60000"/>
-                      </a:schemeClr>
-                    </a:solidFill>
-                  </a:tcPr>
-                </a:tc>
-                <a:tc>
-                  <a:txBody>
-                    <a:bodyPr/>
-                    <a:lstStyle/>
-                    <a:p>
-                      <a:endParaRPr lang="en-US" sz="100" dirty="0"/>
-                    </a:p>
-                  </a:txBody>
-                  <a:tcPr>
-                    <a:solidFill>
-                      <a:schemeClr val="accent4">
-                        <a:lumMod val="40000"/>
-                        <a:lumOff val="60000"/>
-                      </a:schemeClr>
-                    </a:solidFill>
-                  </a:tcPr>
-                </a:tc>
-                <a:tc>
-                  <a:txBody>
-                    <a:bodyPr/>
-                    <a:lstStyle/>
-                    <a:p>
-                      <a:endParaRPr lang="en-US" sz="100" dirty="0"/>
-                    </a:p>
-                  </a:txBody>
-                  <a:tcPr>
-                    <a:solidFill>
-                      <a:srgbClr val="00B0F0"/>
-                    </a:solidFill>
-                  </a:tcPr>
-                </a:tc>
-                <a:tc>
-                  <a:txBody>
-                    <a:bodyPr/>
-                    <a:lstStyle/>
-                    <a:p>
-                      <a:endParaRPr lang="en-US" sz="100" dirty="0"/>
-                    </a:p>
-                  </a:txBody>
-                  <a:tcPr>
-                    <a:solidFill>
-                      <a:schemeClr val="accent4">
-                        <a:lumMod val="40000"/>
-                        <a:lumOff val="60000"/>
-                      </a:schemeClr>
-                    </a:solidFill>
-                  </a:tcPr>
-                </a:tc>
-                <a:tc>
-                  <a:txBody>
-                    <a:bodyPr/>
-                    <a:lstStyle/>
-                    <a:p>
-                      <a:endParaRPr lang="en-US" sz="100" dirty="0"/>
-                    </a:p>
-                  </a:txBody>
-                  <a:tcPr>
-                    <a:solidFill>
-                      <a:schemeClr val="accent4">
-                        <a:lumMod val="40000"/>
-                        <a:lumOff val="60000"/>
-                      </a:schemeClr>
-                    </a:solidFill>
-                  </a:tcPr>
-                </a:tc>
-                <a:extLst>
-                  <a:ext uri="{0D108BD9-81ED-4DB2-BD59-A6C34878D82A}">
-                    <a16:rowId xmlns:a16="http://schemas.microsoft.com/office/drawing/2014/main" val="1444785584"/>
-                  </a:ext>
-                </a:extLst>
-              </a:tr>
-              <a:tr h="218452">
-                <a:tc>
-                  <a:txBody>
-                    <a:bodyPr/>
-                    <a:lstStyle/>
-                    <a:p>
-                      <a:endParaRPr lang="en-US" sz="100" dirty="0"/>
-                    </a:p>
-                  </a:txBody>
-                  <a:tcPr>
-                    <a:solidFill>
-                      <a:schemeClr val="accent4">
-                        <a:lumMod val="40000"/>
-                        <a:lumOff val="60000"/>
-                      </a:schemeClr>
-                    </a:solidFill>
-                  </a:tcPr>
-                </a:tc>
-                <a:tc>
-                  <a:txBody>
-                    <a:bodyPr/>
-                    <a:lstStyle/>
-                    <a:p>
-                      <a:endParaRPr lang="en-US" sz="100" dirty="0"/>
-                    </a:p>
-                  </a:txBody>
-                  <a:tcPr>
-                    <a:solidFill>
-                      <a:schemeClr val="accent4">
-                        <a:lumMod val="40000"/>
-                        <a:lumOff val="60000"/>
-                      </a:schemeClr>
-                    </a:solidFill>
-                  </a:tcPr>
-                </a:tc>
-                <a:tc>
-                  <a:txBody>
-                    <a:bodyPr/>
-                    <a:lstStyle/>
-                    <a:p>
-                      <a:endParaRPr lang="en-US" sz="100" dirty="0"/>
-                    </a:p>
-                  </a:txBody>
-                  <a:tcPr>
-                    <a:solidFill>
-                      <a:schemeClr val="accent4">
-                        <a:lumMod val="40000"/>
-                        <a:lumOff val="60000"/>
-                      </a:schemeClr>
-                    </a:solidFill>
-                  </a:tcPr>
-                </a:tc>
-                <a:tc>
-                  <a:txBody>
-                    <a:bodyPr/>
-                    <a:lstStyle/>
-                    <a:p>
-                      <a:endParaRPr lang="en-US" sz="100" dirty="0"/>
-                    </a:p>
-                  </a:txBody>
-                  <a:tcPr>
-                    <a:solidFill>
-                      <a:srgbClr val="00B0F0"/>
-                    </a:solidFill>
-                  </a:tcPr>
-                </a:tc>
-                <a:tc>
-                  <a:txBody>
-                    <a:bodyPr/>
-                    <a:lstStyle/>
-                    <a:p>
-                      <a:endParaRPr lang="en-US" sz="100" dirty="0"/>
-                    </a:p>
-                  </a:txBody>
-                  <a:tcPr>
-                    <a:solidFill>
-                      <a:schemeClr val="accent4">
-                        <a:lumMod val="40000"/>
-                        <a:lumOff val="60000"/>
-                      </a:schemeClr>
-                    </a:solidFill>
-                  </a:tcPr>
-                </a:tc>
-                <a:extLst>
-                  <a:ext uri="{0D108BD9-81ED-4DB2-BD59-A6C34878D82A}">
-                    <a16:rowId xmlns:a16="http://schemas.microsoft.com/office/drawing/2014/main" val="2849649782"/>
-                  </a:ext>
-                </a:extLst>
-              </a:tr>
-              <a:tr h="218452">
-                <a:tc>
-                  <a:txBody>
-                    <a:bodyPr/>
-                    <a:lstStyle/>
-                    <a:p>
-                      <a:endParaRPr lang="en-US" sz="100" dirty="0"/>
-                    </a:p>
-                  </a:txBody>
-                  <a:tcPr>
-                    <a:solidFill>
-                      <a:schemeClr val="accent4">
-                        <a:lumMod val="40000"/>
-                        <a:lumOff val="60000"/>
-                      </a:schemeClr>
-                    </a:solidFill>
-                  </a:tcPr>
-                </a:tc>
-                <a:tc>
-                  <a:txBody>
-                    <a:bodyPr/>
-                    <a:lstStyle/>
-                    <a:p>
-                      <a:endParaRPr lang="en-US" sz="100" dirty="0"/>
-                    </a:p>
-                  </a:txBody>
-                  <a:tcPr>
-                    <a:solidFill>
-                      <a:schemeClr val="accent4">
-                        <a:lumMod val="40000"/>
-                        <a:lumOff val="60000"/>
-                      </a:schemeClr>
-                    </a:solidFill>
-                  </a:tcPr>
-                </a:tc>
-                <a:tc>
-                  <a:txBody>
-                    <a:bodyPr/>
-                    <a:lstStyle/>
-                    <a:p>
-                      <a:endParaRPr lang="en-US" sz="100" dirty="0"/>
-                    </a:p>
-                  </a:txBody>
-                  <a:tcPr>
-                    <a:solidFill>
-                      <a:schemeClr val="accent4">
-                        <a:lumMod val="40000"/>
-                        <a:lumOff val="60000"/>
-                      </a:schemeClr>
-                    </a:solidFill>
-                  </a:tcPr>
-                </a:tc>
-                <a:tc>
-                  <a:txBody>
-                    <a:bodyPr/>
-                    <a:lstStyle/>
-                    <a:p>
-                      <a:endParaRPr lang="en-US" sz="100" dirty="0"/>
-                    </a:p>
-                  </a:txBody>
-                  <a:tcPr>
-                    <a:solidFill>
-                      <a:schemeClr val="accent4">
-                        <a:lumMod val="40000"/>
-                        <a:lumOff val="60000"/>
-                      </a:schemeClr>
-                    </a:solidFill>
-                  </a:tcPr>
-                </a:tc>
-                <a:tc>
-                  <a:txBody>
-                    <a:bodyPr/>
-                    <a:lstStyle/>
-                    <a:p>
-                      <a:endParaRPr lang="en-US" sz="100" dirty="0"/>
-                    </a:p>
-                  </a:txBody>
-                  <a:tcPr>
-                    <a:solidFill>
-                      <a:srgbClr val="00B0F0"/>
-                    </a:solidFill>
-                  </a:tcPr>
-                </a:tc>
-                <a:extLst>
-                  <a:ext uri="{0D108BD9-81ED-4DB2-BD59-A6C34878D82A}">
-                    <a16:rowId xmlns:a16="http://schemas.microsoft.com/office/drawing/2014/main" val="782997678"/>
-                  </a:ext>
-                </a:extLst>
-              </a:tr>
-            </a:tbl>
-          </a:graphicData>
-        </a:graphic>
-      </p:graphicFrame>
-      <p:cxnSp>
-        <p:nvCxnSpPr>
-          <p:cNvPr id="12" name="Connector: Curved 11">
-            <a:extLst>
-              <a:ext uri="{FF2B5EF4-FFF2-40B4-BE49-F238E27FC236}">
-                <a16:creationId xmlns:a16="http://schemas.microsoft.com/office/drawing/2014/main" id="{C0FF964D-41DD-044C-74F2-FF4032C4098E}"/>
-              </a:ext>
-            </a:extLst>
-          </p:cNvPr>
-          <p:cNvCxnSpPr/>
-          <p:nvPr/>
-        </p:nvCxnSpPr>
-        <p:spPr>
-          <a:xfrm>
-            <a:off x="4960675" y="3572134"/>
-            <a:ext cx="861627" cy="738609"/>
-          </a:xfrm>
-          <a:prstGeom prst="curvedConnector3">
-            <a:avLst/>
-          </a:prstGeom>
-          <a:ln w="38100">
-            <a:tailEnd type="triangle"/>
-          </a:ln>
-        </p:spPr>
-        <p:style>
-          <a:lnRef idx="2">
-            <a:schemeClr val="dk1"/>
-          </a:lnRef>
-          <a:fillRef idx="0">
-            <a:schemeClr val="dk1"/>
-          </a:fillRef>
-          <a:effectRef idx="1">
-            <a:schemeClr val="dk1"/>
-          </a:effectRef>
-          <a:fontRef idx="minor">
-            <a:schemeClr val="tx1"/>
-          </a:fontRef>
-        </p:style>
-      </p:cxnSp>
-      <p:cxnSp>
-        <p:nvCxnSpPr>
-          <p:cNvPr id="13" name="Connector: Curved 12">
-            <a:extLst>
-              <a:ext uri="{FF2B5EF4-FFF2-40B4-BE49-F238E27FC236}">
-                <a16:creationId xmlns:a16="http://schemas.microsoft.com/office/drawing/2014/main" id="{494787E1-510C-9BA3-0CFB-AFC42196DB98}"/>
-              </a:ext>
-            </a:extLst>
-          </p:cNvPr>
-          <p:cNvCxnSpPr>
-            <a:cxnSpLocks/>
-            <a:stCxn id="6" idx="3"/>
-          </p:cNvCxnSpPr>
-          <p:nvPr/>
-        </p:nvCxnSpPr>
-        <p:spPr>
-          <a:xfrm flipV="1">
-            <a:off x="4960675" y="4319177"/>
-            <a:ext cx="861627" cy="780339"/>
-          </a:xfrm>
-          <a:prstGeom prst="curvedConnector3">
-            <a:avLst/>
-          </a:prstGeom>
-          <a:ln w="38100">
-            <a:tailEnd type="triangle"/>
-          </a:ln>
-        </p:spPr>
-        <p:style>
-          <a:lnRef idx="2">
-            <a:schemeClr val="dk1"/>
-          </a:lnRef>
-          <a:fillRef idx="0">
-            <a:schemeClr val="dk1"/>
-          </a:fillRef>
-          <a:effectRef idx="1">
-            <a:schemeClr val="dk1"/>
-          </a:effectRef>
-          <a:fontRef idx="minor">
-            <a:schemeClr val="tx1"/>
-          </a:fontRef>
-        </p:style>
-      </p:cxnSp>
-      <p:cxnSp>
-        <p:nvCxnSpPr>
-          <p:cNvPr id="17" name="Straight Arrow Connector 16">
-            <a:extLst>
-              <a:ext uri="{FF2B5EF4-FFF2-40B4-BE49-F238E27FC236}">
-                <a16:creationId xmlns:a16="http://schemas.microsoft.com/office/drawing/2014/main" id="{B4F2A27F-F594-73C0-C6B0-89E621DBC8D6}"/>
-              </a:ext>
-            </a:extLst>
-          </p:cNvPr>
-          <p:cNvCxnSpPr>
-            <a:cxnSpLocks/>
-          </p:cNvCxnSpPr>
-          <p:nvPr/>
-        </p:nvCxnSpPr>
-        <p:spPr>
-          <a:xfrm>
-            <a:off x="7033462" y="4326567"/>
-            <a:ext cx="561630" cy="0"/>
-          </a:xfrm>
-          <a:prstGeom prst="straightConnector1">
-            <a:avLst/>
-          </a:prstGeom>
-          <a:ln w="38100">
-            <a:tailEnd type="triangle"/>
-          </a:ln>
-        </p:spPr>
-        <p:style>
-          <a:lnRef idx="2">
-            <a:schemeClr val="dk1"/>
-          </a:lnRef>
-          <a:fillRef idx="0">
-            <a:schemeClr val="dk1"/>
-          </a:fillRef>
-          <a:effectRef idx="1">
-            <a:schemeClr val="dk1"/>
-          </a:effectRef>
-          <a:fontRef idx="minor">
-            <a:schemeClr val="tx1"/>
-          </a:fontRef>
-        </p:style>
-      </p:cxnSp>
-      <p:graphicFrame>
-        <p:nvGraphicFramePr>
-          <p:cNvPr id="18" name="Table 17">
-            <a:extLst>
-              <a:ext uri="{FF2B5EF4-FFF2-40B4-BE49-F238E27FC236}">
-                <a16:creationId xmlns:a16="http://schemas.microsoft.com/office/drawing/2014/main" id="{07B8F4BF-D49C-65D1-E8D0-977C142BBEF9}"/>
-              </a:ext>
-            </a:extLst>
-          </p:cNvPr>
-          <p:cNvGraphicFramePr>
-            <a:graphicFrameLocks noGrp="1"/>
-          </p:cNvGraphicFramePr>
-          <p:nvPr>
-            <p:extLst>
-              <p:ext uri="{D42A27DB-BD31-4B8C-83A1-F6EECF244321}">
-                <p14:modId xmlns:p14="http://schemas.microsoft.com/office/powerpoint/2010/main" val="2002850605"/>
-              </p:ext>
-            </p:extLst>
-          </p:nvPr>
-        </p:nvGraphicFramePr>
-        <p:xfrm>
-          <a:off x="7624132" y="4100725"/>
-          <a:ext cx="416560" cy="436904"/>
-        </p:xfrm>
-        <a:graphic>
-          <a:graphicData uri="http://schemas.openxmlformats.org/drawingml/2006/table">
-            <a:tbl>
-              <a:tblPr bandRow="1">
-                <a:tableStyleId>{5C22544A-7EE6-4342-B048-85BDC9FD1C3A}</a:tableStyleId>
-              </a:tblPr>
-              <a:tblGrid>
-                <a:gridCol w="208280">
-                  <a:extLst>
-                    <a:ext uri="{9D8B030D-6E8A-4147-A177-3AD203B41FA5}">
-                      <a16:colId xmlns:a16="http://schemas.microsoft.com/office/drawing/2014/main" val="1761226943"/>
-                    </a:ext>
-                  </a:extLst>
-                </a:gridCol>
-                <a:gridCol w="208280">
-                  <a:extLst>
-                    <a:ext uri="{9D8B030D-6E8A-4147-A177-3AD203B41FA5}">
-                      <a16:colId xmlns:a16="http://schemas.microsoft.com/office/drawing/2014/main" val="2790257538"/>
-                    </a:ext>
-                  </a:extLst>
-                </a:gridCol>
-              </a:tblGrid>
-              <a:tr h="218452">
-                <a:tc>
-                  <a:txBody>
-                    <a:bodyPr/>
-                    <a:lstStyle/>
-                    <a:p>
-                      <a:endParaRPr lang="en-US" sz="100" dirty="0"/>
-                    </a:p>
-                  </a:txBody>
-                  <a:tcPr>
-                    <a:solidFill>
-                      <a:srgbClr val="7030A0"/>
-                    </a:solidFill>
-                  </a:tcPr>
-                </a:tc>
-                <a:tc>
-                  <a:txBody>
-                    <a:bodyPr/>
-                    <a:lstStyle/>
-                    <a:p>
-                      <a:endParaRPr lang="en-US" sz="100" dirty="0"/>
-                    </a:p>
-                  </a:txBody>
-                  <a:tcPr>
-                    <a:solidFill>
-                      <a:schemeClr val="accent5">
-                        <a:lumMod val="60000"/>
-                        <a:lumOff val="40000"/>
-                      </a:schemeClr>
-                    </a:solidFill>
-                  </a:tcPr>
-                </a:tc>
-                <a:extLst>
-                  <a:ext uri="{0D108BD9-81ED-4DB2-BD59-A6C34878D82A}">
-                    <a16:rowId xmlns:a16="http://schemas.microsoft.com/office/drawing/2014/main" val="251990501"/>
-                  </a:ext>
-                </a:extLst>
-              </a:tr>
-              <a:tr h="218452">
-                <a:tc>
-                  <a:txBody>
-                    <a:bodyPr/>
-                    <a:lstStyle/>
-                    <a:p>
-                      <a:endParaRPr lang="en-US" sz="100" dirty="0"/>
-                    </a:p>
-                  </a:txBody>
-                  <a:tcPr>
-                    <a:solidFill>
-                      <a:schemeClr val="accent5">
-                        <a:lumMod val="60000"/>
-                        <a:lumOff val="40000"/>
-                      </a:schemeClr>
-                    </a:solidFill>
-                  </a:tcPr>
-                </a:tc>
-                <a:tc>
-                  <a:txBody>
-                    <a:bodyPr/>
-                    <a:lstStyle/>
-                    <a:p>
-                      <a:endParaRPr lang="en-US" sz="100" dirty="0"/>
-                    </a:p>
-                  </a:txBody>
-                  <a:tcPr>
-                    <a:solidFill>
-                      <a:srgbClr val="7030A0"/>
-                    </a:solidFill>
-                  </a:tcPr>
-                </a:tc>
-                <a:extLst>
-                  <a:ext uri="{0D108BD9-81ED-4DB2-BD59-A6C34878D82A}">
-                    <a16:rowId xmlns:a16="http://schemas.microsoft.com/office/drawing/2014/main" val="400429151"/>
-                  </a:ext>
-                </a:extLst>
-              </a:tr>
-            </a:tbl>
-          </a:graphicData>
-        </a:graphic>
-      </p:graphicFrame>
-      <p:cxnSp>
-        <p:nvCxnSpPr>
-          <p:cNvPr id="22" name="Straight Connector 21">
-            <a:extLst>
-              <a:ext uri="{FF2B5EF4-FFF2-40B4-BE49-F238E27FC236}">
-                <a16:creationId xmlns:a16="http://schemas.microsoft.com/office/drawing/2014/main" id="{7132000C-D765-06CB-450C-F488B8A60BEE}"/>
-              </a:ext>
-            </a:extLst>
-          </p:cNvPr>
-          <p:cNvCxnSpPr>
-            <a:cxnSpLocks/>
-          </p:cNvCxnSpPr>
-          <p:nvPr/>
-        </p:nvCxnSpPr>
-        <p:spPr>
-          <a:xfrm>
-            <a:off x="6866052" y="3764613"/>
-            <a:ext cx="149150" cy="546130"/>
-          </a:xfrm>
-          <a:prstGeom prst="line">
-            <a:avLst/>
-          </a:prstGeom>
-        </p:spPr>
-        <p:style>
-          <a:lnRef idx="2">
-            <a:schemeClr val="dk1"/>
-          </a:lnRef>
-          <a:fillRef idx="0">
-            <a:schemeClr val="dk1"/>
-          </a:fillRef>
-          <a:effectRef idx="1">
-            <a:schemeClr val="dk1"/>
-          </a:effectRef>
-          <a:fontRef idx="minor">
-            <a:schemeClr val="tx1"/>
-          </a:fontRef>
-        </p:style>
-      </p:cxnSp>
-      <p:cxnSp>
-        <p:nvCxnSpPr>
-          <p:cNvPr id="24" name="Straight Connector 23">
-            <a:extLst>
-              <a:ext uri="{FF2B5EF4-FFF2-40B4-BE49-F238E27FC236}">
-                <a16:creationId xmlns:a16="http://schemas.microsoft.com/office/drawing/2014/main" id="{E57F6A2D-6B05-8606-3E75-7118D45A26ED}"/>
-              </a:ext>
-            </a:extLst>
-          </p:cNvPr>
-          <p:cNvCxnSpPr>
-            <a:cxnSpLocks/>
-          </p:cNvCxnSpPr>
-          <p:nvPr/>
-        </p:nvCxnSpPr>
-        <p:spPr>
-          <a:xfrm>
-            <a:off x="5840562" y="4856873"/>
-            <a:ext cx="613010" cy="92341"/>
-          </a:xfrm>
-          <a:prstGeom prst="line">
-            <a:avLst/>
-          </a:prstGeom>
-        </p:spPr>
-        <p:style>
-          <a:lnRef idx="2">
-            <a:schemeClr val="dk1"/>
-          </a:lnRef>
-          <a:fillRef idx="0">
-            <a:schemeClr val="dk1"/>
-          </a:fillRef>
-          <a:effectRef idx="1">
-            <a:schemeClr val="dk1"/>
-          </a:effectRef>
-          <a:fontRef idx="minor">
-            <a:schemeClr val="tx1"/>
-          </a:fontRef>
-        </p:style>
-      </p:cxnSp>
-      <p:graphicFrame>
-        <p:nvGraphicFramePr>
-          <p:cNvPr id="20" name="Table 19">
-            <a:extLst>
-              <a:ext uri="{FF2B5EF4-FFF2-40B4-BE49-F238E27FC236}">
-                <a16:creationId xmlns:a16="http://schemas.microsoft.com/office/drawing/2014/main" id="{43150FF3-A97D-FF45-69B7-ACDBB8FF05F4}"/>
-              </a:ext>
-            </a:extLst>
-          </p:cNvPr>
-          <p:cNvGraphicFramePr>
-            <a:graphicFrameLocks noGrp="1"/>
-          </p:cNvGraphicFramePr>
-          <p:nvPr>
-            <p:extLst>
-              <p:ext uri="{D42A27DB-BD31-4B8C-83A1-F6EECF244321}">
-                <p14:modId xmlns:p14="http://schemas.microsoft.com/office/powerpoint/2010/main" val="2298889907"/>
-              </p:ext>
-            </p:extLst>
-          </p:nvPr>
-        </p:nvGraphicFramePr>
-        <p:xfrm>
-          <a:off x="6402192" y="4293858"/>
-          <a:ext cx="631270" cy="655356"/>
-        </p:xfrm>
-        <a:graphic>
-          <a:graphicData uri="http://schemas.openxmlformats.org/drawingml/2006/table">
-            <a:tbl>
-              <a:tblPr bandRow="1">
-                <a:tableStyleId>{5C22544A-7EE6-4342-B048-85BDC9FD1C3A}</a:tableStyleId>
-              </a:tblPr>
-              <a:tblGrid>
-                <a:gridCol w="208280">
-                  <a:extLst>
-                    <a:ext uri="{9D8B030D-6E8A-4147-A177-3AD203B41FA5}">
-                      <a16:colId xmlns:a16="http://schemas.microsoft.com/office/drawing/2014/main" val="3761141565"/>
-                    </a:ext>
-                  </a:extLst>
-                </a:gridCol>
-                <a:gridCol w="211495">
-                  <a:extLst>
-                    <a:ext uri="{9D8B030D-6E8A-4147-A177-3AD203B41FA5}">
-                      <a16:colId xmlns:a16="http://schemas.microsoft.com/office/drawing/2014/main" val="1761226943"/>
-                    </a:ext>
-                  </a:extLst>
-                </a:gridCol>
-                <a:gridCol w="211495">
-                  <a:extLst>
-                    <a:ext uri="{9D8B030D-6E8A-4147-A177-3AD203B41FA5}">
-                      <a16:colId xmlns:a16="http://schemas.microsoft.com/office/drawing/2014/main" val="2790257538"/>
-                    </a:ext>
-                  </a:extLst>
-                </a:gridCol>
-              </a:tblGrid>
-              <a:tr h="218452">
-                <a:tc>
-                  <a:txBody>
-                    <a:bodyPr/>
-                    <a:lstStyle/>
-                    <a:p>
-                      <a:endParaRPr lang="en-US" sz="100" dirty="0"/>
-                    </a:p>
-                  </a:txBody>
-                  <a:tcPr>
-                    <a:solidFill>
-                      <a:schemeClr val="accent2"/>
-                    </a:solidFill>
-                  </a:tcPr>
-                </a:tc>
-                <a:tc>
-                  <a:txBody>
-                    <a:bodyPr/>
-                    <a:lstStyle/>
-                    <a:p>
-                      <a:endParaRPr lang="en-US" sz="100" dirty="0"/>
-                    </a:p>
-                  </a:txBody>
-                  <a:tcPr>
-                    <a:solidFill>
-                      <a:srgbClr val="FFC000"/>
-                    </a:solidFill>
-                  </a:tcPr>
-                </a:tc>
-                <a:tc>
-                  <a:txBody>
-                    <a:bodyPr/>
-                    <a:lstStyle/>
-                    <a:p>
-                      <a:endParaRPr lang="en-US" sz="100" dirty="0"/>
-                    </a:p>
-                  </a:txBody>
-                  <a:tcPr>
-                    <a:solidFill>
-                      <a:srgbClr val="FFC000"/>
-                    </a:solidFill>
-                  </a:tcPr>
-                </a:tc>
-                <a:extLst>
-                  <a:ext uri="{0D108BD9-81ED-4DB2-BD59-A6C34878D82A}">
-                    <a16:rowId xmlns:a16="http://schemas.microsoft.com/office/drawing/2014/main" val="3401334349"/>
-                  </a:ext>
-                </a:extLst>
-              </a:tr>
-              <a:tr h="218452">
-                <a:tc>
-                  <a:txBody>
-                    <a:bodyPr/>
-                    <a:lstStyle/>
-                    <a:p>
-                      <a:endParaRPr lang="en-US" sz="100" dirty="0"/>
-                    </a:p>
-                  </a:txBody>
-                  <a:tcPr>
-                    <a:solidFill>
-                      <a:srgbClr val="FFC000"/>
-                    </a:solidFill>
-                  </a:tcPr>
-                </a:tc>
-                <a:tc>
-                  <a:txBody>
-                    <a:bodyPr/>
-                    <a:lstStyle/>
-                    <a:p>
-                      <a:endParaRPr lang="en-US" sz="100" dirty="0"/>
-                    </a:p>
-                  </a:txBody>
-                  <a:tcPr>
-                    <a:solidFill>
-                      <a:schemeClr val="accent2"/>
-                    </a:solidFill>
-                  </a:tcPr>
-                </a:tc>
-                <a:tc>
-                  <a:txBody>
-                    <a:bodyPr/>
-                    <a:lstStyle/>
-                    <a:p>
-                      <a:endParaRPr lang="en-US" sz="100" dirty="0"/>
-                    </a:p>
-                  </a:txBody>
-                  <a:tcPr>
-                    <a:solidFill>
-                      <a:srgbClr val="FFC000"/>
-                    </a:solidFill>
-                  </a:tcPr>
-                </a:tc>
-                <a:extLst>
-                  <a:ext uri="{0D108BD9-81ED-4DB2-BD59-A6C34878D82A}">
-                    <a16:rowId xmlns:a16="http://schemas.microsoft.com/office/drawing/2014/main" val="251990501"/>
-                  </a:ext>
-                </a:extLst>
-              </a:tr>
-              <a:tr h="218452">
-                <a:tc>
-                  <a:txBody>
-                    <a:bodyPr/>
-                    <a:lstStyle/>
-                    <a:p>
-                      <a:endParaRPr lang="en-US" sz="100" dirty="0"/>
-                    </a:p>
-                  </a:txBody>
-                  <a:tcPr>
-                    <a:solidFill>
-                      <a:srgbClr val="FFC000"/>
-                    </a:solidFill>
-                  </a:tcPr>
-                </a:tc>
-                <a:tc>
-                  <a:txBody>
-                    <a:bodyPr/>
-                    <a:lstStyle/>
-                    <a:p>
-                      <a:endParaRPr lang="en-US" sz="100" dirty="0"/>
-                    </a:p>
-                  </a:txBody>
-                  <a:tcPr>
-                    <a:solidFill>
-                      <a:srgbClr val="FFC000"/>
-                    </a:solidFill>
-                  </a:tcPr>
-                </a:tc>
-                <a:tc>
-                  <a:txBody>
-                    <a:bodyPr/>
-                    <a:lstStyle/>
-                    <a:p>
-                      <a:endParaRPr lang="en-US" sz="100" dirty="0"/>
-                    </a:p>
-                  </a:txBody>
-                  <a:tcPr>
-                    <a:solidFill>
-                      <a:schemeClr val="accent2"/>
-                    </a:solidFill>
-                  </a:tcPr>
-                </a:tc>
-                <a:extLst>
-                  <a:ext uri="{0D108BD9-81ED-4DB2-BD59-A6C34878D82A}">
-                    <a16:rowId xmlns:a16="http://schemas.microsoft.com/office/drawing/2014/main" val="400429151"/>
-                  </a:ext>
-                </a:extLst>
-              </a:tr>
-            </a:tbl>
-          </a:graphicData>
-        </a:graphic>
-      </p:graphicFrame>
+              <a:t>The flag manifold is the space of all nested subspaces</a:t>
+            </a:r>
+          </a:p>
+          <a:p>
+            <a:pPr lvl="1"/>
+            <a:r>
+              <a:rPr lang="en-US" dirty="0"/>
+              <a:t>Captures both broad and fine patterns</a:t>
+            </a:r>
+          </a:p>
+          <a:p>
+            <a:r>
+              <a:rPr lang="en-US" dirty="0"/>
+              <a:t>Allows for flexible integration </a:t>
+            </a:r>
+          </a:p>
+          <a:p>
+            <a:pPr lvl="1"/>
+            <a:r>
+              <a:rPr lang="en-US" dirty="0"/>
+              <a:t>Provides a shared geometric space where layers can be aligned without forcing them to perfectly match</a:t>
+            </a:r>
+          </a:p>
+        </p:txBody>
+      </p:sp>
       <p:pic>
         <p:nvPicPr>
-          <p:cNvPr id="26" name="Picture 25">
-            <a:extLst>
-              <a:ext uri="{FF2B5EF4-FFF2-40B4-BE49-F238E27FC236}">
-                <a16:creationId xmlns:a16="http://schemas.microsoft.com/office/drawing/2014/main" id="{246888AF-ED92-F70E-4A27-0A157B3D718A}"/>
+          <p:cNvPr id="6" name="Picture 5">
+            <a:extLst>
+              <a:ext uri="{FF2B5EF4-FFF2-40B4-BE49-F238E27FC236}">
+                <a16:creationId xmlns:a16="http://schemas.microsoft.com/office/drawing/2014/main" id="{2244F027-DE92-A6FC-9BF7-A49AB113EFA1}"/>
               </a:ext>
             </a:extLst>
           </p:cNvPr>
@@ -11809,8 +10905,74 @@
         </p:blipFill>
         <p:spPr>
           <a:xfrm>
-            <a:off x="3661179" y="2944630"/>
-            <a:ext cx="4379513" cy="2810889"/>
+            <a:off x="1794862" y="4425662"/>
+            <a:ext cx="8602275" cy="2067213"/>
+          </a:xfrm>
+          <a:prstGeom prst="rect">
+            <a:avLst/>
+          </a:prstGeom>
+        </p:spPr>
+      </p:pic>
+    </p:spTree>
+    <p:extLst>
+      <p:ext uri="{BB962C8B-B14F-4D97-AF65-F5344CB8AC3E}">
+        <p14:creationId xmlns:p14="http://schemas.microsoft.com/office/powerpoint/2010/main" val="738446246"/>
+      </p:ext>
+    </p:extLst>
+  </p:cSld>
+  <p:clrMapOvr>
+    <a:masterClrMapping/>
+  </p:clrMapOvr>
+</p:sld>
+</file>
+
+<file path=ppt/slides/slide12.xml><?xml version="1.0" encoding="utf-8"?>
+<p:sld xmlns:a="http://schemas.openxmlformats.org/drawingml/2006/main" xmlns:r="http://schemas.openxmlformats.org/officeDocument/2006/relationships" xmlns:p="http://schemas.openxmlformats.org/presentationml/2006/main">
+  <p:cSld>
+    <p:spTree>
+      <p:nvGrpSpPr>
+        <p:cNvPr id="1" name="">
+          <a:extLst>
+            <a:ext uri="{FF2B5EF4-FFF2-40B4-BE49-F238E27FC236}">
+              <a16:creationId xmlns:a16="http://schemas.microsoft.com/office/drawing/2014/main" id="{D7C2CFF5-55A9-3639-8C79-DC712A90E2A3}"/>
+            </a:ext>
+          </a:extLst>
+        </p:cNvPr>
+        <p:cNvGrpSpPr/>
+        <p:nvPr/>
+      </p:nvGrpSpPr>
+      <p:grpSpPr>
+        <a:xfrm>
+          <a:off x="0" y="0"/>
+          <a:ext cx="0" cy="0"/>
+          <a:chOff x="0" y="0"/>
+          <a:chExt cx="0" cy="0"/>
+        </a:xfrm>
+      </p:grpSpPr>
+      <p:pic>
+        <p:nvPicPr>
+          <p:cNvPr id="7" name="Picture 6">
+            <a:extLst>
+              <a:ext uri="{FF2B5EF4-FFF2-40B4-BE49-F238E27FC236}">
+                <a16:creationId xmlns:a16="http://schemas.microsoft.com/office/drawing/2014/main" id="{4B0071AF-819C-215D-CB56-372FAD20D1DE}"/>
+              </a:ext>
+            </a:extLst>
+          </p:cNvPr>
+          <p:cNvPicPr>
+            <a:picLocks noChangeAspect="1"/>
+          </p:cNvPicPr>
+          <p:nvPr/>
+        </p:nvPicPr>
+        <p:blipFill>
+          <a:blip r:embed="rId3"/>
+          <a:stretch>
+            <a:fillRect/>
+          </a:stretch>
+        </p:blipFill>
+        <p:spPr>
+          <a:xfrm>
+            <a:off x="2734609" y="2734618"/>
+            <a:ext cx="6722781" cy="4123382"/>
           </a:xfrm>
           <a:prstGeom prst="rect">
             <a:avLst/>
@@ -11819,10 +10981,10 @@
       </p:pic>
       <p:pic>
         <p:nvPicPr>
-          <p:cNvPr id="40" name="Picture 39">
-            <a:extLst>
-              <a:ext uri="{FF2B5EF4-FFF2-40B4-BE49-F238E27FC236}">
-                <a16:creationId xmlns:a16="http://schemas.microsoft.com/office/drawing/2014/main" id="{F0D9F668-5E6B-BEE5-2CD4-C32EBCBAF9B4}"/>
+          <p:cNvPr id="11" name="Picture 10">
+            <a:extLst>
+              <a:ext uri="{FF2B5EF4-FFF2-40B4-BE49-F238E27FC236}">
+                <a16:creationId xmlns:a16="http://schemas.microsoft.com/office/drawing/2014/main" id="{11D9A95F-60E9-EF03-3A6E-4229F4F9286B}"/>
               </a:ext>
             </a:extLst>
           </p:cNvPr>
@@ -11839,18 +11001,107 @@
         </p:blipFill>
         <p:spPr>
           <a:xfrm>
-            <a:off x="3340084" y="2782944"/>
-            <a:ext cx="5021701" cy="3105664"/>
+            <a:off x="2734608" y="2782736"/>
+            <a:ext cx="6722781" cy="4027146"/>
           </a:xfrm>
           <a:prstGeom prst="rect">
             <a:avLst/>
           </a:prstGeom>
         </p:spPr>
       </p:pic>
+      <p:sp>
+        <p:nvSpPr>
+          <p:cNvPr id="2" name="Title 1">
+            <a:extLst>
+              <a:ext uri="{FF2B5EF4-FFF2-40B4-BE49-F238E27FC236}">
+                <a16:creationId xmlns:a16="http://schemas.microsoft.com/office/drawing/2014/main" id="{FBE7C9FA-82CB-D09B-B721-1757D7A5C216}"/>
+              </a:ext>
+            </a:extLst>
+          </p:cNvPr>
+          <p:cNvSpPr>
+            <a:spLocks noGrp="1"/>
+          </p:cNvSpPr>
+          <p:nvPr>
+            <p:ph type="title"/>
+          </p:nvPr>
+        </p:nvSpPr>
+        <p:spPr/>
+        <p:txBody>
+          <a:bodyPr>
+            <a:normAutofit/>
+          </a:bodyPr>
+          <a:lstStyle/>
+          <a:p>
+            <a:r>
+              <a:rPr lang="en-US" dirty="0"/>
+              <a:t>Multi-</a:t>
+            </a:r>
+            <a:r>
+              <a:rPr lang="en-US" dirty="0" err="1"/>
+              <a:t>Omic</a:t>
+            </a:r>
+            <a:r>
+              <a:rPr lang="en-US" dirty="0"/>
+              <a:t> Spectral Clustering using the Flag Manifold (MMOC) 		                    </a:t>
+            </a:r>
+            <a:r>
+              <a:rPr lang="en-US" sz="2800" dirty="0"/>
+              <a:t>Charlie Carpenter</a:t>
+            </a:r>
+            <a:endParaRPr lang="en-US" dirty="0"/>
+          </a:p>
+        </p:txBody>
+      </p:sp>
+      <p:sp>
+        <p:nvSpPr>
+          <p:cNvPr id="3" name="Content Placeholder 2">
+            <a:extLst>
+              <a:ext uri="{FF2B5EF4-FFF2-40B4-BE49-F238E27FC236}">
+                <a16:creationId xmlns:a16="http://schemas.microsoft.com/office/drawing/2014/main" id="{6D5986B1-5A9D-96A0-7B77-57B89FD65AFC}"/>
+              </a:ext>
+            </a:extLst>
+          </p:cNvPr>
+          <p:cNvSpPr>
+            <a:spLocks noGrp="1"/>
+          </p:cNvSpPr>
+          <p:nvPr>
+            <p:ph idx="1"/>
+          </p:nvPr>
+        </p:nvSpPr>
+        <p:spPr>
+          <a:xfrm>
+            <a:off x="838200" y="1825625"/>
+            <a:ext cx="10515600" cy="957319"/>
+          </a:xfrm>
+        </p:spPr>
+        <p:txBody>
+          <a:bodyPr/>
+          <a:lstStyle/>
+          <a:p>
+            <a:r>
+              <a:rPr lang="en-US" dirty="0"/>
+              <a:t>MMOC allows for multi-view spectral clustering </a:t>
+            </a:r>
+          </a:p>
+          <a:p>
+            <a:pPr lvl="1"/>
+            <a:r>
+              <a:rPr lang="en-US" dirty="0"/>
+              <a:t>Can handle difference in number of features or clusters across views</a:t>
+            </a:r>
+          </a:p>
+          <a:p>
+            <a:endParaRPr lang="en-US" dirty="0"/>
+          </a:p>
+          <a:p>
+            <a:endParaRPr lang="en-US" dirty="0"/>
+          </a:p>
+        </p:txBody>
+      </p:sp>
     </p:spTree>
     <p:extLst>
       <p:ext uri="{BB962C8B-B14F-4D97-AF65-F5344CB8AC3E}">
-        <p14:creationId xmlns:p14="http://schemas.microsoft.com/office/powerpoint/2010/main" val="2767281801"/>
+        <p14:creationId xmlns:p14="http://schemas.microsoft.com/office/powerpoint/2010/main" val="3716716746"/>
       </p:ext>
     </p:extLst>
   </p:cSld>
@@ -11878,7 +11129,7 @@
                             </p:stCondLst>
                             <p:childTnLst>
                               <p:par>
-                                <p:cTn id="5" presetID="1" presetClass="entr" presetSubtype="0" fill="hold" nodeType="clickEffect">
+                                <p:cTn id="5" presetID="1" presetClass="exit" presetSubtype="0" fill="hold" nodeType="clickEffect">
                                   <p:stCondLst>
                                     <p:cond delay="0"/>
                                   </p:stCondLst>
@@ -11891,14 +11142,14 @@
                                           </p:stCondLst>
                                         </p:cTn>
                                         <p:tgtEl>
-                                          <p:spTgt spid="40"/>
+                                          <p:spTgt spid="11"/>
                                         </p:tgtEl>
                                         <p:attrNameLst>
                                           <p:attrName>style.visibility</p:attrName>
                                         </p:attrNameLst>
                                       </p:cBhvr>
                                       <p:to>
-                                        <p:strVal val="visible"/>
+                                        <p:strVal val="hidden"/>
                                       </p:to>
                                     </p:set>
                                   </p:childTnLst>
@@ -11935,7 +11186,7 @@
 </p:sld>
 </file>
 
-<file path=ppt/slides/slide12.xml><?xml version="1.0" encoding="utf-8"?>
+<file path=ppt/slides/slide13.xml><?xml version="1.0" encoding="utf-8"?>
 <p:sld xmlns:a="http://schemas.openxmlformats.org/drawingml/2006/main" xmlns:r="http://schemas.openxmlformats.org/officeDocument/2006/relationships" xmlns:p="http://schemas.openxmlformats.org/presentationml/2006/main">
   <p:cSld>
     <p:spTree>
@@ -12114,7 +11365,7 @@
 </p:sld>
 </file>
 
-<file path=ppt/slides/slide13.xml><?xml version="1.0" encoding="utf-8"?>
+<file path=ppt/slides/slide14.xml><?xml version="1.0" encoding="utf-8"?>
 <p:sld xmlns:a="http://schemas.openxmlformats.org/drawingml/2006/main" xmlns:r="http://schemas.openxmlformats.org/officeDocument/2006/relationships" xmlns:p="http://schemas.openxmlformats.org/presentationml/2006/main">
   <p:cSld>
     <p:spTree>
@@ -12287,7 +11538,7 @@
 </p:sld>
 </file>
 
-<file path=ppt/slides/slide14.xml><?xml version="1.0" encoding="utf-8"?>
+<file path=ppt/slides/slide15.xml><?xml version="1.0" encoding="utf-8"?>
 <p:sld xmlns:a="http://schemas.openxmlformats.org/drawingml/2006/main" xmlns:r="http://schemas.openxmlformats.org/officeDocument/2006/relationships" xmlns:p="http://schemas.openxmlformats.org/presentationml/2006/main">
   <p:cSld>
     <p:spTree>
@@ -12647,135 +11898,6 @@
 </p:sld>
 </file>
 
-<file path=ppt/slides/slide15.xml><?xml version="1.0" encoding="utf-8"?>
-<p:sld xmlns:a="http://schemas.openxmlformats.org/drawingml/2006/main" xmlns:r="http://schemas.openxmlformats.org/officeDocument/2006/relationships" xmlns:p="http://schemas.openxmlformats.org/presentationml/2006/main">
-  <p:cSld>
-    <p:spTree>
-      <p:nvGrpSpPr>
-        <p:cNvPr id="1" name=""/>
-        <p:cNvGrpSpPr/>
-        <p:nvPr/>
-      </p:nvGrpSpPr>
-      <p:grpSpPr>
-        <a:xfrm>
-          <a:off x="0" y="0"/>
-          <a:ext cx="0" cy="0"/>
-          <a:chOff x="0" y="0"/>
-          <a:chExt cx="0" cy="0"/>
-        </a:xfrm>
-      </p:grpSpPr>
-      <p:sp>
-        <p:nvSpPr>
-          <p:cNvPr id="2" name="Title 1">
-            <a:extLst>
-              <a:ext uri="{FF2B5EF4-FFF2-40B4-BE49-F238E27FC236}">
-                <a16:creationId xmlns:a16="http://schemas.microsoft.com/office/drawing/2014/main" id="{538E337E-AF7A-9BDB-ABDA-0B53268A49B3}"/>
-              </a:ext>
-            </a:extLst>
-          </p:cNvPr>
-          <p:cNvSpPr>
-            <a:spLocks noGrp="1"/>
-          </p:cNvSpPr>
-          <p:nvPr>
-            <p:ph type="title"/>
-          </p:nvPr>
-        </p:nvSpPr>
-        <p:spPr/>
-        <p:txBody>
-          <a:bodyPr/>
-          <a:lstStyle/>
-          <a:p>
-            <a:r>
-              <a:rPr lang="en-US" dirty="0"/>
-              <a:t>Validation of Number of Joint Clusters</a:t>
-            </a:r>
-          </a:p>
-        </p:txBody>
-      </p:sp>
-      <p:pic>
-        <p:nvPicPr>
-          <p:cNvPr id="8" name="Picture 7">
-            <a:extLst>
-              <a:ext uri="{FF2B5EF4-FFF2-40B4-BE49-F238E27FC236}">
-                <a16:creationId xmlns:a16="http://schemas.microsoft.com/office/drawing/2014/main" id="{6B748B2D-58E8-EAF7-F357-6A04FCE13964}"/>
-              </a:ext>
-            </a:extLst>
-          </p:cNvPr>
-          <p:cNvPicPr>
-            <a:picLocks noChangeAspect="1"/>
-          </p:cNvPicPr>
-          <p:nvPr/>
-        </p:nvPicPr>
-        <p:blipFill>
-          <a:blip r:embed="rId3">
-            <a:extLst>
-              <a:ext uri="{28A0092B-C50C-407E-A947-70E740481C1C}">
-                <a14:useLocalDpi xmlns:a14="http://schemas.microsoft.com/office/drawing/2010/main" val="0"/>
-              </a:ext>
-            </a:extLst>
-          </a:blip>
-          <a:stretch>
-            <a:fillRect/>
-          </a:stretch>
-        </p:blipFill>
-        <p:spPr>
-          <a:xfrm>
-            <a:off x="5159490" y="1690688"/>
-            <a:ext cx="6858957" cy="4763165"/>
-          </a:xfrm>
-          <a:prstGeom prst="rect">
-            <a:avLst/>
-          </a:prstGeom>
-        </p:spPr>
-      </p:pic>
-      <p:sp>
-        <p:nvSpPr>
-          <p:cNvPr id="3" name="Content Placeholder 2">
-            <a:extLst>
-              <a:ext uri="{FF2B5EF4-FFF2-40B4-BE49-F238E27FC236}">
-                <a16:creationId xmlns:a16="http://schemas.microsoft.com/office/drawing/2014/main" id="{37EE8EC9-62EF-8868-150B-9D1509DCB50C}"/>
-              </a:ext>
-            </a:extLst>
-          </p:cNvPr>
-          <p:cNvSpPr>
-            <a:spLocks noGrp="1"/>
-          </p:cNvSpPr>
-          <p:nvPr>
-            <p:ph idx="1"/>
-          </p:nvPr>
-        </p:nvSpPr>
-        <p:spPr>
-          <a:xfrm>
-            <a:off x="838200" y="1825625"/>
-            <a:ext cx="4321290" cy="2329280"/>
-          </a:xfrm>
-        </p:spPr>
-        <p:txBody>
-          <a:bodyPr>
-            <a:normAutofit/>
-          </a:bodyPr>
-          <a:lstStyle/>
-          <a:p>
-            <a:r>
-              <a:rPr lang="en-US" dirty="0"/>
-              <a:t>There is moderate stability in cluster assignments when changing the number of groups </a:t>
-            </a:r>
-          </a:p>
-        </p:txBody>
-      </p:sp>
-    </p:spTree>
-    <p:extLst>
-      <p:ext uri="{BB962C8B-B14F-4D97-AF65-F5344CB8AC3E}">
-        <p14:creationId xmlns:p14="http://schemas.microsoft.com/office/powerpoint/2010/main" val="3448840591"/>
-      </p:ext>
-    </p:extLst>
-  </p:cSld>
-  <p:clrMapOvr>
-    <a:masterClrMapping/>
-  </p:clrMapOvr>
-</p:sld>
-</file>
-
 <file path=ppt/slides/slide16.xml><?xml version="1.0" encoding="utf-8"?>
 <p:sld xmlns:a="http://schemas.openxmlformats.org/drawingml/2006/main" xmlns:r="http://schemas.openxmlformats.org/officeDocument/2006/relationships" xmlns:p="http://schemas.openxmlformats.org/presentationml/2006/main">
   <p:cSld>
@@ -12798,7 +11920,7 @@
           <p:cNvPr id="2" name="Title 1">
             <a:extLst>
               <a:ext uri="{FF2B5EF4-FFF2-40B4-BE49-F238E27FC236}">
-                <a16:creationId xmlns:a16="http://schemas.microsoft.com/office/drawing/2014/main" id="{68029340-84BD-1F29-40E5-4BB9F682DA01}"/>
+                <a16:creationId xmlns:a16="http://schemas.microsoft.com/office/drawing/2014/main" id="{538E337E-AF7A-9BDB-ABDA-0B53268A49B3}"/>
               </a:ext>
             </a:extLst>
           </p:cNvPr>
@@ -12816,17 +11938,17 @@
           <a:p>
             <a:r>
               <a:rPr lang="en-US" dirty="0"/>
-              <a:t>Cluster Comparison</a:t>
+              <a:t>Validation of Number of Joint Clusters</a:t>
             </a:r>
           </a:p>
         </p:txBody>
       </p:sp>
       <p:pic>
         <p:nvPicPr>
-          <p:cNvPr id="4" name="Picture 3">
-            <a:extLst>
-              <a:ext uri="{FF2B5EF4-FFF2-40B4-BE49-F238E27FC236}">
-                <a16:creationId xmlns:a16="http://schemas.microsoft.com/office/drawing/2014/main" id="{FFC7F48F-D410-A085-31BD-0809B1A55281}"/>
+          <p:cNvPr id="8" name="Picture 7">
+            <a:extLst>
+              <a:ext uri="{FF2B5EF4-FFF2-40B4-BE49-F238E27FC236}">
+                <a16:creationId xmlns:a16="http://schemas.microsoft.com/office/drawing/2014/main" id="{6B748B2D-58E8-EAF7-F357-6A04FCE13964}"/>
               </a:ext>
             </a:extLst>
           </p:cNvPr>
@@ -12862,6 +11984,135 @@
           <p:cNvPr id="3" name="Content Placeholder 2">
             <a:extLst>
               <a:ext uri="{FF2B5EF4-FFF2-40B4-BE49-F238E27FC236}">
+                <a16:creationId xmlns:a16="http://schemas.microsoft.com/office/drawing/2014/main" id="{37EE8EC9-62EF-8868-150B-9D1509DCB50C}"/>
+              </a:ext>
+            </a:extLst>
+          </p:cNvPr>
+          <p:cNvSpPr>
+            <a:spLocks noGrp="1"/>
+          </p:cNvSpPr>
+          <p:nvPr>
+            <p:ph idx="1"/>
+          </p:nvPr>
+        </p:nvSpPr>
+        <p:spPr>
+          <a:xfrm>
+            <a:off x="838200" y="1825625"/>
+            <a:ext cx="4321290" cy="2329280"/>
+          </a:xfrm>
+        </p:spPr>
+        <p:txBody>
+          <a:bodyPr>
+            <a:normAutofit/>
+          </a:bodyPr>
+          <a:lstStyle/>
+          <a:p>
+            <a:r>
+              <a:rPr lang="en-US" dirty="0"/>
+              <a:t>There is moderate stability in cluster assignments when changing the number of groups </a:t>
+            </a:r>
+          </a:p>
+        </p:txBody>
+      </p:sp>
+    </p:spTree>
+    <p:extLst>
+      <p:ext uri="{BB962C8B-B14F-4D97-AF65-F5344CB8AC3E}">
+        <p14:creationId xmlns:p14="http://schemas.microsoft.com/office/powerpoint/2010/main" val="3448840591"/>
+      </p:ext>
+    </p:extLst>
+  </p:cSld>
+  <p:clrMapOvr>
+    <a:masterClrMapping/>
+  </p:clrMapOvr>
+</p:sld>
+</file>
+
+<file path=ppt/slides/slide17.xml><?xml version="1.0" encoding="utf-8"?>
+<p:sld xmlns:a="http://schemas.openxmlformats.org/drawingml/2006/main" xmlns:r="http://schemas.openxmlformats.org/officeDocument/2006/relationships" xmlns:p="http://schemas.openxmlformats.org/presentationml/2006/main">
+  <p:cSld>
+    <p:spTree>
+      <p:nvGrpSpPr>
+        <p:cNvPr id="1" name=""/>
+        <p:cNvGrpSpPr/>
+        <p:nvPr/>
+      </p:nvGrpSpPr>
+      <p:grpSpPr>
+        <a:xfrm>
+          <a:off x="0" y="0"/>
+          <a:ext cx="0" cy="0"/>
+          <a:chOff x="0" y="0"/>
+          <a:chExt cx="0" cy="0"/>
+        </a:xfrm>
+      </p:grpSpPr>
+      <p:sp>
+        <p:nvSpPr>
+          <p:cNvPr id="2" name="Title 1">
+            <a:extLst>
+              <a:ext uri="{FF2B5EF4-FFF2-40B4-BE49-F238E27FC236}">
+                <a16:creationId xmlns:a16="http://schemas.microsoft.com/office/drawing/2014/main" id="{68029340-84BD-1F29-40E5-4BB9F682DA01}"/>
+              </a:ext>
+            </a:extLst>
+          </p:cNvPr>
+          <p:cNvSpPr>
+            <a:spLocks noGrp="1"/>
+          </p:cNvSpPr>
+          <p:nvPr>
+            <p:ph type="title"/>
+          </p:nvPr>
+        </p:nvSpPr>
+        <p:spPr/>
+        <p:txBody>
+          <a:bodyPr/>
+          <a:lstStyle/>
+          <a:p>
+            <a:r>
+              <a:rPr lang="en-US" dirty="0"/>
+              <a:t>Cluster Comparison</a:t>
+            </a:r>
+          </a:p>
+        </p:txBody>
+      </p:sp>
+      <p:pic>
+        <p:nvPicPr>
+          <p:cNvPr id="4" name="Picture 3">
+            <a:extLst>
+              <a:ext uri="{FF2B5EF4-FFF2-40B4-BE49-F238E27FC236}">
+                <a16:creationId xmlns:a16="http://schemas.microsoft.com/office/drawing/2014/main" id="{FFC7F48F-D410-A085-31BD-0809B1A55281}"/>
+              </a:ext>
+            </a:extLst>
+          </p:cNvPr>
+          <p:cNvPicPr>
+            <a:picLocks noChangeAspect="1"/>
+          </p:cNvPicPr>
+          <p:nvPr/>
+        </p:nvPicPr>
+        <p:blipFill>
+          <a:blip r:embed="rId3">
+            <a:extLst>
+              <a:ext uri="{28A0092B-C50C-407E-A947-70E740481C1C}">
+                <a14:useLocalDpi xmlns:a14="http://schemas.microsoft.com/office/drawing/2010/main" val="0"/>
+              </a:ext>
+            </a:extLst>
+          </a:blip>
+          <a:stretch>
+            <a:fillRect/>
+          </a:stretch>
+        </p:blipFill>
+        <p:spPr>
+          <a:xfrm>
+            <a:off x="5159490" y="1690688"/>
+            <a:ext cx="6858957" cy="4763165"/>
+          </a:xfrm>
+          <a:prstGeom prst="rect">
+            <a:avLst/>
+          </a:prstGeom>
+        </p:spPr>
+      </p:pic>
+      <p:sp>
+        <p:nvSpPr>
+          <p:cNvPr id="3" name="Content Placeholder 2">
+            <a:extLst>
+              <a:ext uri="{FF2B5EF4-FFF2-40B4-BE49-F238E27FC236}">
                 <a16:creationId xmlns:a16="http://schemas.microsoft.com/office/drawing/2014/main" id="{E86AADF7-B492-CA7A-0771-3EAFB2893A65}"/>
               </a:ext>
             </a:extLst>
@@ -12918,7 +12169,7 @@
 </p:sld>
 </file>
 
-<file path=ppt/slides/slide17.xml><?xml version="1.0" encoding="utf-8"?>
+<file path=ppt/slides/slide18.xml><?xml version="1.0" encoding="utf-8"?>
 <p:sld xmlns:a="http://schemas.openxmlformats.org/drawingml/2006/main" xmlns:r="http://schemas.openxmlformats.org/officeDocument/2006/relationships" xmlns:p="http://schemas.openxmlformats.org/presentationml/2006/main">
   <p:cSld>
     <p:spTree>
@@ -13044,149 +12295,6 @@
     <p:extLst>
       <p:ext uri="{BB962C8B-B14F-4D97-AF65-F5344CB8AC3E}">
         <p14:creationId xmlns:p14="http://schemas.microsoft.com/office/powerpoint/2010/main" val="4019548605"/>
-      </p:ext>
-    </p:extLst>
-  </p:cSld>
-  <p:clrMapOvr>
-    <a:masterClrMapping/>
-  </p:clrMapOvr>
-</p:sld>
-</file>
-
-<file path=ppt/slides/slide18.xml><?xml version="1.0" encoding="utf-8"?>
-<p:sld xmlns:a="http://schemas.openxmlformats.org/drawingml/2006/main" xmlns:r="http://schemas.openxmlformats.org/officeDocument/2006/relationships" xmlns:p="http://schemas.openxmlformats.org/presentationml/2006/main">
-  <p:cSld>
-    <p:spTree>
-      <p:nvGrpSpPr>
-        <p:cNvPr id="1" name=""/>
-        <p:cNvGrpSpPr/>
-        <p:nvPr/>
-      </p:nvGrpSpPr>
-      <p:grpSpPr>
-        <a:xfrm>
-          <a:off x="0" y="0"/>
-          <a:ext cx="0" cy="0"/>
-          <a:chOff x="0" y="0"/>
-          <a:chExt cx="0" cy="0"/>
-        </a:xfrm>
-      </p:grpSpPr>
-      <p:pic>
-        <p:nvPicPr>
-          <p:cNvPr id="5" name="Picture 4">
-            <a:extLst>
-              <a:ext uri="{FF2B5EF4-FFF2-40B4-BE49-F238E27FC236}">
-                <a16:creationId xmlns:a16="http://schemas.microsoft.com/office/drawing/2014/main" id="{A25144C5-E5D0-8861-0461-C460FF2BC8D7}"/>
-              </a:ext>
-            </a:extLst>
-          </p:cNvPr>
-          <p:cNvPicPr>
-            <a:picLocks noChangeAspect="1"/>
-          </p:cNvPicPr>
-          <p:nvPr/>
-        </p:nvPicPr>
-        <p:blipFill>
-          <a:blip r:embed="rId3">
-            <a:extLst>
-              <a:ext uri="{28A0092B-C50C-407E-A947-70E740481C1C}">
-                <a14:useLocalDpi xmlns:a14="http://schemas.microsoft.com/office/drawing/2010/main" val="0"/>
-              </a:ext>
-            </a:extLst>
-          </a:blip>
-          <a:stretch>
-            <a:fillRect/>
-          </a:stretch>
-        </p:blipFill>
-        <p:spPr>
-          <a:xfrm>
-            <a:off x="4787757" y="687796"/>
-            <a:ext cx="7404243" cy="6170203"/>
-          </a:xfrm>
-          <a:prstGeom prst="rect">
-            <a:avLst/>
-          </a:prstGeom>
-        </p:spPr>
-      </p:pic>
-      <p:sp>
-        <p:nvSpPr>
-          <p:cNvPr id="2" name="Title 1">
-            <a:extLst>
-              <a:ext uri="{FF2B5EF4-FFF2-40B4-BE49-F238E27FC236}">
-                <a16:creationId xmlns:a16="http://schemas.microsoft.com/office/drawing/2014/main" id="{B9FC1750-823F-79ED-A0F0-B3F4697FC482}"/>
-              </a:ext>
-            </a:extLst>
-          </p:cNvPr>
-          <p:cNvSpPr>
-            <a:spLocks noGrp="1"/>
-          </p:cNvSpPr>
-          <p:nvPr>
-            <p:ph type="title"/>
-          </p:nvPr>
-        </p:nvSpPr>
-        <p:spPr/>
-        <p:txBody>
-          <a:bodyPr/>
-          <a:lstStyle/>
-          <a:p>
-            <a:r>
-              <a:rPr lang="en-US" dirty="0"/>
-              <a:t>Abundant Bacteria</a:t>
-            </a:r>
-          </a:p>
-        </p:txBody>
-      </p:sp>
-      <p:sp>
-        <p:nvSpPr>
-          <p:cNvPr id="3" name="Content Placeholder 2">
-            <a:extLst>
-              <a:ext uri="{FF2B5EF4-FFF2-40B4-BE49-F238E27FC236}">
-                <a16:creationId xmlns:a16="http://schemas.microsoft.com/office/drawing/2014/main" id="{C4EA371A-BC5F-B926-D8C1-C2204FF755A3}"/>
-              </a:ext>
-            </a:extLst>
-          </p:cNvPr>
-          <p:cNvSpPr>
-            <a:spLocks noGrp="1"/>
-          </p:cNvSpPr>
-          <p:nvPr>
-            <p:ph idx="1"/>
-          </p:nvPr>
-        </p:nvSpPr>
-        <p:spPr>
-          <a:xfrm>
-            <a:off x="838200" y="1825624"/>
-            <a:ext cx="3749842" cy="4667251"/>
-          </a:xfrm>
-        </p:spPr>
-        <p:txBody>
-          <a:bodyPr>
-            <a:normAutofit/>
-          </a:bodyPr>
-          <a:lstStyle/>
-          <a:p>
-            <a:r>
-              <a:rPr lang="en-US" dirty="0"/>
-              <a:t>Visualized with relative abundances, not CLR-transformation</a:t>
-            </a:r>
-          </a:p>
-          <a:p>
-            <a:r>
-              <a:rPr lang="en-US" dirty="0"/>
-              <a:t>Fusobacterium and both </a:t>
-            </a:r>
-            <a:r>
-              <a:rPr lang="en-US" dirty="0" err="1"/>
-              <a:t>Veillonella</a:t>
-            </a:r>
-            <a:r>
-              <a:rPr lang="en-US" dirty="0"/>
-              <a:t> have statistically significant group differences after FDR correction</a:t>
-            </a:r>
-          </a:p>
-        </p:txBody>
-      </p:sp>
-    </p:spTree>
-    <p:extLst>
-      <p:ext uri="{BB962C8B-B14F-4D97-AF65-F5344CB8AC3E}">
-        <p14:creationId xmlns:p14="http://schemas.microsoft.com/office/powerpoint/2010/main" val="322099442"/>
       </p:ext>
     </p:extLst>
   </p:cSld>
@@ -13213,94 +12321,12 @@
           <a:chExt cx="0" cy="0"/>
         </a:xfrm>
       </p:grpSpPr>
-      <p:sp>
-        <p:nvSpPr>
-          <p:cNvPr id="2" name="Title 1">
-            <a:extLst>
-              <a:ext uri="{FF2B5EF4-FFF2-40B4-BE49-F238E27FC236}">
-                <a16:creationId xmlns:a16="http://schemas.microsoft.com/office/drawing/2014/main" id="{2FE3FD00-C95F-A5A7-FAC6-63482FE6DB4F}"/>
-              </a:ext>
-            </a:extLst>
-          </p:cNvPr>
-          <p:cNvSpPr>
-            <a:spLocks noGrp="1"/>
-          </p:cNvSpPr>
-          <p:nvPr>
-            <p:ph type="title"/>
-          </p:nvPr>
-        </p:nvSpPr>
-        <p:spPr/>
-        <p:txBody>
-          <a:bodyPr/>
-          <a:lstStyle/>
-          <a:p>
-            <a:r>
-              <a:rPr lang="en-US" dirty="0"/>
-              <a:t>Significant Bacteria</a:t>
-            </a:r>
-          </a:p>
-        </p:txBody>
-      </p:sp>
-      <p:sp>
-        <p:nvSpPr>
-          <p:cNvPr id="3" name="Content Placeholder 2">
-            <a:extLst>
-              <a:ext uri="{FF2B5EF4-FFF2-40B4-BE49-F238E27FC236}">
-                <a16:creationId xmlns:a16="http://schemas.microsoft.com/office/drawing/2014/main" id="{168DDF37-A311-1899-6FF9-CD1AF7D08DDA}"/>
-              </a:ext>
-            </a:extLst>
-          </p:cNvPr>
-          <p:cNvSpPr>
-            <a:spLocks noGrp="1"/>
-          </p:cNvSpPr>
-          <p:nvPr>
-            <p:ph idx="1"/>
-          </p:nvPr>
-        </p:nvSpPr>
-        <p:spPr>
-          <a:xfrm>
-            <a:off x="838200" y="1825625"/>
-            <a:ext cx="3476946" cy="4351338"/>
-          </a:xfrm>
-        </p:spPr>
-        <p:txBody>
-          <a:bodyPr/>
-          <a:lstStyle/>
-          <a:p>
-            <a:r>
-              <a:rPr lang="en-US" dirty="0"/>
-              <a:t>Fusobacterium and both </a:t>
-            </a:r>
-            <a:r>
-              <a:rPr lang="en-US" dirty="0" err="1"/>
-              <a:t>Veillonella</a:t>
-            </a:r>
-            <a:r>
-              <a:rPr lang="en-US" dirty="0"/>
-              <a:t> are also abundant</a:t>
-            </a:r>
-          </a:p>
-          <a:p>
-            <a:r>
-              <a:rPr lang="en-US" dirty="0"/>
-              <a:t>Levene’s test indicated no violations of homogeneity of variance </a:t>
-            </a:r>
-          </a:p>
-          <a:p>
-            <a:pPr lvl="1"/>
-            <a:r>
-              <a:rPr lang="en-US" dirty="0"/>
-              <a:t>All p &gt; 0.29</a:t>
-            </a:r>
-          </a:p>
-        </p:txBody>
-      </p:sp>
       <p:pic>
         <p:nvPicPr>
-          <p:cNvPr id="8" name="Picture 7">
-            <a:extLst>
-              <a:ext uri="{FF2B5EF4-FFF2-40B4-BE49-F238E27FC236}">
-                <a16:creationId xmlns:a16="http://schemas.microsoft.com/office/drawing/2014/main" id="{0BB5267D-E078-9D43-CDAA-C84F220F5DA6}"/>
+          <p:cNvPr id="5" name="Picture 4">
+            <a:extLst>
+              <a:ext uri="{FF2B5EF4-FFF2-40B4-BE49-F238E27FC236}">
+                <a16:creationId xmlns:a16="http://schemas.microsoft.com/office/drawing/2014/main" id="{A25144C5-E5D0-8861-0461-C460FF2BC8D7}"/>
               </a:ext>
             </a:extLst>
           </p:cNvPr>
@@ -13323,18 +12349,95 @@
         </p:blipFill>
         <p:spPr>
           <a:xfrm>
-            <a:off x="4225009" y="1325366"/>
-            <a:ext cx="7966991" cy="5532634"/>
+            <a:off x="4787757" y="687796"/>
+            <a:ext cx="7404243" cy="6170203"/>
           </a:xfrm>
           <a:prstGeom prst="rect">
             <a:avLst/>
           </a:prstGeom>
         </p:spPr>
       </p:pic>
+      <p:sp>
+        <p:nvSpPr>
+          <p:cNvPr id="2" name="Title 1">
+            <a:extLst>
+              <a:ext uri="{FF2B5EF4-FFF2-40B4-BE49-F238E27FC236}">
+                <a16:creationId xmlns:a16="http://schemas.microsoft.com/office/drawing/2014/main" id="{B9FC1750-823F-79ED-A0F0-B3F4697FC482}"/>
+              </a:ext>
+            </a:extLst>
+          </p:cNvPr>
+          <p:cNvSpPr>
+            <a:spLocks noGrp="1"/>
+          </p:cNvSpPr>
+          <p:nvPr>
+            <p:ph type="title"/>
+          </p:nvPr>
+        </p:nvSpPr>
+        <p:spPr/>
+        <p:txBody>
+          <a:bodyPr/>
+          <a:lstStyle/>
+          <a:p>
+            <a:r>
+              <a:rPr lang="en-US" dirty="0"/>
+              <a:t>Abundant Bacteria</a:t>
+            </a:r>
+          </a:p>
+        </p:txBody>
+      </p:sp>
+      <p:sp>
+        <p:nvSpPr>
+          <p:cNvPr id="3" name="Content Placeholder 2">
+            <a:extLst>
+              <a:ext uri="{FF2B5EF4-FFF2-40B4-BE49-F238E27FC236}">
+                <a16:creationId xmlns:a16="http://schemas.microsoft.com/office/drawing/2014/main" id="{C4EA371A-BC5F-B926-D8C1-C2204FF755A3}"/>
+              </a:ext>
+            </a:extLst>
+          </p:cNvPr>
+          <p:cNvSpPr>
+            <a:spLocks noGrp="1"/>
+          </p:cNvSpPr>
+          <p:nvPr>
+            <p:ph idx="1"/>
+          </p:nvPr>
+        </p:nvSpPr>
+        <p:spPr>
+          <a:xfrm>
+            <a:off x="838200" y="1825624"/>
+            <a:ext cx="3749842" cy="4667251"/>
+          </a:xfrm>
+        </p:spPr>
+        <p:txBody>
+          <a:bodyPr>
+            <a:normAutofit/>
+          </a:bodyPr>
+          <a:lstStyle/>
+          <a:p>
+            <a:r>
+              <a:rPr lang="en-US" dirty="0"/>
+              <a:t>Visualized with relative abundances, not CLR-transformation</a:t>
+            </a:r>
+          </a:p>
+          <a:p>
+            <a:r>
+              <a:rPr lang="en-US" dirty="0"/>
+              <a:t>Fusobacterium and both </a:t>
+            </a:r>
+            <a:r>
+              <a:rPr lang="en-US" dirty="0" err="1"/>
+              <a:t>Veillonella</a:t>
+            </a:r>
+            <a:r>
+              <a:rPr lang="en-US" dirty="0"/>
+              <a:t> have statistically significant group differences after FDR correction</a:t>
+            </a:r>
+          </a:p>
+        </p:txBody>
+      </p:sp>
     </p:spTree>
     <p:extLst>
       <p:ext uri="{BB962C8B-B14F-4D97-AF65-F5344CB8AC3E}">
-        <p14:creationId xmlns:p14="http://schemas.microsoft.com/office/powerpoint/2010/main" val="2225801808"/>
+        <p14:creationId xmlns:p14="http://schemas.microsoft.com/office/powerpoint/2010/main" val="322099442"/>
       </p:ext>
     </p:extLst>
   </p:cSld>
@@ -13477,12 +12580,94 @@
           <a:chExt cx="0" cy="0"/>
         </a:xfrm>
       </p:grpSpPr>
+      <p:sp>
+        <p:nvSpPr>
+          <p:cNvPr id="2" name="Title 1">
+            <a:extLst>
+              <a:ext uri="{FF2B5EF4-FFF2-40B4-BE49-F238E27FC236}">
+                <a16:creationId xmlns:a16="http://schemas.microsoft.com/office/drawing/2014/main" id="{2FE3FD00-C95F-A5A7-FAC6-63482FE6DB4F}"/>
+              </a:ext>
+            </a:extLst>
+          </p:cNvPr>
+          <p:cNvSpPr>
+            <a:spLocks noGrp="1"/>
+          </p:cNvSpPr>
+          <p:nvPr>
+            <p:ph type="title"/>
+          </p:nvPr>
+        </p:nvSpPr>
+        <p:spPr/>
+        <p:txBody>
+          <a:bodyPr/>
+          <a:lstStyle/>
+          <a:p>
+            <a:r>
+              <a:rPr lang="en-US" dirty="0"/>
+              <a:t>Significant Bacteria</a:t>
+            </a:r>
+          </a:p>
+        </p:txBody>
+      </p:sp>
+      <p:sp>
+        <p:nvSpPr>
+          <p:cNvPr id="3" name="Content Placeholder 2">
+            <a:extLst>
+              <a:ext uri="{FF2B5EF4-FFF2-40B4-BE49-F238E27FC236}">
+                <a16:creationId xmlns:a16="http://schemas.microsoft.com/office/drawing/2014/main" id="{168DDF37-A311-1899-6FF9-CD1AF7D08DDA}"/>
+              </a:ext>
+            </a:extLst>
+          </p:cNvPr>
+          <p:cNvSpPr>
+            <a:spLocks noGrp="1"/>
+          </p:cNvSpPr>
+          <p:nvPr>
+            <p:ph idx="1"/>
+          </p:nvPr>
+        </p:nvSpPr>
+        <p:spPr>
+          <a:xfrm>
+            <a:off x="838200" y="1825625"/>
+            <a:ext cx="3476946" cy="4351338"/>
+          </a:xfrm>
+        </p:spPr>
+        <p:txBody>
+          <a:bodyPr/>
+          <a:lstStyle/>
+          <a:p>
+            <a:r>
+              <a:rPr lang="en-US" dirty="0"/>
+              <a:t>Fusobacterium and both </a:t>
+            </a:r>
+            <a:r>
+              <a:rPr lang="en-US" dirty="0" err="1"/>
+              <a:t>Veillonella</a:t>
+            </a:r>
+            <a:r>
+              <a:rPr lang="en-US" dirty="0"/>
+              <a:t> are also abundant</a:t>
+            </a:r>
+          </a:p>
+          <a:p>
+            <a:r>
+              <a:rPr lang="en-US" dirty="0"/>
+              <a:t>Levene’s test indicated no violations of homogeneity of variance </a:t>
+            </a:r>
+          </a:p>
+          <a:p>
+            <a:pPr lvl="1"/>
+            <a:r>
+              <a:rPr lang="en-US" dirty="0"/>
+              <a:t>All p &gt; 0.29</a:t>
+            </a:r>
+          </a:p>
+        </p:txBody>
+      </p:sp>
       <p:pic>
         <p:nvPicPr>
-          <p:cNvPr id="5" name="Picture 4">
-            <a:extLst>
-              <a:ext uri="{FF2B5EF4-FFF2-40B4-BE49-F238E27FC236}">
-                <a16:creationId xmlns:a16="http://schemas.microsoft.com/office/drawing/2014/main" id="{ED97E560-B4B1-4189-6F0D-39B6AB89B68C}"/>
+          <p:cNvPr id="8" name="Picture 7">
+            <a:extLst>
+              <a:ext uri="{FF2B5EF4-FFF2-40B4-BE49-F238E27FC236}">
+                <a16:creationId xmlns:a16="http://schemas.microsoft.com/office/drawing/2014/main" id="{0BB5267D-E078-9D43-CDAA-C84F220F5DA6}"/>
               </a:ext>
             </a:extLst>
           </p:cNvPr>
@@ -13505,114 +12690,18 @@
         </p:blipFill>
         <p:spPr>
           <a:xfrm>
-            <a:off x="4251158" y="240631"/>
-            <a:ext cx="7940843" cy="6617369"/>
+            <a:off x="4225009" y="1325366"/>
+            <a:ext cx="7966991" cy="5532634"/>
           </a:xfrm>
           <a:prstGeom prst="rect">
             <a:avLst/>
           </a:prstGeom>
         </p:spPr>
       </p:pic>
-      <p:sp>
-        <p:nvSpPr>
-          <p:cNvPr id="3" name="Title 1">
-            <a:extLst>
-              <a:ext uri="{FF2B5EF4-FFF2-40B4-BE49-F238E27FC236}">
-                <a16:creationId xmlns:a16="http://schemas.microsoft.com/office/drawing/2014/main" id="{ABD36D77-5F96-4ECE-CCF2-B41BCAC2243E}"/>
-              </a:ext>
-            </a:extLst>
-          </p:cNvPr>
-          <p:cNvSpPr txBox="1">
-            <a:spLocks/>
-          </p:cNvSpPr>
-          <p:nvPr/>
-        </p:nvSpPr>
-        <p:spPr>
-          <a:xfrm>
-            <a:off x="533400" y="365125"/>
-            <a:ext cx="4038600" cy="1325563"/>
-          </a:xfrm>
-          <a:prstGeom prst="rect">
-            <a:avLst/>
-          </a:prstGeom>
-        </p:spPr>
-        <p:txBody>
-          <a:bodyPr vert="horz" lIns="91440" tIns="45720" rIns="91440" bIns="45720" rtlCol="0" anchor="ctr">
-            <a:normAutofit fontScale="92500"/>
-          </a:bodyPr>
-          <a:lstStyle>
-            <a:lvl1pPr algn="l" defTabSz="914400" rtl="0" eaLnBrk="1" latinLnBrk="0" hangingPunct="1">
-              <a:lnSpc>
-                <a:spcPct val="90000"/>
-              </a:lnSpc>
-              <a:spcBef>
-                <a:spcPct val="0"/>
-              </a:spcBef>
-              <a:buNone/>
-              <a:defRPr sz="4400" kern="1200">
-                <a:solidFill>
-                  <a:schemeClr val="tx1"/>
-                </a:solidFill>
-                <a:latin typeface="+mj-lt"/>
-                <a:ea typeface="+mj-ea"/>
-                <a:cs typeface="+mj-cs"/>
-              </a:defRPr>
-            </a:lvl1pPr>
-          </a:lstStyle>
-          <a:p>
-            <a:r>
-              <a:rPr lang="en-US" dirty="0"/>
-              <a:t>Clinically Relevant Proteins</a:t>
-            </a:r>
-          </a:p>
-        </p:txBody>
-      </p:sp>
-      <p:sp>
-        <p:nvSpPr>
-          <p:cNvPr id="4" name="Content Placeholder 2">
-            <a:extLst>
-              <a:ext uri="{FF2B5EF4-FFF2-40B4-BE49-F238E27FC236}">
-                <a16:creationId xmlns:a16="http://schemas.microsoft.com/office/drawing/2014/main" id="{DC195009-84BF-2DFE-479B-3ED2C85151C4}"/>
-              </a:ext>
-            </a:extLst>
-          </p:cNvPr>
-          <p:cNvSpPr>
-            <a:spLocks noGrp="1"/>
-          </p:cNvSpPr>
-          <p:nvPr>
-            <p:ph idx="1"/>
-          </p:nvPr>
-        </p:nvSpPr>
-        <p:spPr>
-          <a:xfrm>
-            <a:off x="533400" y="1825624"/>
-            <a:ext cx="3608370" cy="4667251"/>
-          </a:xfrm>
-        </p:spPr>
-        <p:txBody>
-          <a:bodyPr>
-            <a:normAutofit/>
-          </a:bodyPr>
-          <a:lstStyle/>
-          <a:p>
-            <a:r>
-              <a:rPr lang="en-US" dirty="0"/>
-              <a:t>Features of CF lung disease: elevated elastase, IL-1b, and HMG-1, alterations in MMP/TIMP balance</a:t>
-            </a:r>
-          </a:p>
-          <a:p>
-            <a:pPr lvl="1"/>
-            <a:r>
-              <a:rPr lang="en-US" dirty="0"/>
-              <a:t>Airway damage, impaired repair mechanisms, persistent inflammation</a:t>
-            </a:r>
-          </a:p>
-        </p:txBody>
-      </p:sp>
     </p:spTree>
     <p:extLst>
       <p:ext uri="{BB962C8B-B14F-4D97-AF65-F5344CB8AC3E}">
-        <p14:creationId xmlns:p14="http://schemas.microsoft.com/office/powerpoint/2010/main" val="1834493517"/>
+        <p14:creationId xmlns:p14="http://schemas.microsoft.com/office/powerpoint/2010/main" val="2225801808"/>
       </p:ext>
     </p:extLst>
   </p:cSld>
@@ -13639,6 +12728,168 @@
           <a:chExt cx="0" cy="0"/>
         </a:xfrm>
       </p:grpSpPr>
+      <p:pic>
+        <p:nvPicPr>
+          <p:cNvPr id="5" name="Picture 4">
+            <a:extLst>
+              <a:ext uri="{FF2B5EF4-FFF2-40B4-BE49-F238E27FC236}">
+                <a16:creationId xmlns:a16="http://schemas.microsoft.com/office/drawing/2014/main" id="{ED97E560-B4B1-4189-6F0D-39B6AB89B68C}"/>
+              </a:ext>
+            </a:extLst>
+          </p:cNvPr>
+          <p:cNvPicPr>
+            <a:picLocks noChangeAspect="1"/>
+          </p:cNvPicPr>
+          <p:nvPr/>
+        </p:nvPicPr>
+        <p:blipFill>
+          <a:blip r:embed="rId3">
+            <a:extLst>
+              <a:ext uri="{28A0092B-C50C-407E-A947-70E740481C1C}">
+                <a14:useLocalDpi xmlns:a14="http://schemas.microsoft.com/office/drawing/2010/main" val="0"/>
+              </a:ext>
+            </a:extLst>
+          </a:blip>
+          <a:stretch>
+            <a:fillRect/>
+          </a:stretch>
+        </p:blipFill>
+        <p:spPr>
+          <a:xfrm>
+            <a:off x="4251158" y="240631"/>
+            <a:ext cx="7940843" cy="6617369"/>
+          </a:xfrm>
+          <a:prstGeom prst="rect">
+            <a:avLst/>
+          </a:prstGeom>
+        </p:spPr>
+      </p:pic>
+      <p:sp>
+        <p:nvSpPr>
+          <p:cNvPr id="3" name="Title 1">
+            <a:extLst>
+              <a:ext uri="{FF2B5EF4-FFF2-40B4-BE49-F238E27FC236}">
+                <a16:creationId xmlns:a16="http://schemas.microsoft.com/office/drawing/2014/main" id="{ABD36D77-5F96-4ECE-CCF2-B41BCAC2243E}"/>
+              </a:ext>
+            </a:extLst>
+          </p:cNvPr>
+          <p:cNvSpPr txBox="1">
+            <a:spLocks/>
+          </p:cNvSpPr>
+          <p:nvPr/>
+        </p:nvSpPr>
+        <p:spPr>
+          <a:xfrm>
+            <a:off x="533400" y="365125"/>
+            <a:ext cx="4038600" cy="1325563"/>
+          </a:xfrm>
+          <a:prstGeom prst="rect">
+            <a:avLst/>
+          </a:prstGeom>
+        </p:spPr>
+        <p:txBody>
+          <a:bodyPr vert="horz" lIns="91440" tIns="45720" rIns="91440" bIns="45720" rtlCol="0" anchor="ctr">
+            <a:normAutofit fontScale="92500"/>
+          </a:bodyPr>
+          <a:lstStyle>
+            <a:lvl1pPr algn="l" defTabSz="914400" rtl="0" eaLnBrk="1" latinLnBrk="0" hangingPunct="1">
+              <a:lnSpc>
+                <a:spcPct val="90000"/>
+              </a:lnSpc>
+              <a:spcBef>
+                <a:spcPct val="0"/>
+              </a:spcBef>
+              <a:buNone/>
+              <a:defRPr sz="4400" kern="1200">
+                <a:solidFill>
+                  <a:schemeClr val="tx1"/>
+                </a:solidFill>
+                <a:latin typeface="+mj-lt"/>
+                <a:ea typeface="+mj-ea"/>
+                <a:cs typeface="+mj-cs"/>
+              </a:defRPr>
+            </a:lvl1pPr>
+          </a:lstStyle>
+          <a:p>
+            <a:r>
+              <a:rPr lang="en-US" dirty="0"/>
+              <a:t>Clinically Relevant Proteins</a:t>
+            </a:r>
+          </a:p>
+        </p:txBody>
+      </p:sp>
+      <p:sp>
+        <p:nvSpPr>
+          <p:cNvPr id="4" name="Content Placeholder 2">
+            <a:extLst>
+              <a:ext uri="{FF2B5EF4-FFF2-40B4-BE49-F238E27FC236}">
+                <a16:creationId xmlns:a16="http://schemas.microsoft.com/office/drawing/2014/main" id="{DC195009-84BF-2DFE-479B-3ED2C85151C4}"/>
+              </a:ext>
+            </a:extLst>
+          </p:cNvPr>
+          <p:cNvSpPr>
+            <a:spLocks noGrp="1"/>
+          </p:cNvSpPr>
+          <p:nvPr>
+            <p:ph idx="1"/>
+          </p:nvPr>
+        </p:nvSpPr>
+        <p:spPr>
+          <a:xfrm>
+            <a:off x="533400" y="1825624"/>
+            <a:ext cx="3608370" cy="4667251"/>
+          </a:xfrm>
+        </p:spPr>
+        <p:txBody>
+          <a:bodyPr>
+            <a:normAutofit/>
+          </a:bodyPr>
+          <a:lstStyle/>
+          <a:p>
+            <a:r>
+              <a:rPr lang="en-US" dirty="0"/>
+              <a:t>Features of CF lung disease: elevated elastase, IL-1b, and HMG-1, alterations in MMP/TIMP balance</a:t>
+            </a:r>
+          </a:p>
+          <a:p>
+            <a:pPr lvl="1"/>
+            <a:r>
+              <a:rPr lang="en-US" dirty="0"/>
+              <a:t>Airway damage, impaired repair mechanisms, persistent inflammation</a:t>
+            </a:r>
+          </a:p>
+        </p:txBody>
+      </p:sp>
+    </p:spTree>
+    <p:extLst>
+      <p:ext uri="{BB962C8B-B14F-4D97-AF65-F5344CB8AC3E}">
+        <p14:creationId xmlns:p14="http://schemas.microsoft.com/office/powerpoint/2010/main" val="1834493517"/>
+      </p:ext>
+    </p:extLst>
+  </p:cSld>
+  <p:clrMapOvr>
+    <a:masterClrMapping/>
+  </p:clrMapOvr>
+</p:sld>
+</file>
+
+<file path=ppt/slides/slide22.xml><?xml version="1.0" encoding="utf-8"?>
+<p:sld xmlns:a="http://schemas.openxmlformats.org/drawingml/2006/main" xmlns:r="http://schemas.openxmlformats.org/officeDocument/2006/relationships" xmlns:p="http://schemas.openxmlformats.org/presentationml/2006/main">
+  <p:cSld>
+    <p:spTree>
+      <p:nvGrpSpPr>
+        <p:cNvPr id="1" name=""/>
+        <p:cNvGrpSpPr/>
+        <p:nvPr/>
+      </p:nvGrpSpPr>
+      <p:grpSpPr>
+        <a:xfrm>
+          <a:off x="0" y="0"/>
+          <a:ext cx="0" cy="0"/>
+          <a:chOff x="0" y="0"/>
+          <a:chExt cx="0" cy="0"/>
+        </a:xfrm>
+      </p:grpSpPr>
       <p:sp>
         <p:nvSpPr>
           <p:cNvPr id="2" name="Title 1">
@@ -13825,7 +13076,7 @@
 </p:sld>
 </file>
 
-<file path=ppt/slides/slide22.xml><?xml version="1.0" encoding="utf-8"?>
+<file path=ppt/slides/slide23.xml><?xml version="1.0" encoding="utf-8"?>
 <p:sld xmlns:a="http://schemas.openxmlformats.org/drawingml/2006/main" xmlns:r="http://schemas.openxmlformats.org/officeDocument/2006/relationships" xmlns:p="http://schemas.openxmlformats.org/presentationml/2006/main">
   <p:cSld>
     <p:spTree>
@@ -15191,7 +14442,7 @@
 </p:sld>
 </file>
 
-<file path=ppt/slides/slide23.xml><?xml version="1.0" encoding="utf-8"?>
+<file path=ppt/slides/slide24.xml><?xml version="1.0" encoding="utf-8"?>
 <p:sld xmlns:a="http://schemas.openxmlformats.org/drawingml/2006/main" xmlns:r="http://schemas.openxmlformats.org/officeDocument/2006/relationships" xmlns:p="http://schemas.openxmlformats.org/presentationml/2006/main">
   <p:cSld>
     <p:spTree>
@@ -15523,7 +14774,7 @@
 </p:sld>
 </file>
 
-<file path=ppt/slides/slide24.xml><?xml version="1.0" encoding="utf-8"?>
+<file path=ppt/slides/slide25.xml><?xml version="1.0" encoding="utf-8"?>
 <p:sld xmlns:a="http://schemas.openxmlformats.org/drawingml/2006/main" xmlns:r="http://schemas.openxmlformats.org/officeDocument/2006/relationships" xmlns:p="http://schemas.openxmlformats.org/presentationml/2006/main">
   <p:cSld>
     <p:spTree>
@@ -15673,7 +14924,7 @@
 </p:sld>
 </file>
 
-<file path=ppt/slides/slide25.xml><?xml version="1.0" encoding="utf-8"?>
+<file path=ppt/slides/slide26.xml><?xml version="1.0" encoding="utf-8"?>
 <p:sld xmlns:a="http://schemas.openxmlformats.org/drawingml/2006/main" xmlns:r="http://schemas.openxmlformats.org/officeDocument/2006/relationships" xmlns:p="http://schemas.openxmlformats.org/presentationml/2006/main">
   <p:cSld>
     <p:spTree>
@@ -16408,126 +15659,6 @@
 </p:sld>
 </file>
 
-<file path=ppt/slides/slide26.xml><?xml version="1.0" encoding="utf-8"?>
-<p:sld xmlns:a="http://schemas.openxmlformats.org/drawingml/2006/main" xmlns:r="http://schemas.openxmlformats.org/officeDocument/2006/relationships" xmlns:p="http://schemas.openxmlformats.org/presentationml/2006/main">
-  <p:cSld>
-    <p:spTree>
-      <p:nvGrpSpPr>
-        <p:cNvPr id="1" name=""/>
-        <p:cNvGrpSpPr/>
-        <p:nvPr/>
-      </p:nvGrpSpPr>
-      <p:grpSpPr>
-        <a:xfrm>
-          <a:off x="0" y="0"/>
-          <a:ext cx="0" cy="0"/>
-          <a:chOff x="0" y="0"/>
-          <a:chExt cx="0" cy="0"/>
-        </a:xfrm>
-      </p:grpSpPr>
-      <p:sp>
-        <p:nvSpPr>
-          <p:cNvPr id="2" name="Title 1">
-            <a:extLst>
-              <a:ext uri="{FF2B5EF4-FFF2-40B4-BE49-F238E27FC236}">
-                <a16:creationId xmlns:a16="http://schemas.microsoft.com/office/drawing/2014/main" id="{F17D7232-81B8-A9EA-C66C-752884A5DA1A}"/>
-              </a:ext>
-            </a:extLst>
-          </p:cNvPr>
-          <p:cNvSpPr>
-            <a:spLocks noGrp="1"/>
-          </p:cNvSpPr>
-          <p:nvPr>
-            <p:ph type="title"/>
-          </p:nvPr>
-        </p:nvSpPr>
-        <p:spPr/>
-        <p:txBody>
-          <a:bodyPr/>
-          <a:lstStyle/>
-          <a:p>
-            <a:r>
-              <a:rPr lang="en-US" dirty="0"/>
-              <a:t>Connections to the Literature</a:t>
-            </a:r>
-          </a:p>
-        </p:txBody>
-      </p:sp>
-      <p:sp>
-        <p:nvSpPr>
-          <p:cNvPr id="3" name="Content Placeholder 2">
-            <a:extLst>
-              <a:ext uri="{FF2B5EF4-FFF2-40B4-BE49-F238E27FC236}">
-                <a16:creationId xmlns:a16="http://schemas.microsoft.com/office/drawing/2014/main" id="{3F6A726C-AAFE-13F7-5014-29C79FF32969}"/>
-              </a:ext>
-            </a:extLst>
-          </p:cNvPr>
-          <p:cNvSpPr>
-            <a:spLocks noGrp="1"/>
-          </p:cNvSpPr>
-          <p:nvPr>
-            <p:ph idx="1"/>
-          </p:nvPr>
-        </p:nvSpPr>
-        <p:spPr/>
-        <p:txBody>
-          <a:bodyPr>
-            <a:normAutofit/>
-          </a:bodyPr>
-          <a:lstStyle/>
-          <a:p>
-            <a:r>
-              <a:rPr lang="en-US" dirty="0"/>
-              <a:t>Prior studies propose underlying biological structure within clinically heterogeneous </a:t>
-            </a:r>
-            <a:r>
-              <a:rPr lang="en-US" dirty="0" err="1"/>
-              <a:t>PEx</a:t>
-            </a:r>
-            <a:endParaRPr lang="en-US" dirty="0"/>
-          </a:p>
-          <a:p>
-            <a:pPr lvl="1"/>
-            <a:r>
-              <a:rPr lang="en-US" dirty="0"/>
-              <a:t>Widder et al. identified distinct microbial phenotypes associated with treatment response</a:t>
-            </a:r>
-          </a:p>
-          <a:p>
-            <a:pPr lvl="2"/>
-            <a:r>
-              <a:rPr lang="en-US" dirty="0"/>
-              <a:t>Adult cohort, traditional CF pathogens</a:t>
-            </a:r>
-          </a:p>
-          <a:p>
-            <a:pPr lvl="2"/>
-            <a:r>
-              <a:rPr lang="en-US" dirty="0"/>
-              <a:t>Demonstrated biologically meaningful subgrouping</a:t>
-            </a:r>
-          </a:p>
-          <a:p>
-            <a:r>
-              <a:rPr lang="en-US" dirty="0"/>
-              <a:t>Together, findings suggest microbiome-host interaction patterns may be relevant across age groups, even with different dominant taxa</a:t>
-            </a:r>
-          </a:p>
-        </p:txBody>
-      </p:sp>
-    </p:spTree>
-    <p:extLst>
-      <p:ext uri="{BB962C8B-B14F-4D97-AF65-F5344CB8AC3E}">
-        <p14:creationId xmlns:p14="http://schemas.microsoft.com/office/powerpoint/2010/main" val="685597270"/>
-      </p:ext>
-    </p:extLst>
-  </p:cSld>
-  <p:clrMapOvr>
-    <a:masterClrMapping/>
-  </p:clrMapOvr>
-</p:sld>
-</file>
-
 <file path=ppt/slides/slide27.xml><?xml version="1.0" encoding="utf-8"?>
 <p:sld xmlns:a="http://schemas.openxmlformats.org/drawingml/2006/main" xmlns:r="http://schemas.openxmlformats.org/officeDocument/2006/relationships" xmlns:p="http://schemas.openxmlformats.org/presentationml/2006/main">
   <p:cSld>
@@ -16550,7 +15681,7 @@
           <p:cNvPr id="2" name="Title 1">
             <a:extLst>
               <a:ext uri="{FF2B5EF4-FFF2-40B4-BE49-F238E27FC236}">
-                <a16:creationId xmlns:a16="http://schemas.microsoft.com/office/drawing/2014/main" id="{F7370A1A-3BEA-D55F-8C29-2D404CFDF1FA}"/>
+                <a16:creationId xmlns:a16="http://schemas.microsoft.com/office/drawing/2014/main" id="{F17D7232-81B8-A9EA-C66C-752884A5DA1A}"/>
               </a:ext>
             </a:extLst>
           </p:cNvPr>
@@ -16568,7 +15699,7 @@
           <a:p>
             <a:r>
               <a:rPr lang="en-US" dirty="0"/>
-              <a:t>Limitations</a:t>
+              <a:t>Connections to the Literature</a:t>
             </a:r>
           </a:p>
         </p:txBody>
@@ -16578,7 +15709,7 @@
           <p:cNvPr id="3" name="Content Placeholder 2">
             <a:extLst>
               <a:ext uri="{FF2B5EF4-FFF2-40B4-BE49-F238E27FC236}">
-                <a16:creationId xmlns:a16="http://schemas.microsoft.com/office/drawing/2014/main" id="{3E37B686-DD44-AA29-A5F3-326530CE8FC5}"/>
+                <a16:creationId xmlns:a16="http://schemas.microsoft.com/office/drawing/2014/main" id="{3F6A726C-AAFE-13F7-5014-29C79FF32969}"/>
               </a:ext>
             </a:extLst>
           </p:cNvPr>
@@ -16591,59 +15722,46 @@
         </p:nvSpPr>
         <p:spPr/>
         <p:txBody>
-          <a:bodyPr/>
+          <a:bodyPr>
+            <a:normAutofit/>
+          </a:bodyPr>
           <a:lstStyle/>
           <a:p>
             <a:r>
               <a:rPr lang="en-US" dirty="0"/>
-              <a:t>Sample Size (N = 31; cost-prohibitive)</a:t>
-            </a:r>
-          </a:p>
-          <a:p>
-            <a:r>
-              <a:rPr lang="en-US" dirty="0"/>
-              <a:t>Proteomics from blood, not airway</a:t>
-            </a:r>
-          </a:p>
-          <a:p>
-            <a:r>
-              <a:rPr lang="en-US" dirty="0"/>
-              <a:t>Only looked at bacterial infections, not viral infections</a:t>
-            </a:r>
-          </a:p>
-          <a:p>
-            <a:r>
-              <a:rPr lang="en-US" dirty="0"/>
-              <a:t>Data collected before drug modulator therapies (2010-2012)</a:t>
-            </a:r>
-          </a:p>
-          <a:p>
-            <a:r>
-              <a:rPr lang="en-US" dirty="0"/>
-              <a:t>Distance Matrix (Euclidean)</a:t>
-            </a:r>
+              <a:t>Prior studies propose underlying biological structure within clinically heterogeneous </a:t>
+            </a:r>
+            <a:r>
+              <a:rPr lang="en-US" dirty="0" err="1"/>
+              <a:t>PEx</a:t>
+            </a:r>
+            <a:endParaRPr lang="en-US" dirty="0"/>
           </a:p>
           <a:p>
             <a:pPr lvl="1"/>
             <a:r>
               <a:rPr lang="en-US" dirty="0"/>
-              <a:t>Microbiome may benefit from ecological distance measures</a:t>
-            </a:r>
-          </a:p>
-          <a:p>
-            <a:r>
-              <a:rPr lang="en-US" i="1" dirty="0"/>
-              <a:t>a priori </a:t>
-            </a:r>
-            <a:r>
-              <a:rPr lang="en-US" dirty="0"/>
-              <a:t>specification of the number of clusters </a:t>
-            </a:r>
-          </a:p>
-          <a:p>
-            <a:r>
-              <a:rPr lang="en-US" dirty="0"/>
-              <a:t>Cluster assignments are sensitive to selected feature set</a:t>
+              <a:t>Widder et al. identified distinct microbial phenotypes associated with treatment response</a:t>
+            </a:r>
+          </a:p>
+          <a:p>
+            <a:pPr lvl="2"/>
+            <a:r>
+              <a:rPr lang="en-US" dirty="0"/>
+              <a:t>Adult cohort, traditional CF pathogens</a:t>
+            </a:r>
+          </a:p>
+          <a:p>
+            <a:pPr lvl="2"/>
+            <a:r>
+              <a:rPr lang="en-US" dirty="0"/>
+              <a:t>Demonstrated biologically meaningful subgrouping</a:t>
+            </a:r>
+          </a:p>
+          <a:p>
+            <a:r>
+              <a:rPr lang="en-US" dirty="0"/>
+              <a:t>Together, findings suggest microbiome-host interaction patterns may be relevant across age groups, even with different dominant taxa</a:t>
             </a:r>
           </a:p>
         </p:txBody>
@@ -16651,7 +15769,7 @@
     </p:spTree>
     <p:extLst>
       <p:ext uri="{BB962C8B-B14F-4D97-AF65-F5344CB8AC3E}">
-        <p14:creationId xmlns:p14="http://schemas.microsoft.com/office/powerpoint/2010/main" val="4251989772"/>
+        <p14:creationId xmlns:p14="http://schemas.microsoft.com/office/powerpoint/2010/main" val="685597270"/>
       </p:ext>
     </p:extLst>
   </p:cSld>
@@ -16683,7 +15801,7 @@
           <p:cNvPr id="2" name="Title 1">
             <a:extLst>
               <a:ext uri="{FF2B5EF4-FFF2-40B4-BE49-F238E27FC236}">
-                <a16:creationId xmlns:a16="http://schemas.microsoft.com/office/drawing/2014/main" id="{A5D695FB-6E7E-94A0-D31A-9C75D4A27C8A}"/>
+                <a16:creationId xmlns:a16="http://schemas.microsoft.com/office/drawing/2014/main" id="{F7370A1A-3BEA-D55F-8C29-2D404CFDF1FA}"/>
               </a:ext>
             </a:extLst>
           </p:cNvPr>
@@ -16701,7 +15819,7 @@
           <a:p>
             <a:r>
               <a:rPr lang="en-US" dirty="0"/>
-              <a:t>Future Directions</a:t>
+              <a:t>Limitations</a:t>
             </a:r>
           </a:p>
         </p:txBody>
@@ -16711,7 +15829,7 @@
           <p:cNvPr id="3" name="Content Placeholder 2">
             <a:extLst>
               <a:ext uri="{FF2B5EF4-FFF2-40B4-BE49-F238E27FC236}">
-                <a16:creationId xmlns:a16="http://schemas.microsoft.com/office/drawing/2014/main" id="{976EDABB-01CE-6F55-F454-88B3E7C8CB14}"/>
+                <a16:creationId xmlns:a16="http://schemas.microsoft.com/office/drawing/2014/main" id="{3E37B686-DD44-AA29-A5F3-326530CE8FC5}"/>
               </a:ext>
             </a:extLst>
           </p:cNvPr>
@@ -16729,68 +15847,54 @@
           <a:p>
             <a:r>
               <a:rPr lang="en-US" dirty="0"/>
-              <a:t>Longitudinal multi-</a:t>
-            </a:r>
-            <a:r>
-              <a:rPr lang="en-US" dirty="0" err="1"/>
-              <a:t>omic</a:t>
-            </a:r>
-            <a:r>
-              <a:rPr lang="en-US" dirty="0"/>
-              <a:t> analysis</a:t>
-            </a:r>
-          </a:p>
-          <a:p>
-            <a:r>
-              <a:rPr lang="en-US" dirty="0"/>
-              <a:t>Alternative distance matrices </a:t>
-            </a:r>
-          </a:p>
-          <a:p>
-            <a:r>
-              <a:rPr lang="en-US" dirty="0"/>
-              <a:t>Comparing multi-</a:t>
-            </a:r>
-            <a:r>
-              <a:rPr lang="en-US" dirty="0" err="1"/>
-              <a:t>omic</a:t>
-            </a:r>
-            <a:r>
-              <a:rPr lang="en-US" dirty="0"/>
-              <a:t> clustering algorithms </a:t>
-            </a:r>
-          </a:p>
-          <a:p>
-            <a:r>
-              <a:rPr lang="en-US" dirty="0"/>
-              <a:t>Applying clusters to a different cohort</a:t>
+              <a:t>Sample Size (N = 31; cost-prohibitive)</a:t>
+            </a:r>
+          </a:p>
+          <a:p>
+            <a:r>
+              <a:rPr lang="en-US" dirty="0"/>
+              <a:t>Proteomics from blood, not airway</a:t>
+            </a:r>
+          </a:p>
+          <a:p>
+            <a:r>
+              <a:rPr lang="en-US" dirty="0"/>
+              <a:t>Only looked at bacterial infections, not viral infections</a:t>
+            </a:r>
+          </a:p>
+          <a:p>
+            <a:r>
+              <a:rPr lang="en-US" dirty="0"/>
+              <a:t>Data collected before drug modulator therapies (2010-2012)</a:t>
+            </a:r>
+          </a:p>
+          <a:p>
+            <a:r>
+              <a:rPr lang="en-US" dirty="0"/>
+              <a:t>Distance Matrix (Euclidean)</a:t>
             </a:r>
           </a:p>
           <a:p>
             <a:pPr lvl="1"/>
             <a:r>
               <a:rPr lang="en-US" dirty="0"/>
-              <a:t>Can you apply single-</a:t>
-            </a:r>
-            <a:r>
-              <a:rPr lang="en-US" dirty="0" err="1"/>
-              <a:t>omic</a:t>
-            </a:r>
-            <a:r>
-              <a:rPr lang="en-US" dirty="0"/>
-              <a:t> individuals to one of these clusters?</a:t>
-            </a:r>
-          </a:p>
-          <a:p>
-            <a:r>
-              <a:rPr lang="en-US" dirty="0"/>
-              <a:t>Quantify clustering stability based on feature sets</a:t>
-            </a:r>
-          </a:p>
-          <a:p>
-            <a:r>
-              <a:rPr lang="en-US" dirty="0"/>
-              <a:t>What is happening with those few individuals who are always in a separate cluster?</a:t>
+              <a:t>Microbiome may benefit from ecological distance measures</a:t>
+            </a:r>
+          </a:p>
+          <a:p>
+            <a:r>
+              <a:rPr lang="en-US" i="1" dirty="0"/>
+              <a:t>a priori </a:t>
+            </a:r>
+            <a:r>
+              <a:rPr lang="en-US" dirty="0"/>
+              <a:t>specification of the number of clusters </a:t>
+            </a:r>
+          </a:p>
+          <a:p>
+            <a:r>
+              <a:rPr lang="en-US" dirty="0"/>
+              <a:t>Cluster assignments are sensitive to selected feature set</a:t>
             </a:r>
           </a:p>
         </p:txBody>
@@ -16798,7 +15902,7 @@
     </p:spTree>
     <p:extLst>
       <p:ext uri="{BB962C8B-B14F-4D97-AF65-F5344CB8AC3E}">
-        <p14:creationId xmlns:p14="http://schemas.microsoft.com/office/powerpoint/2010/main" val="310211245"/>
+        <p14:creationId xmlns:p14="http://schemas.microsoft.com/office/powerpoint/2010/main" val="4251989772"/>
       </p:ext>
     </p:extLst>
   </p:cSld>
@@ -16830,7 +15934,7 @@
           <p:cNvPr id="2" name="Title 1">
             <a:extLst>
               <a:ext uri="{FF2B5EF4-FFF2-40B4-BE49-F238E27FC236}">
-                <a16:creationId xmlns:a16="http://schemas.microsoft.com/office/drawing/2014/main" id="{F97A00FC-BC56-C555-7273-406165F3FDA4}"/>
+                <a16:creationId xmlns:a16="http://schemas.microsoft.com/office/drawing/2014/main" id="{A5D695FB-6E7E-94A0-D31A-9C75D4A27C8A}"/>
               </a:ext>
             </a:extLst>
           </p:cNvPr>
@@ -16848,7 +15952,7 @@
           <a:p>
             <a:r>
               <a:rPr lang="en-US" dirty="0"/>
-              <a:t>Conclusion</a:t>
+              <a:t>Future Directions</a:t>
             </a:r>
           </a:p>
         </p:txBody>
@@ -16858,7 +15962,7 @@
           <p:cNvPr id="3" name="Content Placeholder 2">
             <a:extLst>
               <a:ext uri="{FF2B5EF4-FFF2-40B4-BE49-F238E27FC236}">
-                <a16:creationId xmlns:a16="http://schemas.microsoft.com/office/drawing/2014/main" id="{56DAA81A-6F51-3AC6-F1D7-23A457D561E6}"/>
+                <a16:creationId xmlns:a16="http://schemas.microsoft.com/office/drawing/2014/main" id="{976EDABB-01CE-6F55-F454-88B3E7C8CB14}"/>
               </a:ext>
             </a:extLst>
           </p:cNvPr>
@@ -16871,22 +15975,12 @@
         </p:nvSpPr>
         <p:spPr/>
         <p:txBody>
-          <a:bodyPr>
-            <a:normAutofit/>
-          </a:bodyPr>
+          <a:bodyPr/>
           <a:lstStyle/>
           <a:p>
             <a:r>
               <a:rPr lang="en-US" dirty="0"/>
-              <a:t>Integrated clustering reveals distinct </a:t>
-            </a:r>
-            <a:r>
-              <a:rPr lang="en-US" dirty="0" err="1"/>
-              <a:t>PEx</a:t>
-            </a:r>
-            <a:r>
-              <a:rPr lang="en-US" dirty="0"/>
-              <a:t> subgroups not apparent from single-</a:t>
+              <a:t>Longitudinal multi-</a:t>
             </a:r>
             <a:r>
               <a:rPr lang="en-US" dirty="0" err="1"/>
@@ -16894,13 +15988,19 @@
             </a:r>
             <a:r>
               <a:rPr lang="en-US" dirty="0"/>
-              <a:t> approaches</a:t>
-            </a:r>
-          </a:p>
-          <a:p>
-            <a:r>
-              <a:rPr lang="en-US" dirty="0"/>
-              <a:t>Flexible, multi-</a:t>
+              <a:t> analysis</a:t>
+            </a:r>
+          </a:p>
+          <a:p>
+            <a:r>
+              <a:rPr lang="en-US" dirty="0"/>
+              <a:t>Alternative distance matrices </a:t>
+            </a:r>
+          </a:p>
+          <a:p>
+            <a:r>
+              <a:rPr lang="en-US" dirty="0"/>
+              <a:t>Comparing multi-</a:t>
             </a:r>
             <a:r>
               <a:rPr lang="en-US" dirty="0" err="1"/>
@@ -16908,36 +16008,40 @@
             </a:r>
             <a:r>
               <a:rPr lang="en-US" dirty="0"/>
-              <a:t> integration frameworks are needed to reflect biological complexity</a:t>
-            </a:r>
-          </a:p>
-          <a:p>
-            <a:r>
-              <a:rPr lang="en-US" dirty="0"/>
-              <a:t>Findings reinforce that CF </a:t>
+              <a:t> clustering algorithms </a:t>
+            </a:r>
+          </a:p>
+          <a:p>
+            <a:r>
+              <a:rPr lang="en-US" dirty="0"/>
+              <a:t>Applying clusters to a different cohort</a:t>
+            </a:r>
+          </a:p>
+          <a:p>
+            <a:pPr lvl="1"/>
+            <a:r>
+              <a:rPr lang="en-US" dirty="0"/>
+              <a:t>Can you apply single-</a:t>
             </a:r>
             <a:r>
               <a:rPr lang="en-US" dirty="0" err="1"/>
-              <a:t>PEx</a:t>
-            </a:r>
-            <a:r>
-              <a:rPr lang="en-US" dirty="0"/>
-              <a:t> are biologically heterogeneous</a:t>
-            </a:r>
-          </a:p>
-          <a:p>
-            <a:pPr lvl="1"/>
-            <a:r>
-              <a:rPr lang="en-US" dirty="0"/>
-              <a:t>Multi-omics approaches may help define clinically relevant </a:t>
-            </a:r>
-            <a:r>
-              <a:rPr lang="en-US" dirty="0" err="1"/>
-              <a:t>PEx</a:t>
-            </a:r>
-            <a:r>
-              <a:rPr lang="en-US" dirty="0"/>
-              <a:t> subtypes and explain variability in treatment response</a:t>
+              <a:t>omic</a:t>
+            </a:r>
+            <a:r>
+              <a:rPr lang="en-US" dirty="0"/>
+              <a:t> individuals to one of these clusters?</a:t>
+            </a:r>
+          </a:p>
+          <a:p>
+            <a:r>
+              <a:rPr lang="en-US" dirty="0"/>
+              <a:t>Quantify clustering stability based on feature sets</a:t>
+            </a:r>
+          </a:p>
+          <a:p>
+            <a:r>
+              <a:rPr lang="en-US" dirty="0"/>
+              <a:t>What is happening with those few individuals who are always in a separate cluster?</a:t>
             </a:r>
           </a:p>
         </p:txBody>
@@ -16945,7 +16049,7 @@
     </p:spTree>
     <p:extLst>
       <p:ext uri="{BB962C8B-B14F-4D97-AF65-F5344CB8AC3E}">
-        <p14:creationId xmlns:p14="http://schemas.microsoft.com/office/powerpoint/2010/main" val="2863867334"/>
+        <p14:creationId xmlns:p14="http://schemas.microsoft.com/office/powerpoint/2010/main" val="310211245"/>
       </p:ext>
     </p:extLst>
   </p:cSld>
@@ -17086,6 +16190,153 @@
           <a:chExt cx="0" cy="0"/>
         </a:xfrm>
       </p:grpSpPr>
+      <p:sp>
+        <p:nvSpPr>
+          <p:cNvPr id="2" name="Title 1">
+            <a:extLst>
+              <a:ext uri="{FF2B5EF4-FFF2-40B4-BE49-F238E27FC236}">
+                <a16:creationId xmlns:a16="http://schemas.microsoft.com/office/drawing/2014/main" id="{F97A00FC-BC56-C555-7273-406165F3FDA4}"/>
+              </a:ext>
+            </a:extLst>
+          </p:cNvPr>
+          <p:cNvSpPr>
+            <a:spLocks noGrp="1"/>
+          </p:cNvSpPr>
+          <p:nvPr>
+            <p:ph type="title"/>
+          </p:nvPr>
+        </p:nvSpPr>
+        <p:spPr/>
+        <p:txBody>
+          <a:bodyPr/>
+          <a:lstStyle/>
+          <a:p>
+            <a:r>
+              <a:rPr lang="en-US" dirty="0"/>
+              <a:t>Conclusion</a:t>
+            </a:r>
+          </a:p>
+        </p:txBody>
+      </p:sp>
+      <p:sp>
+        <p:nvSpPr>
+          <p:cNvPr id="3" name="Content Placeholder 2">
+            <a:extLst>
+              <a:ext uri="{FF2B5EF4-FFF2-40B4-BE49-F238E27FC236}">
+                <a16:creationId xmlns:a16="http://schemas.microsoft.com/office/drawing/2014/main" id="{56DAA81A-6F51-3AC6-F1D7-23A457D561E6}"/>
+              </a:ext>
+            </a:extLst>
+          </p:cNvPr>
+          <p:cNvSpPr>
+            <a:spLocks noGrp="1"/>
+          </p:cNvSpPr>
+          <p:nvPr>
+            <p:ph idx="1"/>
+          </p:nvPr>
+        </p:nvSpPr>
+        <p:spPr/>
+        <p:txBody>
+          <a:bodyPr>
+            <a:normAutofit/>
+          </a:bodyPr>
+          <a:lstStyle/>
+          <a:p>
+            <a:r>
+              <a:rPr lang="en-US" dirty="0"/>
+              <a:t>Integrated clustering reveals distinct </a:t>
+            </a:r>
+            <a:r>
+              <a:rPr lang="en-US" dirty="0" err="1"/>
+              <a:t>PEx</a:t>
+            </a:r>
+            <a:r>
+              <a:rPr lang="en-US" dirty="0"/>
+              <a:t> subgroups not apparent from single-</a:t>
+            </a:r>
+            <a:r>
+              <a:rPr lang="en-US" dirty="0" err="1"/>
+              <a:t>omic</a:t>
+            </a:r>
+            <a:r>
+              <a:rPr lang="en-US" dirty="0"/>
+              <a:t> approaches</a:t>
+            </a:r>
+          </a:p>
+          <a:p>
+            <a:r>
+              <a:rPr lang="en-US" dirty="0"/>
+              <a:t>Flexible, multi-</a:t>
+            </a:r>
+            <a:r>
+              <a:rPr lang="en-US" dirty="0" err="1"/>
+              <a:t>omic</a:t>
+            </a:r>
+            <a:r>
+              <a:rPr lang="en-US" dirty="0"/>
+              <a:t> integration frameworks are needed to reflect biological complexity</a:t>
+            </a:r>
+          </a:p>
+          <a:p>
+            <a:r>
+              <a:rPr lang="en-US" dirty="0"/>
+              <a:t>Findings reinforce that CF </a:t>
+            </a:r>
+            <a:r>
+              <a:rPr lang="en-US" dirty="0" err="1"/>
+              <a:t>PEx</a:t>
+            </a:r>
+            <a:r>
+              <a:rPr lang="en-US" dirty="0"/>
+              <a:t> are biologically heterogeneous</a:t>
+            </a:r>
+          </a:p>
+          <a:p>
+            <a:pPr lvl="1"/>
+            <a:r>
+              <a:rPr lang="en-US" dirty="0"/>
+              <a:t>Multi-omics approaches may help define clinically relevant </a:t>
+            </a:r>
+            <a:r>
+              <a:rPr lang="en-US" dirty="0" err="1"/>
+              <a:t>PEx</a:t>
+            </a:r>
+            <a:r>
+              <a:rPr lang="en-US" dirty="0"/>
+              <a:t> subtypes and explain variability in treatment response</a:t>
+            </a:r>
+          </a:p>
+        </p:txBody>
+      </p:sp>
+    </p:spTree>
+    <p:extLst>
+      <p:ext uri="{BB962C8B-B14F-4D97-AF65-F5344CB8AC3E}">
+        <p14:creationId xmlns:p14="http://schemas.microsoft.com/office/powerpoint/2010/main" val="2863867334"/>
+      </p:ext>
+    </p:extLst>
+  </p:cSld>
+  <p:clrMapOvr>
+    <a:masterClrMapping/>
+  </p:clrMapOvr>
+</p:sld>
+</file>
+
+<file path=ppt/slides/slide31.xml><?xml version="1.0" encoding="utf-8"?>
+<p:sld xmlns:a="http://schemas.openxmlformats.org/drawingml/2006/main" xmlns:r="http://schemas.openxmlformats.org/officeDocument/2006/relationships" xmlns:p="http://schemas.openxmlformats.org/presentationml/2006/main">
+  <p:cSld>
+    <p:spTree>
+      <p:nvGrpSpPr>
+        <p:cNvPr id="1" name=""/>
+        <p:cNvGrpSpPr/>
+        <p:nvPr/>
+      </p:nvGrpSpPr>
+      <p:grpSpPr>
+        <a:xfrm>
+          <a:off x="0" y="0"/>
+          <a:ext cx="0" cy="0"/>
+          <a:chOff x="0" y="0"/>
+          <a:chExt cx="0" cy="0"/>
+        </a:xfrm>
+      </p:grpSpPr>
       <p:pic>
         <p:nvPicPr>
           <p:cNvPr id="1028" name="Picture 4" descr="bionic-vision.org | Institutions | University of Colorado Anschutz Medical  Campus">
@@ -17191,7 +16442,7 @@
           <a:p>
             <a:r>
               <a:rPr lang="en-US" dirty="0"/>
-              <a:t>Committee</a:t>
+              <a:t>Thesis Committee</a:t>
             </a:r>
           </a:p>
           <a:p>
@@ -17339,64 +16590,6 @@
 </p:sld>
 </file>
 
-<file path=ppt/slides/slide31.xml><?xml version="1.0" encoding="utf-8"?>
-<p:sld xmlns:a="http://schemas.openxmlformats.org/drawingml/2006/main" xmlns:r="http://schemas.openxmlformats.org/officeDocument/2006/relationships" xmlns:p="http://schemas.openxmlformats.org/presentationml/2006/main">
-  <p:cSld>
-    <p:spTree>
-      <p:nvGrpSpPr>
-        <p:cNvPr id="1" name=""/>
-        <p:cNvGrpSpPr/>
-        <p:nvPr/>
-      </p:nvGrpSpPr>
-      <p:grpSpPr>
-        <a:xfrm>
-          <a:off x="0" y="0"/>
-          <a:ext cx="0" cy="0"/>
-          <a:chOff x="0" y="0"/>
-          <a:chExt cx="0" cy="0"/>
-        </a:xfrm>
-      </p:grpSpPr>
-      <p:sp>
-        <p:nvSpPr>
-          <p:cNvPr id="2" name="Title 1">
-            <a:extLst>
-              <a:ext uri="{FF2B5EF4-FFF2-40B4-BE49-F238E27FC236}">
-                <a16:creationId xmlns:a16="http://schemas.microsoft.com/office/drawing/2014/main" id="{A77D619A-8BD7-8E04-2A30-B212DBE631CE}"/>
-              </a:ext>
-            </a:extLst>
-          </p:cNvPr>
-          <p:cNvSpPr>
-            <a:spLocks noGrp="1"/>
-          </p:cNvSpPr>
-          <p:nvPr>
-            <p:ph type="ctrTitle"/>
-          </p:nvPr>
-        </p:nvSpPr>
-        <p:spPr/>
-        <p:txBody>
-          <a:bodyPr/>
-          <a:lstStyle/>
-          <a:p>
-            <a:r>
-              <a:rPr lang="en-US" dirty="0"/>
-              <a:t>Questions?</a:t>
-            </a:r>
-          </a:p>
-        </p:txBody>
-      </p:sp>
-    </p:spTree>
-    <p:extLst>
-      <p:ext uri="{BB962C8B-B14F-4D97-AF65-F5344CB8AC3E}">
-        <p14:creationId xmlns:p14="http://schemas.microsoft.com/office/powerpoint/2010/main" val="1798288789"/>
-      </p:ext>
-    </p:extLst>
-  </p:cSld>
-  <p:clrMapOvr>
-    <a:masterClrMapping/>
-  </p:clrMapOvr>
-</p:sld>
-</file>
-
 <file path=ppt/slides/slide32.xml><?xml version="1.0" encoding="utf-8"?>
 <p:sld xmlns:a="http://schemas.openxmlformats.org/drawingml/2006/main" xmlns:r="http://schemas.openxmlformats.org/officeDocument/2006/relationships" xmlns:p="http://schemas.openxmlformats.org/presentationml/2006/main">
   <p:cSld>
@@ -17419,7 +16612,7 @@
           <p:cNvPr id="2" name="Title 1">
             <a:extLst>
               <a:ext uri="{FF2B5EF4-FFF2-40B4-BE49-F238E27FC236}">
-                <a16:creationId xmlns:a16="http://schemas.microsoft.com/office/drawing/2014/main" id="{4EAD584D-38E7-EEDE-74BC-0AF88F3B8F21}"/>
+                <a16:creationId xmlns:a16="http://schemas.microsoft.com/office/drawing/2014/main" id="{A77D619A-8BD7-8E04-2A30-B212DBE631CE}"/>
               </a:ext>
             </a:extLst>
           </p:cNvPr>
@@ -17437,7 +16630,7 @@
           <a:p>
             <a:r>
               <a:rPr lang="en-US" dirty="0"/>
-              <a:t>Appendix</a:t>
+              <a:t>Questions?</a:t>
             </a:r>
           </a:p>
         </p:txBody>
@@ -17445,7 +16638,7 @@
     </p:spTree>
     <p:extLst>
       <p:ext uri="{BB962C8B-B14F-4D97-AF65-F5344CB8AC3E}">
-        <p14:creationId xmlns:p14="http://schemas.microsoft.com/office/powerpoint/2010/main" val="128874119"/>
+        <p14:creationId xmlns:p14="http://schemas.microsoft.com/office/powerpoint/2010/main" val="1798288789"/>
       </p:ext>
     </p:extLst>
   </p:cSld>
@@ -17477,7 +16670,7 @@
           <p:cNvPr id="2" name="Title 1">
             <a:extLst>
               <a:ext uri="{FF2B5EF4-FFF2-40B4-BE49-F238E27FC236}">
-                <a16:creationId xmlns:a16="http://schemas.microsoft.com/office/drawing/2014/main" id="{6F607868-686B-478B-E668-92EAA112ABB8}"/>
+                <a16:creationId xmlns:a16="http://schemas.microsoft.com/office/drawing/2014/main" id="{4EAD584D-38E7-EEDE-74BC-0AF88F3B8F21}"/>
               </a:ext>
             </a:extLst>
           </p:cNvPr>
@@ -17485,7 +16678,7 @@
             <a:spLocks noGrp="1"/>
           </p:cNvSpPr>
           <p:nvPr>
-            <p:ph type="title"/>
+            <p:ph type="ctrTitle"/>
           </p:nvPr>
         </p:nvSpPr>
         <p:spPr/>
@@ -17495,102 +16688,7 @@
           <a:p>
             <a:r>
               <a:rPr lang="en-US" dirty="0"/>
-              <a:t>Data Adjustments	</a:t>
-            </a:r>
-          </a:p>
-        </p:txBody>
-      </p:sp>
-      <p:sp>
-        <p:nvSpPr>
-          <p:cNvPr id="3" name="Content Placeholder 2">
-            <a:extLst>
-              <a:ext uri="{FF2B5EF4-FFF2-40B4-BE49-F238E27FC236}">
-                <a16:creationId xmlns:a16="http://schemas.microsoft.com/office/drawing/2014/main" id="{DF953787-BC92-00F2-7FA7-0A71CDFD2778}"/>
-              </a:ext>
-            </a:extLst>
-          </p:cNvPr>
-          <p:cNvSpPr>
-            <a:spLocks noGrp="1"/>
-          </p:cNvSpPr>
-          <p:nvPr>
-            <p:ph idx="1"/>
-          </p:nvPr>
-        </p:nvSpPr>
-        <p:spPr/>
-        <p:txBody>
-          <a:bodyPr/>
-          <a:lstStyle/>
-          <a:p>
-            <a:r>
-              <a:rPr lang="en-US" dirty="0"/>
-              <a:t>Microbiome data</a:t>
-            </a:r>
-          </a:p>
-          <a:p>
-            <a:pPr lvl="1"/>
-            <a:r>
-              <a:rPr lang="en-US" dirty="0"/>
-              <a:t>Combined bacterial taxa</a:t>
-            </a:r>
-          </a:p>
-          <a:p>
-            <a:pPr lvl="2"/>
-            <a:r>
-              <a:rPr lang="en-US" dirty="0"/>
-              <a:t>Pseudomonas</a:t>
-            </a:r>
-          </a:p>
-          <a:p>
-            <a:pPr lvl="2"/>
-            <a:r>
-              <a:rPr lang="en-US" dirty="0"/>
-              <a:t>May need to combine: </a:t>
-            </a:r>
-            <a:r>
-              <a:rPr lang="en-US" dirty="0" err="1"/>
-              <a:t>Veillonella</a:t>
-            </a:r>
-            <a:r>
-              <a:rPr lang="en-US" dirty="0"/>
-              <a:t>, Fusobacterium </a:t>
-            </a:r>
-          </a:p>
-          <a:p>
-            <a:pPr lvl="2"/>
-            <a:endParaRPr lang="en-US" dirty="0"/>
-          </a:p>
-          <a:p>
-            <a:r>
-              <a:rPr lang="en-US" dirty="0"/>
-              <a:t>Proteome data</a:t>
-            </a:r>
-          </a:p>
-          <a:p>
-            <a:pPr lvl="1"/>
-            <a:r>
-              <a:rPr lang="en-US" dirty="0"/>
-              <a:t>Removed 106 header rows</a:t>
-            </a:r>
-          </a:p>
-          <a:p>
-            <a:pPr lvl="1"/>
-            <a:r>
-              <a:rPr lang="en-US" dirty="0"/>
-              <a:t>Identified extraneous commas present in txt file</a:t>
-            </a:r>
-          </a:p>
-          <a:p>
-            <a:pPr lvl="1"/>
-            <a:r>
-              <a:rPr lang="en-US" dirty="0"/>
-              <a:t>Created unique identifier as some targets had the same name</a:t>
-            </a:r>
-          </a:p>
-          <a:p>
-            <a:pPr lvl="2"/>
-            <a:r>
-              <a:rPr lang="en-US" dirty="0"/>
-              <a:t>Removed proteins with the same target name when no additional information was  available to distinguish between them</a:t>
+              <a:t>Appendix</a:t>
             </a:r>
           </a:p>
         </p:txBody>
@@ -17598,7 +16696,7 @@
     </p:spTree>
     <p:extLst>
       <p:ext uri="{BB962C8B-B14F-4D97-AF65-F5344CB8AC3E}">
-        <p14:creationId xmlns:p14="http://schemas.microsoft.com/office/powerpoint/2010/main" val="4275891351"/>
+        <p14:creationId xmlns:p14="http://schemas.microsoft.com/office/powerpoint/2010/main" val="128874119"/>
       </p:ext>
     </p:extLst>
   </p:cSld>
@@ -17630,6 +16728,159 @@
           <p:cNvPr id="2" name="Title 1">
             <a:extLst>
               <a:ext uri="{FF2B5EF4-FFF2-40B4-BE49-F238E27FC236}">
+                <a16:creationId xmlns:a16="http://schemas.microsoft.com/office/drawing/2014/main" id="{6F607868-686B-478B-E668-92EAA112ABB8}"/>
+              </a:ext>
+            </a:extLst>
+          </p:cNvPr>
+          <p:cNvSpPr>
+            <a:spLocks noGrp="1"/>
+          </p:cNvSpPr>
+          <p:nvPr>
+            <p:ph type="title"/>
+          </p:nvPr>
+        </p:nvSpPr>
+        <p:spPr/>
+        <p:txBody>
+          <a:bodyPr/>
+          <a:lstStyle/>
+          <a:p>
+            <a:r>
+              <a:rPr lang="en-US" dirty="0"/>
+              <a:t>Data Adjustments	</a:t>
+            </a:r>
+          </a:p>
+        </p:txBody>
+      </p:sp>
+      <p:sp>
+        <p:nvSpPr>
+          <p:cNvPr id="3" name="Content Placeholder 2">
+            <a:extLst>
+              <a:ext uri="{FF2B5EF4-FFF2-40B4-BE49-F238E27FC236}">
+                <a16:creationId xmlns:a16="http://schemas.microsoft.com/office/drawing/2014/main" id="{DF953787-BC92-00F2-7FA7-0A71CDFD2778}"/>
+              </a:ext>
+            </a:extLst>
+          </p:cNvPr>
+          <p:cNvSpPr>
+            <a:spLocks noGrp="1"/>
+          </p:cNvSpPr>
+          <p:nvPr>
+            <p:ph idx="1"/>
+          </p:nvPr>
+        </p:nvSpPr>
+        <p:spPr/>
+        <p:txBody>
+          <a:bodyPr/>
+          <a:lstStyle/>
+          <a:p>
+            <a:r>
+              <a:rPr lang="en-US" dirty="0"/>
+              <a:t>Microbiome data</a:t>
+            </a:r>
+          </a:p>
+          <a:p>
+            <a:pPr lvl="1"/>
+            <a:r>
+              <a:rPr lang="en-US" dirty="0"/>
+              <a:t>Combined bacterial taxa</a:t>
+            </a:r>
+          </a:p>
+          <a:p>
+            <a:pPr lvl="2"/>
+            <a:r>
+              <a:rPr lang="en-US" dirty="0"/>
+              <a:t>Pseudomonas</a:t>
+            </a:r>
+          </a:p>
+          <a:p>
+            <a:pPr lvl="2"/>
+            <a:r>
+              <a:rPr lang="en-US" dirty="0"/>
+              <a:t>May need to combine: </a:t>
+            </a:r>
+            <a:r>
+              <a:rPr lang="en-US" dirty="0" err="1"/>
+              <a:t>Veillonella</a:t>
+            </a:r>
+            <a:r>
+              <a:rPr lang="en-US" dirty="0"/>
+              <a:t>, Fusobacterium </a:t>
+            </a:r>
+          </a:p>
+          <a:p>
+            <a:pPr lvl="2"/>
+            <a:endParaRPr lang="en-US" dirty="0"/>
+          </a:p>
+          <a:p>
+            <a:r>
+              <a:rPr lang="en-US" dirty="0"/>
+              <a:t>Proteome data</a:t>
+            </a:r>
+          </a:p>
+          <a:p>
+            <a:pPr lvl="1"/>
+            <a:r>
+              <a:rPr lang="en-US" dirty="0"/>
+              <a:t>Removed 106 header rows</a:t>
+            </a:r>
+          </a:p>
+          <a:p>
+            <a:pPr lvl="1"/>
+            <a:r>
+              <a:rPr lang="en-US" dirty="0"/>
+              <a:t>Identified extraneous commas present in txt file</a:t>
+            </a:r>
+          </a:p>
+          <a:p>
+            <a:pPr lvl="1"/>
+            <a:r>
+              <a:rPr lang="en-US" dirty="0"/>
+              <a:t>Created unique identifier as some targets had the same name</a:t>
+            </a:r>
+          </a:p>
+          <a:p>
+            <a:pPr lvl="2"/>
+            <a:r>
+              <a:rPr lang="en-US" dirty="0"/>
+              <a:t>Removed proteins with the same target name when no additional information was  available to distinguish between them</a:t>
+            </a:r>
+          </a:p>
+        </p:txBody>
+      </p:sp>
+    </p:spTree>
+    <p:extLst>
+      <p:ext uri="{BB962C8B-B14F-4D97-AF65-F5344CB8AC3E}">
+        <p14:creationId xmlns:p14="http://schemas.microsoft.com/office/powerpoint/2010/main" val="4275891351"/>
+      </p:ext>
+    </p:extLst>
+  </p:cSld>
+  <p:clrMapOvr>
+    <a:masterClrMapping/>
+  </p:clrMapOvr>
+</p:sld>
+</file>
+
+<file path=ppt/slides/slide35.xml><?xml version="1.0" encoding="utf-8"?>
+<p:sld xmlns:a="http://schemas.openxmlformats.org/drawingml/2006/main" xmlns:r="http://schemas.openxmlformats.org/officeDocument/2006/relationships" xmlns:p="http://schemas.openxmlformats.org/presentationml/2006/main">
+  <p:cSld>
+    <p:spTree>
+      <p:nvGrpSpPr>
+        <p:cNvPr id="1" name=""/>
+        <p:cNvGrpSpPr/>
+        <p:nvPr/>
+      </p:nvGrpSpPr>
+      <p:grpSpPr>
+        <a:xfrm>
+          <a:off x="0" y="0"/>
+          <a:ext cx="0" cy="0"/>
+          <a:chOff x="0" y="0"/>
+          <a:chExt cx="0" cy="0"/>
+        </a:xfrm>
+      </p:grpSpPr>
+      <p:sp>
+        <p:nvSpPr>
+          <p:cNvPr id="2" name="Title 1">
+            <a:extLst>
+              <a:ext uri="{FF2B5EF4-FFF2-40B4-BE49-F238E27FC236}">
                 <a16:creationId xmlns:a16="http://schemas.microsoft.com/office/drawing/2014/main" id="{E0E46C7A-7741-670C-F56F-6DD7B6E2DC4B}"/>
               </a:ext>
             </a:extLst>
@@ -17878,7 +17129,7 @@
 </p:sld>
 </file>
 
-<file path=ppt/slides/slide35.xml><?xml version="1.0" encoding="utf-8"?>
+<file path=ppt/slides/slide36.xml><?xml version="1.0" encoding="utf-8"?>
 <p:sld xmlns:a="http://schemas.openxmlformats.org/drawingml/2006/main" xmlns:r="http://schemas.openxmlformats.org/officeDocument/2006/relationships" xmlns:p="http://schemas.openxmlformats.org/presentationml/2006/main">
   <p:cSld>
     <p:spTree>
@@ -18037,7 +17288,7 @@
 </p:sld>
 </file>
 
-<file path=ppt/slides/slide36.xml><?xml version="1.0" encoding="utf-8"?>
+<file path=ppt/slides/slide37.xml><?xml version="1.0" encoding="utf-8"?>
 <p:sld xmlns:a="http://schemas.openxmlformats.org/drawingml/2006/main" xmlns:r="http://schemas.openxmlformats.org/officeDocument/2006/relationships" xmlns:p="http://schemas.openxmlformats.org/presentationml/2006/main">
   <p:cSld>
     <p:spTree>
@@ -19378,7 +18629,7 @@
           <p:nvPr>
             <p:extLst>
               <p:ext uri="{D42A27DB-BD31-4B8C-83A1-F6EECF244321}">
-                <p14:modId xmlns:p14="http://schemas.microsoft.com/office/powerpoint/2010/main" val="4054253699"/>
+                <p14:modId xmlns:p14="http://schemas.microsoft.com/office/powerpoint/2010/main" val="612829531"/>
               </p:ext>
             </p:extLst>
           </p:nvPr>
